--- a/KSMS_Presentation.pptx
+++ b/KSMS_Presentation.pptx
@@ -14,20 +14,21 @@
     <p:sldMasterId id="2147483666" r:id="rId11"/>
     <p:sldMasterId id="2147483668" r:id="rId12"/>
     <p:sldMasterId id="2147483670" r:id="rId13"/>
+    <p:sldMasterId id="2147483672" r:id="rId14"/>
   </p:sldMasterIdLst>
   <p:sldIdLst>
-    <p:sldId id="256" r:id="rId14"/>
-    <p:sldId id="257" r:id="rId15"/>
-    <p:sldId id="258" r:id="rId16"/>
-    <p:sldId id="259" r:id="rId17"/>
-    <p:sldId id="260" r:id="rId18"/>
-    <p:sldId id="261" r:id="rId19"/>
-    <p:sldId id="262" r:id="rId20"/>
-    <p:sldId id="263" r:id="rId21"/>
-    <p:sldId id="264" r:id="rId22"/>
-    <p:sldId id="265" r:id="rId23"/>
-    <p:sldId id="266" r:id="rId24"/>
-    <p:sldId id="267" r:id="rId25"/>
+    <p:sldId id="256" r:id="rId15"/>
+    <p:sldId id="257" r:id="rId16"/>
+    <p:sldId id="258" r:id="rId17"/>
+    <p:sldId id="259" r:id="rId18"/>
+    <p:sldId id="260" r:id="rId19"/>
+    <p:sldId id="261" r:id="rId20"/>
+    <p:sldId id="262" r:id="rId21"/>
+    <p:sldId id="263" r:id="rId22"/>
+    <p:sldId id="264" r:id="rId23"/>
+    <p:sldId id="265" r:id="rId24"/>
+    <p:sldId id="266" r:id="rId25"/>
+    <p:sldId id="267" r:id="rId26"/>
   </p:sldIdLst>
   <p:sldSz cx="9144000" cy="6858000"/>
   <p:notesSz cx="7559675" cy="10691813"/>
@@ -53,7 +54,7 @@
       </p:grpSpPr>
       <p:sp>
         <p:nvSpPr>
-          <p:cNvPr id="5" name="PlaceHolder 1"/>
+          <p:cNvPr id="4" name="PlaceHolder 1"/>
           <p:cNvSpPr>
             <a:spLocks noGrp="1"/>
           </p:cNvSpPr>
@@ -64,7 +65,7 @@
         <p:spPr>
           <a:xfrm>
             <a:off x="456840" y="-186120"/>
-            <a:ext cx="8229240" cy="2063880"/>
+            <a:ext cx="8228880" cy="2063520"/>
           </a:xfrm>
           <a:prstGeom prst="rect">
             <a:avLst/>
@@ -82,18 +83,18 @@
             <a:pPr indent="0" algn="ctr">
               <a:buNone/>
             </a:pPr>
-            <a:endParaRPr b="0" lang="bg-BG" sz="7269" spc="-1" strike="noStrike">
-              <a:solidFill>
-                <a:srgbClr val="000000"/>
-              </a:solidFill>
-              <a:latin typeface="Arial"/>
-            </a:endParaRPr>
-          </a:p>
-        </p:txBody>
-      </p:sp>
-      <p:sp>
-        <p:nvSpPr>
-          <p:cNvPr id="6" name="PlaceHolder 2"/>
+            <a:endParaRPr b="0" lang="bg-BG" sz="4400" spc="-1" strike="noStrike">
+              <a:solidFill>
+                <a:srgbClr val="000000"/>
+              </a:solidFill>
+              <a:latin typeface="Arial"/>
+            </a:endParaRPr>
+          </a:p>
+        </p:txBody>
+      </p:sp>
+      <p:sp>
+        <p:nvSpPr>
+          <p:cNvPr id="5" name="PlaceHolder 2"/>
           <p:cNvSpPr>
             <a:spLocks noGrp="1"/>
           </p:cNvSpPr>
@@ -103,7 +104,7 @@
         </p:nvSpPr>
         <p:spPr>
           <a:xfrm>
-            <a:off x="456840" y="1604160"/>
+            <a:off x="457200" y="1604520"/>
             <a:ext cx="8229240" cy="3977280"/>
           </a:xfrm>
           <a:prstGeom prst="rect">
@@ -138,7 +139,7 @@
             <a:spLocks noGrp="1"/>
           </p:cNvSpPr>
           <p:nvPr>
-            <p:ph type="ftr" idx="2"/>
+            <p:ph type="ftr" idx="1"/>
           </p:nvPr>
         </p:nvSpPr>
         <p:spPr/>
@@ -158,14 +159,14 @@
             <a:spLocks noGrp="1"/>
           </p:cNvSpPr>
           <p:nvPr>
-            <p:ph type="sldNum" idx="3"/>
+            <p:ph type="sldNum" idx="2"/>
           </p:nvPr>
         </p:nvSpPr>
         <p:spPr/>
         <p:txBody>
           <a:bodyPr/>
           <a:p>
-            <a:fld id="{16323EEF-C506-4D1B-AEB0-B09CBB46FA93}" type="slidenum">
+            <a:fld id="{0976BE59-AB3C-41A8-990B-B1B3D97760D6}" type="slidenum">
               <a:t>&lt;#&gt;</a:t>
             </a:fld>
           </a:p>
@@ -178,7 +179,7 @@
             <a:spLocks noGrp="1"/>
           </p:cNvSpPr>
           <p:nvPr>
-            <p:ph type="dt" idx="1"/>
+            <p:ph type="dt" idx="3"/>
           </p:nvPr>
         </p:nvSpPr>
         <p:spPr/>
@@ -221,7 +222,7 @@
             <a:spLocks noGrp="1"/>
           </p:cNvSpPr>
           <p:nvPr>
-            <p:ph type="ftr" idx="29"/>
+            <p:ph type="ftr" idx="28"/>
           </p:nvPr>
         </p:nvSpPr>
         <p:spPr/>
@@ -241,14 +242,14 @@
             <a:spLocks noGrp="1"/>
           </p:cNvSpPr>
           <p:nvPr>
-            <p:ph type="sldNum" idx="30"/>
+            <p:ph type="sldNum" idx="29"/>
           </p:nvPr>
         </p:nvSpPr>
         <p:spPr/>
         <p:txBody>
           <a:bodyPr/>
           <a:p>
-            <a:fld id="{4C840213-8EFE-404F-9F51-CAC73BB9FCEF}" type="slidenum">
+            <a:fld id="{A49B0840-F865-43DF-A3B0-70149152C16A}" type="slidenum">
               <a:t>&lt;#&gt;</a:t>
             </a:fld>
           </a:p>
@@ -261,7 +262,7 @@
             <a:spLocks noGrp="1"/>
           </p:cNvSpPr>
           <p:nvPr>
-            <p:ph type="dt" idx="28"/>
+            <p:ph type="dt" idx="30"/>
           </p:nvPr>
         </p:nvSpPr>
         <p:spPr/>
@@ -304,7 +305,7 @@
             <a:spLocks noGrp="1"/>
           </p:cNvSpPr>
           <p:nvPr>
-            <p:ph type="ftr" idx="32"/>
+            <p:ph type="ftr" idx="31"/>
           </p:nvPr>
         </p:nvSpPr>
         <p:spPr/>
@@ -324,14 +325,14 @@
             <a:spLocks noGrp="1"/>
           </p:cNvSpPr>
           <p:nvPr>
-            <p:ph type="sldNum" idx="33"/>
+            <p:ph type="sldNum" idx="32"/>
           </p:nvPr>
         </p:nvSpPr>
         <p:spPr/>
         <p:txBody>
           <a:bodyPr/>
           <a:p>
-            <a:fld id="{FA9836E1-300E-4456-9A0D-E018441E7CBC}" type="slidenum">
+            <a:fld id="{2B4848A6-17F8-4AF2-9516-135BEAD25647}" type="slidenum">
               <a:t>&lt;#&gt;</a:t>
             </a:fld>
           </a:p>
@@ -344,7 +345,7 @@
             <a:spLocks noGrp="1"/>
           </p:cNvSpPr>
           <p:nvPr>
-            <p:ph type="dt" idx="31"/>
+            <p:ph type="dt" idx="33"/>
           </p:nvPr>
         </p:nvSpPr>
         <p:spPr/>
@@ -382,7 +383,7 @@
       </p:grpSpPr>
       <p:sp>
         <p:nvSpPr>
-          <p:cNvPr id="69" name="PlaceHolder 1"/>
+          <p:cNvPr id="51" name="PlaceHolder 1"/>
           <p:cNvSpPr>
             <a:spLocks noGrp="1"/>
           </p:cNvSpPr>
@@ -393,7 +394,7 @@
         <p:spPr>
           <a:xfrm>
             <a:off x="456840" y="-186120"/>
-            <a:ext cx="8229240" cy="2063880"/>
+            <a:ext cx="8228880" cy="2063520"/>
           </a:xfrm>
           <a:prstGeom prst="rect">
             <a:avLst/>
@@ -411,18 +412,18 @@
             <a:pPr indent="0" algn="ctr">
               <a:buNone/>
             </a:pPr>
-            <a:endParaRPr b="0" lang="bg-BG" sz="7269" spc="-1" strike="noStrike">
-              <a:solidFill>
-                <a:srgbClr val="000000"/>
-              </a:solidFill>
-              <a:latin typeface="Arial"/>
-            </a:endParaRPr>
-          </a:p>
-        </p:txBody>
-      </p:sp>
-      <p:sp>
-        <p:nvSpPr>
-          <p:cNvPr id="70" name="PlaceHolder 2"/>
+            <a:endParaRPr b="0" lang="bg-BG" sz="4400" spc="-1" strike="noStrike">
+              <a:solidFill>
+                <a:srgbClr val="000000"/>
+              </a:solidFill>
+              <a:latin typeface="Arial"/>
+            </a:endParaRPr>
+          </a:p>
+        </p:txBody>
+      </p:sp>
+      <p:sp>
+        <p:nvSpPr>
+          <p:cNvPr id="52" name="PlaceHolder 2"/>
           <p:cNvSpPr>
             <a:spLocks noGrp="1"/>
           </p:cNvSpPr>
@@ -432,7 +433,7 @@
         </p:nvSpPr>
         <p:spPr>
           <a:xfrm>
-            <a:off x="456840" y="1604160"/>
+            <a:off x="457200" y="1604520"/>
             <a:ext cx="8229240" cy="3977280"/>
           </a:xfrm>
           <a:prstGeom prst="rect">
@@ -450,11 +451,11 @@
           <a:p>
             <a:pPr indent="0">
               <a:spcBef>
-                <a:spcPts val="2069"/>
+                <a:spcPts val="1417"/>
               </a:spcBef>
               <a:buNone/>
             </a:pPr>
-            <a:endParaRPr b="0" lang="bg-BG" sz="4680" spc="-1" strike="noStrike">
+            <a:endParaRPr b="0" lang="bg-BG" sz="3200" spc="-1" strike="noStrike">
               <a:solidFill>
                 <a:srgbClr val="000000"/>
               </a:solidFill>
@@ -470,7 +471,7 @@
 
 <file path=ppt/slideLayouts/slideLayout13.xml><?xml version="1.0" encoding="utf-8"?>
 <p:sldLayout xmlns:a="http://schemas.openxmlformats.org/drawingml/2006/main" xmlns:p="http://schemas.openxmlformats.org/presentationml/2006/main" xmlns:r="http://schemas.openxmlformats.org/officeDocument/2006/relationships" xmlns:p14="http://schemas.microsoft.com/office/powerpoint/2010/main" xmlns:p15="http://schemas.microsoft.com/office/powerpoint/2012/main" xmlns:mc="http://schemas.openxmlformats.org/markup-compatibility/2006" type="title" preserve="1">
-  <p:cSld name="Freshes">
+  <p:cSld name="По подразбиране">
     <p:spTree>
       <p:nvGrpSpPr>
         <p:cNvPr id="1" name=""/>
@@ -487,7 +488,7 @@
       </p:grpSpPr>
       <p:sp>
         <p:nvSpPr>
-          <p:cNvPr id="71" name="PlaceHolder 1"/>
+          <p:cNvPr id="56" name="PlaceHolder 1"/>
           <p:cNvSpPr>
             <a:spLocks noGrp="1"/>
           </p:cNvSpPr>
@@ -498,7 +499,7 @@
         <p:spPr>
           <a:xfrm>
             <a:off x="456840" y="-186120"/>
-            <a:ext cx="8229240" cy="2063880"/>
+            <a:ext cx="8228880" cy="2063520"/>
           </a:xfrm>
           <a:prstGeom prst="rect">
             <a:avLst/>
@@ -516,18 +517,18 @@
             <a:pPr indent="0" algn="ctr">
               <a:buNone/>
             </a:pPr>
-            <a:endParaRPr b="0" lang="bg-BG" sz="7269" spc="-1" strike="noStrike">
-              <a:solidFill>
-                <a:srgbClr val="000000"/>
-              </a:solidFill>
-              <a:latin typeface="Arial"/>
-            </a:endParaRPr>
-          </a:p>
-        </p:txBody>
-      </p:sp>
-      <p:sp>
-        <p:nvSpPr>
-          <p:cNvPr id="72" name="PlaceHolder 2"/>
+            <a:endParaRPr b="0" lang="bg-BG" sz="4400" spc="-1" strike="noStrike">
+              <a:solidFill>
+                <a:srgbClr val="000000"/>
+              </a:solidFill>
+              <a:latin typeface="Arial"/>
+            </a:endParaRPr>
+          </a:p>
+        </p:txBody>
+      </p:sp>
+      <p:sp>
+        <p:nvSpPr>
+          <p:cNvPr id="57" name="PlaceHolder 2"/>
           <p:cNvSpPr>
             <a:spLocks noGrp="1"/>
           </p:cNvSpPr>
@@ -537,7 +538,7 @@
         </p:nvSpPr>
         <p:spPr>
           <a:xfrm>
-            <a:off x="456840" y="1604160"/>
+            <a:off x="457200" y="1604520"/>
             <a:ext cx="8229240" cy="3977280"/>
           </a:xfrm>
           <a:prstGeom prst="rect">
@@ -594,7 +595,7 @@
             <a:spLocks noGrp="1"/>
           </p:cNvSpPr>
           <p:nvPr>
-            <p:ph type="ftr" idx="5"/>
+            <p:ph type="ftr" idx="4"/>
           </p:nvPr>
         </p:nvSpPr>
         <p:spPr/>
@@ -614,14 +615,14 @@
             <a:spLocks noGrp="1"/>
           </p:cNvSpPr>
           <p:nvPr>
-            <p:ph type="sldNum" idx="6"/>
+            <p:ph type="sldNum" idx="5"/>
           </p:nvPr>
         </p:nvSpPr>
         <p:spPr/>
         <p:txBody>
           <a:bodyPr/>
           <a:p>
-            <a:fld id="{80597B37-1633-4C3E-8D2C-00CC8D8177B4}" type="slidenum">
+            <a:fld id="{EF67E032-531A-40BD-BAFE-D22AFC2C102E}" type="slidenum">
               <a:t>&lt;#&gt;</a:t>
             </a:fld>
           </a:p>
@@ -634,7 +635,7 @@
             <a:spLocks noGrp="1"/>
           </p:cNvSpPr>
           <p:nvPr>
-            <p:ph type="dt" idx="4"/>
+            <p:ph type="dt" idx="6"/>
           </p:nvPr>
         </p:nvSpPr>
         <p:spPr/>
@@ -677,7 +678,7 @@
             <a:spLocks noGrp="1"/>
           </p:cNvSpPr>
           <p:nvPr>
-            <p:ph type="ftr" idx="8"/>
+            <p:ph type="ftr" idx="7"/>
           </p:nvPr>
         </p:nvSpPr>
         <p:spPr/>
@@ -697,14 +698,14 @@
             <a:spLocks noGrp="1"/>
           </p:cNvSpPr>
           <p:nvPr>
-            <p:ph type="sldNum" idx="9"/>
+            <p:ph type="sldNum" idx="8"/>
           </p:nvPr>
         </p:nvSpPr>
         <p:spPr/>
         <p:txBody>
           <a:bodyPr/>
           <a:p>
-            <a:fld id="{BA938C0F-5699-4BF5-8CA4-B638CEE29A84}" type="slidenum">
+            <a:fld id="{65BA0D23-56DF-485B-8865-6C6542ED22F1}" type="slidenum">
               <a:t>&lt;#&gt;</a:t>
             </a:fld>
           </a:p>
@@ -717,7 +718,7 @@
             <a:spLocks noGrp="1"/>
           </p:cNvSpPr>
           <p:nvPr>
-            <p:ph type="dt" idx="7"/>
+            <p:ph type="dt" idx="9"/>
           </p:nvPr>
         </p:nvSpPr>
         <p:spPr/>
@@ -755,7 +756,7 @@
       </p:grpSpPr>
       <p:sp>
         <p:nvSpPr>
-          <p:cNvPr id="22" name="PlaceHolder 1"/>
+          <p:cNvPr id="17" name="PlaceHolder 1"/>
           <p:cNvSpPr>
             <a:spLocks noGrp="1"/>
           </p:cNvSpPr>
@@ -766,7 +767,7 @@
         <p:spPr>
           <a:xfrm>
             <a:off x="456840" y="-186120"/>
-            <a:ext cx="8229240" cy="2063880"/>
+            <a:ext cx="8228880" cy="2063520"/>
           </a:xfrm>
           <a:prstGeom prst="rect">
             <a:avLst/>
@@ -784,18 +785,18 @@
             <a:pPr indent="0" algn="ctr">
               <a:buNone/>
             </a:pPr>
-            <a:endParaRPr b="0" lang="bg-BG" sz="7269" spc="-1" strike="noStrike">
-              <a:solidFill>
-                <a:srgbClr val="000000"/>
-              </a:solidFill>
-              <a:latin typeface="Arial"/>
-            </a:endParaRPr>
-          </a:p>
-        </p:txBody>
-      </p:sp>
-      <p:sp>
-        <p:nvSpPr>
-          <p:cNvPr id="23" name="PlaceHolder 2"/>
+            <a:endParaRPr b="0" lang="bg-BG" sz="4400" spc="-1" strike="noStrike">
+              <a:solidFill>
+                <a:srgbClr val="000000"/>
+              </a:solidFill>
+              <a:latin typeface="Arial"/>
+            </a:endParaRPr>
+          </a:p>
+        </p:txBody>
+      </p:sp>
+      <p:sp>
+        <p:nvSpPr>
+          <p:cNvPr id="18" name="PlaceHolder 2"/>
           <p:cNvSpPr>
             <a:spLocks noGrp="1"/>
           </p:cNvSpPr>
@@ -805,7 +806,7 @@
         </p:nvSpPr>
         <p:spPr>
           <a:xfrm>
-            <a:off x="456840" y="1604160"/>
+            <a:off x="457200" y="1604520"/>
             <a:ext cx="8229240" cy="3977280"/>
           </a:xfrm>
           <a:prstGeom prst="rect">
@@ -823,11 +824,11 @@
           <a:p>
             <a:pPr indent="0">
               <a:spcBef>
-                <a:spcPts val="2069"/>
+                <a:spcPts val="1417"/>
               </a:spcBef>
               <a:buNone/>
             </a:pPr>
-            <a:endParaRPr b="0" lang="bg-BG" sz="4680" spc="-1" strike="noStrike">
+            <a:endParaRPr b="0" lang="bg-BG" sz="3200" spc="-1" strike="noStrike">
               <a:solidFill>
                 <a:srgbClr val="000000"/>
               </a:solidFill>
@@ -843,7 +844,7 @@
             <a:spLocks noGrp="1"/>
           </p:cNvSpPr>
           <p:nvPr>
-            <p:ph type="ftr" idx="11"/>
+            <p:ph type="ftr" idx="10"/>
           </p:nvPr>
         </p:nvSpPr>
         <p:spPr/>
@@ -863,14 +864,14 @@
             <a:spLocks noGrp="1"/>
           </p:cNvSpPr>
           <p:nvPr>
-            <p:ph type="sldNum" idx="12"/>
+            <p:ph type="sldNum" idx="11"/>
           </p:nvPr>
         </p:nvSpPr>
         <p:spPr/>
         <p:txBody>
           <a:bodyPr/>
           <a:p>
-            <a:fld id="{FAD34E34-4659-4EC0-B7D1-4209E9F3544C}" type="slidenum">
+            <a:fld id="{0F7D456C-5C9C-4499-93F3-D7B0DC745882}" type="slidenum">
               <a:t>&lt;#&gt;</a:t>
             </a:fld>
           </a:p>
@@ -883,7 +884,7 @@
             <a:spLocks noGrp="1"/>
           </p:cNvSpPr>
           <p:nvPr>
-            <p:ph type="dt" idx="10"/>
+            <p:ph type="dt" idx="12"/>
           </p:nvPr>
         </p:nvSpPr>
         <p:spPr/>
@@ -926,7 +927,7 @@
             <a:spLocks noGrp="1"/>
           </p:cNvSpPr>
           <p:nvPr>
-            <p:ph type="ftr" idx="14"/>
+            <p:ph type="ftr" idx="13"/>
           </p:nvPr>
         </p:nvSpPr>
         <p:spPr/>
@@ -946,14 +947,14 @@
             <a:spLocks noGrp="1"/>
           </p:cNvSpPr>
           <p:nvPr>
-            <p:ph type="sldNum" idx="15"/>
+            <p:ph type="sldNum" idx="14"/>
           </p:nvPr>
         </p:nvSpPr>
         <p:spPr/>
         <p:txBody>
           <a:bodyPr/>
           <a:p>
-            <a:fld id="{3E19EF63-4BF3-4369-8081-90B9B95F4BD7}" type="slidenum">
+            <a:fld id="{F227BA8D-0762-4842-A684-1DCC20B479D2}" type="slidenum">
               <a:t>&lt;#&gt;</a:t>
             </a:fld>
           </a:p>
@@ -966,7 +967,7 @@
             <a:spLocks noGrp="1"/>
           </p:cNvSpPr>
           <p:nvPr>
-            <p:ph type="dt" idx="13"/>
+            <p:ph type="dt" idx="15"/>
           </p:nvPr>
         </p:nvSpPr>
         <p:spPr/>
@@ -1004,7 +1005,7 @@
       </p:grpSpPr>
       <p:sp>
         <p:nvSpPr>
-          <p:cNvPr id="35" name="PlaceHolder 1"/>
+          <p:cNvPr id="28" name="PlaceHolder 1"/>
           <p:cNvSpPr>
             <a:spLocks noGrp="1"/>
           </p:cNvSpPr>
@@ -1015,7 +1016,7 @@
         <p:spPr>
           <a:xfrm>
             <a:off x="456840" y="-186120"/>
-            <a:ext cx="8229240" cy="2063880"/>
+            <a:ext cx="8228880" cy="2063520"/>
           </a:xfrm>
           <a:prstGeom prst="rect">
             <a:avLst/>
@@ -1033,18 +1034,18 @@
             <a:pPr indent="0" algn="ctr">
               <a:buNone/>
             </a:pPr>
-            <a:endParaRPr b="0" lang="bg-BG" sz="7269" spc="-1" strike="noStrike">
-              <a:solidFill>
-                <a:srgbClr val="000000"/>
-              </a:solidFill>
-              <a:latin typeface="Arial"/>
-            </a:endParaRPr>
-          </a:p>
-        </p:txBody>
-      </p:sp>
-      <p:sp>
-        <p:nvSpPr>
-          <p:cNvPr id="36" name="PlaceHolder 2"/>
+            <a:endParaRPr b="0" lang="bg-BG" sz="4400" spc="-1" strike="noStrike">
+              <a:solidFill>
+                <a:srgbClr val="000000"/>
+              </a:solidFill>
+              <a:latin typeface="Arial"/>
+            </a:endParaRPr>
+          </a:p>
+        </p:txBody>
+      </p:sp>
+      <p:sp>
+        <p:nvSpPr>
+          <p:cNvPr id="29" name="PlaceHolder 2"/>
           <p:cNvSpPr>
             <a:spLocks noGrp="1"/>
           </p:cNvSpPr>
@@ -1054,7 +1055,7 @@
         </p:nvSpPr>
         <p:spPr>
           <a:xfrm>
-            <a:off x="456840" y="1604160"/>
+            <a:off x="457200" y="1604520"/>
             <a:ext cx="4015800" cy="3977280"/>
           </a:xfrm>
           <a:prstGeom prst="rect">
@@ -1072,22 +1073,22 @@
           <a:p>
             <a:pPr indent="0">
               <a:spcBef>
-                <a:spcPts val="2069"/>
+                <a:spcPts val="1417"/>
               </a:spcBef>
               <a:buNone/>
             </a:pPr>
-            <a:endParaRPr b="0" lang="bg-BG" sz="4680" spc="-1" strike="noStrike">
-              <a:solidFill>
-                <a:srgbClr val="000000"/>
-              </a:solidFill>
-              <a:latin typeface="Arial"/>
-            </a:endParaRPr>
-          </a:p>
-        </p:txBody>
-      </p:sp>
-      <p:sp>
-        <p:nvSpPr>
-          <p:cNvPr id="37" name="PlaceHolder 3"/>
+            <a:endParaRPr b="0" lang="bg-BG" sz="3200" spc="-1" strike="noStrike">
+              <a:solidFill>
+                <a:srgbClr val="000000"/>
+              </a:solidFill>
+              <a:latin typeface="Arial"/>
+            </a:endParaRPr>
+          </a:p>
+        </p:txBody>
+      </p:sp>
+      <p:sp>
+        <p:nvSpPr>
+          <p:cNvPr id="30" name="PlaceHolder 3"/>
           <p:cNvSpPr>
             <a:spLocks noGrp="1"/>
           </p:cNvSpPr>
@@ -1097,7 +1098,7 @@
         </p:nvSpPr>
         <p:spPr>
           <a:xfrm>
-            <a:off x="4673880" y="1604160"/>
+            <a:off x="4674240" y="1604520"/>
             <a:ext cx="4015800" cy="3977280"/>
           </a:xfrm>
           <a:prstGeom prst="rect">
@@ -1115,11 +1116,11 @@
           <a:p>
             <a:pPr indent="0">
               <a:spcBef>
-                <a:spcPts val="2069"/>
+                <a:spcPts val="1417"/>
               </a:spcBef>
               <a:buNone/>
             </a:pPr>
-            <a:endParaRPr b="0" lang="bg-BG" sz="4680" spc="-1" strike="noStrike">
+            <a:endParaRPr b="0" lang="bg-BG" sz="3200" spc="-1" strike="noStrike">
               <a:solidFill>
                 <a:srgbClr val="000000"/>
               </a:solidFill>
@@ -1135,7 +1136,7 @@
             <a:spLocks noGrp="1"/>
           </p:cNvSpPr>
           <p:nvPr>
-            <p:ph type="ftr" idx="17"/>
+            <p:ph type="ftr" idx="16"/>
           </p:nvPr>
         </p:nvSpPr>
         <p:spPr/>
@@ -1155,14 +1156,14 @@
             <a:spLocks noGrp="1"/>
           </p:cNvSpPr>
           <p:nvPr>
-            <p:ph type="sldNum" idx="18"/>
+            <p:ph type="sldNum" idx="17"/>
           </p:nvPr>
         </p:nvSpPr>
         <p:spPr/>
         <p:txBody>
           <a:bodyPr/>
           <a:p>
-            <a:fld id="{A4FB110E-978B-462C-AD1F-0E31B9B21F47}" type="slidenum">
+            <a:fld id="{3BC5935B-603F-47D8-874F-C8C0A6BEE60A}" type="slidenum">
               <a:t>&lt;#&gt;</a:t>
             </a:fld>
           </a:p>
@@ -1175,7 +1176,7 @@
             <a:spLocks noGrp="1"/>
           </p:cNvSpPr>
           <p:nvPr>
-            <p:ph type="dt" idx="16"/>
+            <p:ph type="dt" idx="18"/>
           </p:nvPr>
         </p:nvSpPr>
         <p:spPr/>
@@ -1218,7 +1219,7 @@
             <a:spLocks noGrp="1"/>
           </p:cNvSpPr>
           <p:nvPr>
-            <p:ph type="ftr" idx="20"/>
+            <p:ph type="ftr" idx="19"/>
           </p:nvPr>
         </p:nvSpPr>
         <p:spPr/>
@@ -1238,14 +1239,14 @@
             <a:spLocks noGrp="1"/>
           </p:cNvSpPr>
           <p:nvPr>
-            <p:ph type="sldNum" idx="21"/>
+            <p:ph type="sldNum" idx="20"/>
           </p:nvPr>
         </p:nvSpPr>
         <p:spPr/>
         <p:txBody>
           <a:bodyPr/>
           <a:p>
-            <a:fld id="{1AF49BFA-93E3-4106-997E-74E71A7AD489}" type="slidenum">
+            <a:fld id="{E34EA13D-4F8F-4DF8-8D88-F27CA59CF39A}" type="slidenum">
               <a:t>&lt;#&gt;</a:t>
             </a:fld>
           </a:p>
@@ -1258,7 +1259,7 @@
             <a:spLocks noGrp="1"/>
           </p:cNvSpPr>
           <p:nvPr>
-            <p:ph type="dt" idx="19"/>
+            <p:ph type="dt" idx="21"/>
           </p:nvPr>
         </p:nvSpPr>
         <p:spPr/>
@@ -1296,7 +1297,7 @@
       </p:grpSpPr>
       <p:sp>
         <p:nvSpPr>
-          <p:cNvPr id="50" name="PlaceHolder 1"/>
+          <p:cNvPr id="38" name="PlaceHolder 1"/>
           <p:cNvSpPr>
             <a:spLocks noGrp="1"/>
           </p:cNvSpPr>
@@ -1307,7 +1308,7 @@
         <p:spPr>
           <a:xfrm>
             <a:off x="456840" y="-186120"/>
-            <a:ext cx="8229240" cy="2063880"/>
+            <a:ext cx="8228880" cy="2063520"/>
           </a:xfrm>
           <a:prstGeom prst="rect">
             <a:avLst/>
@@ -1325,7 +1326,7 @@
             <a:pPr indent="0" algn="ctr">
               <a:buNone/>
             </a:pPr>
-            <a:endParaRPr b="0" lang="bg-BG" sz="7269" spc="-1" strike="noStrike">
+            <a:endParaRPr b="0" lang="bg-BG" sz="4400" spc="-1" strike="noStrike">
               <a:solidFill>
                 <a:srgbClr val="000000"/>
               </a:solidFill>
@@ -1341,7 +1342,7 @@
             <a:spLocks noGrp="1"/>
           </p:cNvSpPr>
           <p:nvPr>
-            <p:ph type="ftr" idx="23"/>
+            <p:ph type="ftr" idx="22"/>
           </p:nvPr>
         </p:nvSpPr>
         <p:spPr/>
@@ -1361,14 +1362,14 @@
             <a:spLocks noGrp="1"/>
           </p:cNvSpPr>
           <p:nvPr>
-            <p:ph type="sldNum" idx="24"/>
+            <p:ph type="sldNum" idx="23"/>
           </p:nvPr>
         </p:nvSpPr>
         <p:spPr/>
         <p:txBody>
           <a:bodyPr/>
           <a:p>
-            <a:fld id="{1E4FBE8E-44E8-43CF-A713-9701B6B4F0F8}" type="slidenum">
+            <a:fld id="{89B1FB54-24AC-41DA-B2B1-EC08A7D8999E}" type="slidenum">
               <a:t>&lt;#&gt;</a:t>
             </a:fld>
           </a:p>
@@ -1381,7 +1382,7 @@
             <a:spLocks noGrp="1"/>
           </p:cNvSpPr>
           <p:nvPr>
-            <p:ph type="dt" idx="22"/>
+            <p:ph type="dt" idx="24"/>
           </p:nvPr>
         </p:nvSpPr>
         <p:spPr/>
@@ -1424,7 +1425,7 @@
             <a:spLocks noGrp="1"/>
           </p:cNvSpPr>
           <p:nvPr>
-            <p:ph type="ftr" idx="26"/>
+            <p:ph type="ftr" idx="25"/>
           </p:nvPr>
         </p:nvSpPr>
         <p:spPr/>
@@ -1444,14 +1445,14 @@
             <a:spLocks noGrp="1"/>
           </p:cNvSpPr>
           <p:nvPr>
-            <p:ph type="sldNum" idx="27"/>
+            <p:ph type="sldNum" idx="26"/>
           </p:nvPr>
         </p:nvSpPr>
         <p:spPr/>
         <p:txBody>
           <a:bodyPr/>
           <a:p>
-            <a:fld id="{D2B06AE9-099D-462D-9906-0341A0EF7975}" type="slidenum">
+            <a:fld id="{1EB5A1F5-C48D-4EA4-A6C1-15E17461EF4A}" type="slidenum">
               <a:t>&lt;#&gt;</a:t>
             </a:fld>
           </a:p>
@@ -1464,7 +1465,7 @@
             <a:spLocks noGrp="1"/>
           </p:cNvSpPr>
           <p:nvPr>
-            <p:ph type="dt" idx="25"/>
+            <p:ph type="dt" idx="27"/>
           </p:nvPr>
         </p:nvSpPr>
         <p:spPr/>
@@ -1519,8 +1520,8 @@
         </p:nvSpPr>
         <p:spPr>
           <a:xfrm>
-            <a:off x="685800" y="2130480"/>
-            <a:ext cx="7772040" cy="1469520"/>
+            <a:off x="456840" y="-186120"/>
+            <a:ext cx="8228880" cy="2063520"/>
           </a:xfrm>
           <a:prstGeom prst="rect">
             <a:avLst/>
@@ -1531,30 +1532,27 @@
           </a:ln>
         </p:spPr>
         <p:txBody>
-          <a:bodyPr lIns="91440" rIns="91440" tIns="45720" bIns="45720" anchor="ctr">
+          <a:bodyPr lIns="0" rIns="0" tIns="0" bIns="0" anchor="ctr">
             <a:noAutofit/>
           </a:bodyPr>
           <a:p>
-            <a:pPr indent="0" algn="ctr" defTabSz="457200">
-              <a:lnSpc>
-                <a:spcPct val="100000"/>
-              </a:lnSpc>
-              <a:buNone/>
-            </a:pPr>
-            <a:r>
-              <a:rPr b="0" lang="en-US" sz="4400" spc="-1" strike="noStrike">
-                <a:solidFill>
-                  <a:schemeClr val="dk1"/>
-                </a:solidFill>
-                <a:latin typeface="Calibri"/>
-              </a:rPr>
-              <a:t>Click to edit Master title style</a:t>
-            </a:r>
-            <a:endParaRPr b="0" lang="en-US" sz="4400" spc="-1" strike="noStrike">
-              <a:solidFill>
-                <a:schemeClr val="dk1"/>
-              </a:solidFill>
-              <a:latin typeface="Calibri"/>
+            <a:pPr indent="0">
+              <a:buNone/>
+            </a:pPr>
+            <a:r>
+              <a:rPr b="0" lang="bg-BG" sz="1800" spc="-1" strike="noStrike">
+                <a:solidFill>
+                  <a:srgbClr val="000000"/>
+                </a:solidFill>
+                <a:latin typeface="Arial"/>
+              </a:rPr>
+              <a:t>Щракнете, за да редактирате формата на заглавието</a:t>
+            </a:r>
+            <a:endParaRPr b="0" lang="bg-BG" sz="1800" spc="-1" strike="noStrike">
+              <a:solidFill>
+                <a:srgbClr val="000000"/>
+              </a:solidFill>
+              <a:latin typeface="Arial"/>
             </a:endParaRPr>
           </a:p>
         </p:txBody>
@@ -1566,13 +1564,13 @@
             <a:spLocks noGrp="1"/>
           </p:cNvSpPr>
           <p:nvPr>
-            <p:ph type="dt" idx="1"/>
+            <p:ph type="ftr" idx="1"/>
           </p:nvPr>
         </p:nvSpPr>
         <p:spPr>
           <a:xfrm>
-            <a:off x="457200" y="6356520"/>
-            <a:ext cx="2133360" cy="364680"/>
+            <a:off x="3124080" y="6356520"/>
+            <a:ext cx="2894760" cy="364320"/>
           </a:xfrm>
           <a:prstGeom prst="rect">
             <a:avLst/>
@@ -1587,40 +1585,42 @@
             <a:noAutofit/>
           </a:bodyPr>
           <a:lstStyle>
-            <a:lvl1pPr indent="0" defTabSz="457200">
-              <a:lnSpc>
-                <a:spcPct val="100000"/>
-              </a:lnSpc>
-              <a:buNone/>
-              <a:defRPr b="0" lang="en-US" sz="1200" spc="-1" strike="noStrike">
-                <a:solidFill>
-                  <a:schemeClr val="dk1">
-                    <a:tint val="75000"/>
-                  </a:schemeClr>
-                </a:solidFill>
-                <a:latin typeface="Calibri"/>
+            <a:lvl1pPr indent="0" algn="ctr">
+              <a:lnSpc>
+                <a:spcPct val="100000"/>
+              </a:lnSpc>
+              <a:buNone/>
+              <a:tabLst>
+                <a:tab algn="l" pos="0"/>
+              </a:tabLst>
+              <a:defRPr b="0" lang="bg-BG" sz="1400" spc="-1" strike="noStrike">
+                <a:solidFill>
+                  <a:srgbClr val="000000"/>
+                </a:solidFill>
+                <a:latin typeface="Times New Roman"/>
               </a:defRPr>
             </a:lvl1pPr>
           </a:lstStyle>
           <a:p>
-            <a:pPr indent="0" defTabSz="457200">
-              <a:lnSpc>
-                <a:spcPct val="100000"/>
-              </a:lnSpc>
-              <a:buNone/>
-            </a:pPr>
-            <a:r>
-              <a:rPr b="0" lang="en-US" sz="1200" spc="-1" strike="noStrike">
-                <a:solidFill>
-                  <a:schemeClr val="dk1">
-                    <a:tint val="75000"/>
-                  </a:schemeClr>
-                </a:solidFill>
-                <a:latin typeface="Calibri"/>
-              </a:rPr>
-              <a:t>&lt;дата/час&gt;</a:t>
-            </a:r>
-            <a:endParaRPr b="0" lang="bg-BG" sz="1200" spc="-1" strike="noStrike">
+            <a:pPr indent="0" algn="ctr">
+              <a:lnSpc>
+                <a:spcPct val="100000"/>
+              </a:lnSpc>
+              <a:buNone/>
+              <a:tabLst>
+                <a:tab algn="l" pos="0"/>
+              </a:tabLst>
+            </a:pPr>
+            <a:r>
+              <a:rPr b="0" lang="bg-BG" sz="1400" spc="-1" strike="noStrike">
+                <a:solidFill>
+                  <a:srgbClr val="000000"/>
+                </a:solidFill>
+                <a:latin typeface="Times New Roman"/>
+              </a:rPr>
+              <a:t>&lt;долен колонтитул&gt;</a:t>
+            </a:r>
+            <a:endParaRPr b="0" lang="bg-BG" sz="1400" spc="-1" strike="noStrike">
               <a:solidFill>
                 <a:srgbClr val="000000"/>
               </a:solidFill>
@@ -1636,13 +1636,13 @@
             <a:spLocks noGrp="1"/>
           </p:cNvSpPr>
           <p:nvPr>
-            <p:ph type="ftr" idx="2"/>
+            <p:ph type="sldNum" idx="2"/>
           </p:nvPr>
         </p:nvSpPr>
         <p:spPr>
           <a:xfrm>
-            <a:off x="3124080" y="6356520"/>
-            <a:ext cx="2895120" cy="364680"/>
+            <a:off x="6553080" y="6356520"/>
+            <a:ext cx="2133000" cy="364320"/>
           </a:xfrm>
           <a:prstGeom prst="rect">
             <a:avLst/>
@@ -1657,30 +1657,46 @@
             <a:noAutofit/>
           </a:bodyPr>
           <a:lstStyle>
-            <a:lvl1pPr indent="0" algn="ctr">
-              <a:buNone/>
-              <a:defRPr b="0" lang="bg-BG" sz="1400" spc="-1" strike="noStrike">
-                <a:solidFill>
-                  <a:srgbClr val="000000"/>
-                </a:solidFill>
-                <a:latin typeface="Times New Roman"/>
+            <a:lvl1pPr indent="0" algn="r" defTabSz="457200">
+              <a:lnSpc>
+                <a:spcPct val="100000"/>
+              </a:lnSpc>
+              <a:buNone/>
+              <a:tabLst>
+                <a:tab algn="l" pos="0"/>
+              </a:tabLst>
+              <a:defRPr b="0" lang="en-US" sz="1200" spc="-1" strike="noStrike">
+                <a:solidFill>
+                  <a:schemeClr val="dk1">
+                    <a:tint val="75000"/>
+                  </a:schemeClr>
+                </a:solidFill>
+                <a:latin typeface="Calibri"/>
               </a:defRPr>
             </a:lvl1pPr>
           </a:lstStyle>
           <a:p>
-            <a:pPr indent="0" algn="ctr">
-              <a:buNone/>
-            </a:pPr>
-            <a:r>
-              <a:rPr b="0" lang="bg-BG" sz="1400" spc="-1" strike="noStrike">
-                <a:solidFill>
-                  <a:srgbClr val="000000"/>
-                </a:solidFill>
-                <a:latin typeface="Times New Roman"/>
-              </a:rPr>
-              <a:t>&lt;долен колонтитул&gt;</a:t>
-            </a:r>
-            <a:endParaRPr b="0" lang="bg-BG" sz="1400" spc="-1" strike="noStrike">
+            <a:pPr indent="0" algn="r" defTabSz="457200">
+              <a:lnSpc>
+                <a:spcPct val="100000"/>
+              </a:lnSpc>
+              <a:buNone/>
+              <a:tabLst>
+                <a:tab algn="l" pos="0"/>
+              </a:tabLst>
+            </a:pPr>
+            <a:fld id="{A7AB770C-AC5F-40F7-8C46-F10E1F94E162}" type="slidenum">
+              <a:rPr b="0" lang="en-US" sz="1200" spc="-1" strike="noStrike">
+                <a:solidFill>
+                  <a:schemeClr val="dk1">
+                    <a:tint val="75000"/>
+                  </a:schemeClr>
+                </a:solidFill>
+                <a:latin typeface="Calibri"/>
+              </a:rPr>
+              <a:t>&lt;число&gt;</a:t>
+            </a:fld>
+            <a:endParaRPr b="0" lang="bg-BG" sz="1200" spc="-1" strike="noStrike">
               <a:solidFill>
                 <a:srgbClr val="000000"/>
               </a:solidFill>
@@ -1696,13 +1712,13 @@
             <a:spLocks noGrp="1"/>
           </p:cNvSpPr>
           <p:nvPr>
-            <p:ph type="sldNum" idx="3"/>
+            <p:ph type="dt" idx="3"/>
           </p:nvPr>
         </p:nvSpPr>
         <p:spPr>
           <a:xfrm>
-            <a:off x="6553080" y="6356520"/>
-            <a:ext cx="2133360" cy="364680"/>
+            <a:off x="457200" y="6356520"/>
+            <a:ext cx="2133000" cy="364320"/>
           </a:xfrm>
           <a:prstGeom prst="rect">
             <a:avLst/>
@@ -1717,269 +1733,34 @@
             <a:noAutofit/>
           </a:bodyPr>
           <a:lstStyle>
-            <a:lvl1pPr indent="0" algn="r" defTabSz="457200">
-              <a:lnSpc>
-                <a:spcPct val="100000"/>
-              </a:lnSpc>
-              <a:buNone/>
-              <a:defRPr b="0" lang="en-US" sz="1200" spc="-1" strike="noStrike">
-                <a:solidFill>
-                  <a:schemeClr val="dk1">
-                    <a:tint val="75000"/>
-                  </a:schemeClr>
-                </a:solidFill>
-                <a:latin typeface="Calibri"/>
+            <a:lvl1pPr indent="0">
+              <a:buNone/>
+              <a:defRPr b="0" lang="bg-BG" sz="1400" spc="-1" strike="noStrike">
+                <a:solidFill>
+                  <a:srgbClr val="000000"/>
+                </a:solidFill>
+                <a:latin typeface="Times New Roman"/>
               </a:defRPr>
             </a:lvl1pPr>
           </a:lstStyle>
           <a:p>
-            <a:pPr indent="0" algn="r" defTabSz="457200">
-              <a:lnSpc>
-                <a:spcPct val="100000"/>
-              </a:lnSpc>
-              <a:buNone/>
-            </a:pPr>
-            <a:fld id="{23FDFB7C-59D0-4114-861E-879834192FA4}" type="slidenum">
-              <a:rPr b="0" lang="en-US" sz="1200" spc="-1" strike="noStrike">
-                <a:solidFill>
-                  <a:schemeClr val="dk1">
-                    <a:tint val="75000"/>
-                  </a:schemeClr>
-                </a:solidFill>
-                <a:latin typeface="Calibri"/>
-              </a:rPr>
-              <a:t>&lt;число&gt;</a:t>
-            </a:fld>
-            <a:endParaRPr b="0" lang="bg-BG" sz="1200" spc="-1" strike="noStrike">
+            <a:pPr indent="0">
+              <a:buNone/>
+            </a:pPr>
+            <a:r>
+              <a:rPr b="0" lang="bg-BG" sz="1400" spc="-1" strike="noStrike">
+                <a:solidFill>
+                  <a:srgbClr val="000000"/>
+                </a:solidFill>
+                <a:latin typeface="Times New Roman"/>
+              </a:rPr>
+              <a:t>&lt;дата/час&gt;</a:t>
+            </a:r>
+            <a:endParaRPr b="0" lang="bg-BG" sz="1400" spc="-1" strike="noStrike">
               <a:solidFill>
                 <a:srgbClr val="000000"/>
               </a:solidFill>
               <a:latin typeface="Times New Roman"/>
-            </a:endParaRPr>
-          </a:p>
-        </p:txBody>
-      </p:sp>
-      <p:sp>
-        <p:nvSpPr>
-          <p:cNvPr id="4" name="PlaceHolder 5"/>
-          <p:cNvSpPr>
-            <a:spLocks noGrp="1"/>
-          </p:cNvSpPr>
-          <p:nvPr>
-            <p:ph type="body"/>
-          </p:nvPr>
-        </p:nvSpPr>
-        <p:spPr>
-          <a:xfrm>
-            <a:off x="457200" y="1604520"/>
-            <a:ext cx="8229240" cy="3977280"/>
-          </a:xfrm>
-          <a:prstGeom prst="rect">
-            <a:avLst/>
-          </a:prstGeom>
-          <a:noFill/>
-          <a:ln w="0">
-            <a:noFill/>
-          </a:ln>
-        </p:spPr>
-        <p:txBody>
-          <a:bodyPr lIns="0" rIns="0" tIns="0" bIns="0" anchor="t">
-            <a:normAutofit/>
-          </a:bodyPr>
-          <a:p>
-            <a:pPr marL="432000" indent="-324000">
-              <a:spcBef>
-                <a:spcPts val="1417"/>
-              </a:spcBef>
-              <a:buClr>
-                <a:srgbClr val="000000"/>
-              </a:buClr>
-              <a:buSzPct val="45000"/>
-              <a:buFont typeface="Wingdings" charset="2"/>
-              <a:buChar char=""/>
-            </a:pPr>
-            <a:r>
-              <a:rPr b="0" lang="en-US" sz="3200" spc="-1" strike="noStrike">
-                <a:solidFill>
-                  <a:schemeClr val="dk1"/>
-                </a:solidFill>
-                <a:latin typeface="Calibri"/>
-              </a:rPr>
-              <a:t>Щракнете, за да редактирате формата на плана</a:t>
-            </a:r>
-            <a:endParaRPr b="0" lang="en-US" sz="3200" spc="-1" strike="noStrike">
-              <a:solidFill>
-                <a:schemeClr val="dk1"/>
-              </a:solidFill>
-              <a:latin typeface="Calibri"/>
-            </a:endParaRPr>
-          </a:p>
-          <a:p>
-            <a:pPr lvl="1" marL="864000" indent="-324000">
-              <a:spcBef>
-                <a:spcPts val="1134"/>
-              </a:spcBef>
-              <a:buClr>
-                <a:srgbClr val="000000"/>
-              </a:buClr>
-              <a:buSzPct val="75000"/>
-              <a:buFont typeface="Symbol" charset="2"/>
-              <a:buChar char=""/>
-            </a:pPr>
-            <a:r>
-              <a:rPr b="0" lang="en-US" sz="2400" spc="-1" strike="noStrike">
-                <a:solidFill>
-                  <a:schemeClr val="dk1"/>
-                </a:solidFill>
-                <a:latin typeface="Calibri"/>
-              </a:rPr>
-              <a:t>Второ ниво на плана</a:t>
-            </a:r>
-            <a:endParaRPr b="0" lang="en-US" sz="2400" spc="-1" strike="noStrike">
-              <a:solidFill>
-                <a:schemeClr val="dk1"/>
-              </a:solidFill>
-              <a:latin typeface="Calibri"/>
-            </a:endParaRPr>
-          </a:p>
-          <a:p>
-            <a:pPr lvl="2" marL="1296000" indent="-288000">
-              <a:spcBef>
-                <a:spcPts val="850"/>
-              </a:spcBef>
-              <a:buClr>
-                <a:srgbClr val="000000"/>
-              </a:buClr>
-              <a:buSzPct val="45000"/>
-              <a:buFont typeface="Wingdings" charset="2"/>
-              <a:buChar char=""/>
-            </a:pPr>
-            <a:r>
-              <a:rPr b="0" lang="en-US" sz="2000" spc="-1" strike="noStrike">
-                <a:solidFill>
-                  <a:schemeClr val="dk1"/>
-                </a:solidFill>
-                <a:latin typeface="Calibri"/>
-              </a:rPr>
-              <a:t>Трето ниво на плана</a:t>
-            </a:r>
-            <a:endParaRPr b="0" lang="en-US" sz="2000" spc="-1" strike="noStrike">
-              <a:solidFill>
-                <a:schemeClr val="dk1"/>
-              </a:solidFill>
-              <a:latin typeface="Calibri"/>
-            </a:endParaRPr>
-          </a:p>
-          <a:p>
-            <a:pPr lvl="3" marL="1728000" indent="-216000">
-              <a:spcBef>
-                <a:spcPts val="567"/>
-              </a:spcBef>
-              <a:buClr>
-                <a:srgbClr val="000000"/>
-              </a:buClr>
-              <a:buSzPct val="75000"/>
-              <a:buFont typeface="Symbol" charset="2"/>
-              <a:buChar char=""/>
-            </a:pPr>
-            <a:r>
-              <a:rPr b="0" lang="en-US" sz="2000" spc="-1" strike="noStrike">
-                <a:solidFill>
-                  <a:schemeClr val="dk1"/>
-                </a:solidFill>
-                <a:latin typeface="Calibri"/>
-              </a:rPr>
-              <a:t>Четвърто ниво на плана</a:t>
-            </a:r>
-            <a:endParaRPr b="0" lang="en-US" sz="2000" spc="-1" strike="noStrike">
-              <a:solidFill>
-                <a:schemeClr val="dk1"/>
-              </a:solidFill>
-              <a:latin typeface="Calibri"/>
-            </a:endParaRPr>
-          </a:p>
-          <a:p>
-            <a:pPr lvl="4" marL="2160000" indent="-216000">
-              <a:spcBef>
-                <a:spcPts val="283"/>
-              </a:spcBef>
-              <a:buClr>
-                <a:srgbClr val="000000"/>
-              </a:buClr>
-              <a:buSzPct val="45000"/>
-              <a:buFont typeface="Wingdings" charset="2"/>
-              <a:buChar char=""/>
-            </a:pPr>
-            <a:r>
-              <a:rPr b="0" lang="en-US" sz="2000" spc="-1" strike="noStrike">
-                <a:solidFill>
-                  <a:schemeClr val="dk1"/>
-                </a:solidFill>
-                <a:latin typeface="Calibri"/>
-              </a:rPr>
-              <a:t>Пето ниво на плана</a:t>
-            </a:r>
-            <a:endParaRPr b="0" lang="en-US" sz="2000" spc="-1" strike="noStrike">
-              <a:solidFill>
-                <a:schemeClr val="dk1"/>
-              </a:solidFill>
-              <a:latin typeface="Calibri"/>
-            </a:endParaRPr>
-          </a:p>
-          <a:p>
-            <a:pPr lvl="5" marL="2592000" indent="-216000">
-              <a:spcBef>
-                <a:spcPts val="283"/>
-              </a:spcBef>
-              <a:buClr>
-                <a:srgbClr val="000000"/>
-              </a:buClr>
-              <a:buSzPct val="45000"/>
-              <a:buFont typeface="Wingdings" charset="2"/>
-              <a:buChar char=""/>
-            </a:pPr>
-            <a:r>
-              <a:rPr b="0" lang="en-US" sz="2000" spc="-1" strike="noStrike">
-                <a:solidFill>
-                  <a:schemeClr val="dk1"/>
-                </a:solidFill>
-                <a:latin typeface="Calibri"/>
-              </a:rPr>
-              <a:t>Шесто ниво на плана</a:t>
-            </a:r>
-            <a:endParaRPr b="0" lang="en-US" sz="2000" spc="-1" strike="noStrike">
-              <a:solidFill>
-                <a:schemeClr val="dk1"/>
-              </a:solidFill>
-              <a:latin typeface="Calibri"/>
-            </a:endParaRPr>
-          </a:p>
-          <a:p>
-            <a:pPr lvl="6" marL="3024000" indent="-216000">
-              <a:spcBef>
-                <a:spcPts val="283"/>
-              </a:spcBef>
-              <a:buClr>
-                <a:srgbClr val="000000"/>
-              </a:buClr>
-              <a:buSzPct val="45000"/>
-              <a:buFont typeface="Wingdings" charset="2"/>
-              <a:buChar char=""/>
-            </a:pPr>
-            <a:r>
-              <a:rPr b="0" lang="en-US" sz="2000" spc="-1" strike="noStrike">
-                <a:solidFill>
-                  <a:schemeClr val="dk1"/>
-                </a:solidFill>
-                <a:latin typeface="Calibri"/>
-              </a:rPr>
-              <a:t>Седмо ниво на плана</a:t>
-            </a:r>
-            <a:endParaRPr b="0" lang="en-US" sz="2000" spc="-1" strike="noStrike">
-              <a:solidFill>
-                <a:schemeClr val="dk1"/>
-              </a:solidFill>
-              <a:latin typeface="Calibri"/>
             </a:endParaRPr>
           </a:p>
         </p:txBody>
@@ -2019,18 +1800,18 @@
       </p:grpSpPr>
       <p:sp>
         <p:nvSpPr>
-          <p:cNvPr id="54" name="PlaceHolder 1"/>
-          <p:cNvSpPr>
-            <a:spLocks noGrp="1"/>
-          </p:cNvSpPr>
-          <p:nvPr>
-            <p:ph type="title"/>
+          <p:cNvPr id="42" name="PlaceHolder 1"/>
+          <p:cNvSpPr>
+            <a:spLocks noGrp="1"/>
+          </p:cNvSpPr>
+          <p:nvPr>
+            <p:ph type="ftr" idx="28"/>
           </p:nvPr>
         </p:nvSpPr>
         <p:spPr>
           <a:xfrm>
-            <a:off x="457200" y="272880"/>
-            <a:ext cx="3007800" cy="1161720"/>
+            <a:off x="3124080" y="6356520"/>
+            <a:ext cx="2894760" cy="364320"/>
           </a:xfrm>
           <a:prstGeom prst="rect">
             <a:avLst/>
@@ -2041,48 +1822,68 @@
           </a:ln>
         </p:spPr>
         <p:txBody>
-          <a:bodyPr lIns="91440" rIns="91440" tIns="45720" bIns="45720" anchor="b">
+          <a:bodyPr lIns="91440" rIns="91440" tIns="45720" bIns="45720" anchor="ctr">
             <a:noAutofit/>
           </a:bodyPr>
-          <a:p>
-            <a:pPr indent="0" defTabSz="457200">
-              <a:lnSpc>
-                <a:spcPct val="100000"/>
-              </a:lnSpc>
-              <a:buNone/>
-            </a:pPr>
-            <a:r>
-              <a:rPr b="1" lang="en-US" sz="2000" spc="-1" strike="noStrike">
-                <a:solidFill>
-                  <a:schemeClr val="dk1"/>
-                </a:solidFill>
-                <a:latin typeface="Calibri"/>
-              </a:rPr>
-              <a:t>Click to edit Master title style</a:t>
-            </a:r>
-            <a:endParaRPr b="0" lang="en-US" sz="2000" spc="-1" strike="noStrike">
-              <a:solidFill>
-                <a:schemeClr val="dk1"/>
-              </a:solidFill>
-              <a:latin typeface="Calibri"/>
-            </a:endParaRPr>
-          </a:p>
-        </p:txBody>
-      </p:sp>
-      <p:sp>
-        <p:nvSpPr>
-          <p:cNvPr id="55" name="PlaceHolder 2"/>
-          <p:cNvSpPr>
-            <a:spLocks noGrp="1"/>
-          </p:cNvSpPr>
-          <p:nvPr>
-            <p:ph type="body"/>
+          <a:lstStyle>
+            <a:lvl1pPr indent="0" algn="ctr">
+              <a:lnSpc>
+                <a:spcPct val="100000"/>
+              </a:lnSpc>
+              <a:buNone/>
+              <a:tabLst>
+                <a:tab algn="l" pos="0"/>
+              </a:tabLst>
+              <a:defRPr b="0" lang="bg-BG" sz="1400" spc="-1" strike="noStrike">
+                <a:solidFill>
+                  <a:srgbClr val="000000"/>
+                </a:solidFill>
+                <a:latin typeface="Times New Roman"/>
+              </a:defRPr>
+            </a:lvl1pPr>
+          </a:lstStyle>
+          <a:p>
+            <a:pPr indent="0" algn="ctr">
+              <a:lnSpc>
+                <a:spcPct val="100000"/>
+              </a:lnSpc>
+              <a:buNone/>
+              <a:tabLst>
+                <a:tab algn="l" pos="0"/>
+              </a:tabLst>
+            </a:pPr>
+            <a:r>
+              <a:rPr b="0" lang="bg-BG" sz="1400" spc="-1" strike="noStrike">
+                <a:solidFill>
+                  <a:srgbClr val="000000"/>
+                </a:solidFill>
+                <a:latin typeface="Times New Roman"/>
+              </a:rPr>
+              <a:t>&lt;долен колонтитул&gt;</a:t>
+            </a:r>
+            <a:endParaRPr b="0" lang="bg-BG" sz="1400" spc="-1" strike="noStrike">
+              <a:solidFill>
+                <a:srgbClr val="000000"/>
+              </a:solidFill>
+              <a:latin typeface="Times New Roman"/>
+            </a:endParaRPr>
+          </a:p>
+        </p:txBody>
+      </p:sp>
+      <p:sp>
+        <p:nvSpPr>
+          <p:cNvPr id="43" name="PlaceHolder 2"/>
+          <p:cNvSpPr>
+            <a:spLocks noGrp="1"/>
+          </p:cNvSpPr>
+          <p:nvPr>
+            <p:ph type="sldNum" idx="29"/>
           </p:nvPr>
         </p:nvSpPr>
         <p:spPr>
           <a:xfrm>
-            <a:off x="3575160" y="272880"/>
-            <a:ext cx="5111280" cy="5852880"/>
+            <a:off x="6553080" y="6356520"/>
+            <a:ext cx="2133000" cy="364320"/>
           </a:xfrm>
           <a:prstGeom prst="rect">
             <a:avLst/>
@@ -2093,175 +1894,72 @@
           </a:ln>
         </p:spPr>
         <p:txBody>
-          <a:bodyPr lIns="91440" rIns="91440" tIns="45720" bIns="45720" anchor="t">
+          <a:bodyPr lIns="91440" rIns="91440" tIns="45720" bIns="45720" anchor="ctr">
             <a:noAutofit/>
           </a:bodyPr>
-          <a:p>
-            <a:pPr marL="343080" indent="-343080" defTabSz="457200">
-              <a:lnSpc>
-                <a:spcPct val="100000"/>
-              </a:lnSpc>
-              <a:spcBef>
-                <a:spcPts val="641"/>
-              </a:spcBef>
-              <a:buClr>
-                <a:srgbClr val="000000"/>
-              </a:buClr>
-              <a:buFont typeface="Arial"/>
-              <a:buChar char="•"/>
-            </a:pPr>
-            <a:r>
-              <a:rPr b="0" lang="en-US" sz="3200" spc="-1" strike="noStrike">
-                <a:solidFill>
-                  <a:schemeClr val="dk1"/>
+          <a:lstStyle>
+            <a:lvl1pPr indent="0" algn="r" defTabSz="457200">
+              <a:lnSpc>
+                <a:spcPct val="100000"/>
+              </a:lnSpc>
+              <a:buNone/>
+              <a:tabLst>
+                <a:tab algn="l" pos="0"/>
+              </a:tabLst>
+              <a:defRPr b="0" lang="en-US" sz="1200" spc="-1" strike="noStrike">
+                <a:solidFill>
+                  <a:schemeClr val="dk1">
+                    <a:tint val="75000"/>
+                  </a:schemeClr>
                 </a:solidFill>
                 <a:latin typeface="Calibri"/>
-              </a:rPr>
-              <a:t>Click to edit Master text styles</a:t>
-            </a:r>
-            <a:endParaRPr b="0" lang="en-US" sz="3200" spc="-1" strike="noStrike">
-              <a:solidFill>
-                <a:schemeClr val="dk1"/>
-              </a:solidFill>
-              <a:latin typeface="Calibri"/>
-            </a:endParaRPr>
-          </a:p>
-          <a:p>
-            <a:pPr lvl="1" marL="743040" indent="-285840" defTabSz="457200">
-              <a:lnSpc>
-                <a:spcPct val="100000"/>
-              </a:lnSpc>
-              <a:spcBef>
-                <a:spcPts val="561"/>
-              </a:spcBef>
-              <a:buClr>
-                <a:srgbClr val="000000"/>
-              </a:buClr>
-              <a:buFont typeface="Arial"/>
-              <a:buChar char="–"/>
-            </a:pPr>
-            <a:r>
-              <a:rPr b="0" lang="en-US" sz="2800" spc="-1" strike="noStrike">
-                <a:solidFill>
-                  <a:schemeClr val="dk1"/>
+              </a:defRPr>
+            </a:lvl1pPr>
+          </a:lstStyle>
+          <a:p>
+            <a:pPr indent="0" algn="r" defTabSz="457200">
+              <a:lnSpc>
+                <a:spcPct val="100000"/>
+              </a:lnSpc>
+              <a:buNone/>
+              <a:tabLst>
+                <a:tab algn="l" pos="0"/>
+              </a:tabLst>
+            </a:pPr>
+            <a:fld id="{1F5AABA1-3F01-4A88-A8A2-72967E073190}" type="slidenum">
+              <a:rPr b="0" lang="en-US" sz="1200" spc="-1" strike="noStrike">
+                <a:solidFill>
+                  <a:schemeClr val="dk1">
+                    <a:tint val="75000"/>
+                  </a:schemeClr>
                 </a:solidFill>
                 <a:latin typeface="Calibri"/>
               </a:rPr>
-              <a:t>Second level</a:t>
-            </a:r>
-            <a:endParaRPr b="0" lang="en-US" sz="2800" spc="-1" strike="noStrike">
-              <a:solidFill>
-                <a:schemeClr val="dk1"/>
-              </a:solidFill>
-              <a:latin typeface="Calibri"/>
-            </a:endParaRPr>
-          </a:p>
-          <a:p>
-            <a:pPr lvl="2" marL="1143000" indent="-228600" defTabSz="457200">
-              <a:lnSpc>
-                <a:spcPct val="100000"/>
-              </a:lnSpc>
-              <a:spcBef>
-                <a:spcPts val="479"/>
-              </a:spcBef>
-              <a:buClr>
-                <a:srgbClr val="000000"/>
-              </a:buClr>
-              <a:buFont typeface="Arial"/>
-              <a:buChar char="•"/>
-            </a:pPr>
-            <a:r>
-              <a:rPr b="0" lang="en-US" sz="2400" spc="-1" strike="noStrike">
-                <a:solidFill>
-                  <a:schemeClr val="dk1"/>
-                </a:solidFill>
-                <a:latin typeface="Calibri"/>
-              </a:rPr>
-              <a:t>Third level</a:t>
-            </a:r>
-            <a:endParaRPr b="0" lang="en-US" sz="2400" spc="-1" strike="noStrike">
-              <a:solidFill>
-                <a:schemeClr val="dk1"/>
-              </a:solidFill>
-              <a:latin typeface="Calibri"/>
-            </a:endParaRPr>
-          </a:p>
-          <a:p>
-            <a:pPr lvl="3" marL="1600200" indent="-228600" defTabSz="457200">
-              <a:lnSpc>
-                <a:spcPct val="100000"/>
-              </a:lnSpc>
-              <a:spcBef>
-                <a:spcPts val="400"/>
-              </a:spcBef>
-              <a:buClr>
-                <a:srgbClr val="000000"/>
-              </a:buClr>
-              <a:buFont typeface="Arial"/>
-              <a:buChar char="–"/>
-            </a:pPr>
-            <a:r>
-              <a:rPr b="0" lang="en-US" sz="2000" spc="-1" strike="noStrike">
-                <a:solidFill>
-                  <a:schemeClr val="dk1"/>
-                </a:solidFill>
-                <a:latin typeface="Calibri"/>
-              </a:rPr>
-              <a:t>Fourth level</a:t>
-            </a:r>
-            <a:endParaRPr b="0" lang="en-US" sz="2000" spc="-1" strike="noStrike">
-              <a:solidFill>
-                <a:schemeClr val="dk1"/>
-              </a:solidFill>
-              <a:latin typeface="Calibri"/>
-            </a:endParaRPr>
-          </a:p>
-          <a:p>
-            <a:pPr lvl="4" marL="2057400" indent="-228600" defTabSz="457200">
-              <a:lnSpc>
-                <a:spcPct val="100000"/>
-              </a:lnSpc>
-              <a:spcBef>
-                <a:spcPts val="400"/>
-              </a:spcBef>
-              <a:buClr>
-                <a:srgbClr val="000000"/>
-              </a:buClr>
-              <a:buFont typeface="Arial"/>
-              <a:buChar char="»"/>
-            </a:pPr>
-            <a:r>
-              <a:rPr b="0" lang="en-US" sz="2000" spc="-1" strike="noStrike">
-                <a:solidFill>
-                  <a:schemeClr val="dk1"/>
-                </a:solidFill>
-                <a:latin typeface="Calibri"/>
-              </a:rPr>
-              <a:t>Fifth level</a:t>
-            </a:r>
-            <a:endParaRPr b="0" lang="en-US" sz="2000" spc="-1" strike="noStrike">
-              <a:solidFill>
-                <a:schemeClr val="dk1"/>
-              </a:solidFill>
-              <a:latin typeface="Calibri"/>
-            </a:endParaRPr>
-          </a:p>
-        </p:txBody>
-      </p:sp>
-      <p:sp>
-        <p:nvSpPr>
-          <p:cNvPr id="56" name="PlaceHolder 3"/>
-          <p:cNvSpPr>
-            <a:spLocks noGrp="1"/>
-          </p:cNvSpPr>
-          <p:nvPr>
-            <p:ph type="body"/>
+              <a:t>&lt;число&gt;</a:t>
+            </a:fld>
+            <a:endParaRPr b="0" lang="bg-BG" sz="1200" spc="-1" strike="noStrike">
+              <a:solidFill>
+                <a:srgbClr val="000000"/>
+              </a:solidFill>
+              <a:latin typeface="Times New Roman"/>
+            </a:endParaRPr>
+          </a:p>
+        </p:txBody>
+      </p:sp>
+      <p:sp>
+        <p:nvSpPr>
+          <p:cNvPr id="44" name="PlaceHolder 3"/>
+          <p:cNvSpPr>
+            <a:spLocks noGrp="1"/>
+          </p:cNvSpPr>
+          <p:nvPr>
+            <p:ph type="dt" idx="30"/>
           </p:nvPr>
         </p:nvSpPr>
         <p:spPr>
           <a:xfrm>
-            <a:off x="457200" y="1434960"/>
-            <a:ext cx="3007800" cy="4690800"/>
+            <a:off x="457200" y="6356520"/>
+            <a:ext cx="2133000" cy="364320"/>
           </a:xfrm>
           <a:prstGeom prst="rect">
             <a:avLst/>
@@ -2272,139 +1970,11 @@
           </a:ln>
         </p:spPr>
         <p:txBody>
-          <a:bodyPr lIns="91440" rIns="91440" tIns="45720" bIns="45720" anchor="t">
-            <a:noAutofit/>
-          </a:bodyPr>
-          <a:p>
-            <a:pPr indent="0" defTabSz="457200">
-              <a:lnSpc>
-                <a:spcPct val="100000"/>
-              </a:lnSpc>
-              <a:spcBef>
-                <a:spcPts val="281"/>
-              </a:spcBef>
-              <a:buNone/>
-              <a:tabLst>
-                <a:tab algn="l" pos="0"/>
-              </a:tabLst>
-            </a:pPr>
-            <a:r>
-              <a:rPr b="0" lang="en-US" sz="1400" spc="-1" strike="noStrike">
-                <a:solidFill>
-                  <a:schemeClr val="dk1"/>
-                </a:solidFill>
-                <a:latin typeface="Calibri"/>
-              </a:rPr>
-              <a:t>Click to edit Master text styles</a:t>
-            </a:r>
-            <a:endParaRPr b="0" lang="en-US" sz="1400" spc="-1" strike="noStrike">
-              <a:solidFill>
-                <a:schemeClr val="dk1"/>
-              </a:solidFill>
-              <a:latin typeface="Calibri"/>
-            </a:endParaRPr>
-          </a:p>
-        </p:txBody>
-      </p:sp>
-      <p:sp>
-        <p:nvSpPr>
-          <p:cNvPr id="57" name="PlaceHolder 4"/>
-          <p:cNvSpPr>
-            <a:spLocks noGrp="1"/>
-          </p:cNvSpPr>
-          <p:nvPr>
-            <p:ph type="dt" idx="28"/>
-          </p:nvPr>
-        </p:nvSpPr>
-        <p:spPr>
-          <a:xfrm>
-            <a:off x="457200" y="6356520"/>
-            <a:ext cx="2133360" cy="364680"/>
-          </a:xfrm>
-          <a:prstGeom prst="rect">
-            <a:avLst/>
-          </a:prstGeom>
-          <a:noFill/>
-          <a:ln w="0">
-            <a:noFill/>
-          </a:ln>
-        </p:spPr>
-        <p:txBody>
           <a:bodyPr lIns="91440" rIns="91440" tIns="45720" bIns="45720" anchor="ctr">
             <a:noAutofit/>
           </a:bodyPr>
           <a:lstStyle>
-            <a:lvl1pPr indent="0" defTabSz="457200">
-              <a:lnSpc>
-                <a:spcPct val="100000"/>
-              </a:lnSpc>
-              <a:buNone/>
-              <a:defRPr b="0" lang="en-US" sz="1200" spc="-1" strike="noStrike">
-                <a:solidFill>
-                  <a:schemeClr val="dk1">
-                    <a:tint val="75000"/>
-                  </a:schemeClr>
-                </a:solidFill>
-                <a:latin typeface="Calibri"/>
-              </a:defRPr>
-            </a:lvl1pPr>
-          </a:lstStyle>
-          <a:p>
-            <a:pPr indent="0" defTabSz="457200">
-              <a:lnSpc>
-                <a:spcPct val="100000"/>
-              </a:lnSpc>
-              <a:buNone/>
-            </a:pPr>
-            <a:r>
-              <a:rPr b="0" lang="en-US" sz="1200" spc="-1" strike="noStrike">
-                <a:solidFill>
-                  <a:schemeClr val="dk1">
-                    <a:tint val="75000"/>
-                  </a:schemeClr>
-                </a:solidFill>
-                <a:latin typeface="Calibri"/>
-              </a:rPr>
-              <a:t>&lt;дата/час&gt;</a:t>
-            </a:r>
-            <a:endParaRPr b="0" lang="bg-BG" sz="1200" spc="-1" strike="noStrike">
-              <a:solidFill>
-                <a:srgbClr val="000000"/>
-              </a:solidFill>
-              <a:latin typeface="Times New Roman"/>
-            </a:endParaRPr>
-          </a:p>
-        </p:txBody>
-      </p:sp>
-      <p:sp>
-        <p:nvSpPr>
-          <p:cNvPr id="58" name="PlaceHolder 5"/>
-          <p:cNvSpPr>
-            <a:spLocks noGrp="1"/>
-          </p:cNvSpPr>
-          <p:nvPr>
-            <p:ph type="ftr" idx="29"/>
-          </p:nvPr>
-        </p:nvSpPr>
-        <p:spPr>
-          <a:xfrm>
-            <a:off x="3124080" y="6356520"/>
-            <a:ext cx="2895120" cy="364680"/>
-          </a:xfrm>
-          <a:prstGeom prst="rect">
-            <a:avLst/>
-          </a:prstGeom>
-          <a:noFill/>
-          <a:ln w="0">
-            <a:noFill/>
-          </a:ln>
-        </p:spPr>
-        <p:txBody>
-          <a:bodyPr lIns="91440" rIns="91440" tIns="45720" bIns="45720" anchor="ctr">
-            <a:noAutofit/>
-          </a:bodyPr>
-          <a:lstStyle>
-            <a:lvl1pPr indent="0" algn="ctr">
+            <a:lvl1pPr indent="0">
               <a:buNone/>
               <a:defRPr b="0" lang="bg-BG" sz="1400" spc="-1" strike="noStrike">
                 <a:solidFill>
@@ -2415,7 +1985,7 @@
             </a:lvl1pPr>
           </a:lstStyle>
           <a:p>
-            <a:pPr indent="0" algn="ctr">
+            <a:pPr indent="0">
               <a:buNone/>
             </a:pPr>
             <a:r>
@@ -2425,79 +1995,9 @@
                 </a:solidFill>
                 <a:latin typeface="Times New Roman"/>
               </a:rPr>
-              <a:t>&lt;долен колонтитул&gt;</a:t>
+              <a:t>&lt;дата/час&gt;</a:t>
             </a:r>
             <a:endParaRPr b="0" lang="bg-BG" sz="1400" spc="-1" strike="noStrike">
-              <a:solidFill>
-                <a:srgbClr val="000000"/>
-              </a:solidFill>
-              <a:latin typeface="Times New Roman"/>
-            </a:endParaRPr>
-          </a:p>
-        </p:txBody>
-      </p:sp>
-      <p:sp>
-        <p:nvSpPr>
-          <p:cNvPr id="59" name="PlaceHolder 6"/>
-          <p:cNvSpPr>
-            <a:spLocks noGrp="1"/>
-          </p:cNvSpPr>
-          <p:nvPr>
-            <p:ph type="sldNum" idx="30"/>
-          </p:nvPr>
-        </p:nvSpPr>
-        <p:spPr>
-          <a:xfrm>
-            <a:off x="6553080" y="6356520"/>
-            <a:ext cx="2133360" cy="364680"/>
-          </a:xfrm>
-          <a:prstGeom prst="rect">
-            <a:avLst/>
-          </a:prstGeom>
-          <a:noFill/>
-          <a:ln w="0">
-            <a:noFill/>
-          </a:ln>
-        </p:spPr>
-        <p:txBody>
-          <a:bodyPr lIns="91440" rIns="91440" tIns="45720" bIns="45720" anchor="ctr">
-            <a:noAutofit/>
-          </a:bodyPr>
-          <a:lstStyle>
-            <a:lvl1pPr indent="0" algn="r" defTabSz="457200">
-              <a:lnSpc>
-                <a:spcPct val="100000"/>
-              </a:lnSpc>
-              <a:buNone/>
-              <a:defRPr b="0" lang="en-US" sz="1200" spc="-1" strike="noStrike">
-                <a:solidFill>
-                  <a:schemeClr val="dk1">
-                    <a:tint val="75000"/>
-                  </a:schemeClr>
-                </a:solidFill>
-                <a:latin typeface="Calibri"/>
-              </a:defRPr>
-            </a:lvl1pPr>
-          </a:lstStyle>
-          <a:p>
-            <a:pPr indent="0" algn="r" defTabSz="457200">
-              <a:lnSpc>
-                <a:spcPct val="100000"/>
-              </a:lnSpc>
-              <a:buNone/>
-            </a:pPr>
-            <a:fld id="{8BDDC53F-B61B-4518-A2F4-B47B48217F97}" type="slidenum">
-              <a:rPr b="0" lang="en-US" sz="1200" spc="-1" strike="noStrike">
-                <a:solidFill>
-                  <a:schemeClr val="dk1">
-                    <a:tint val="75000"/>
-                  </a:schemeClr>
-                </a:solidFill>
-                <a:latin typeface="Calibri"/>
-              </a:rPr>
-              <a:t>&lt;число&gt;</a:t>
-            </a:fld>
-            <a:endParaRPr b="0" lang="bg-BG" sz="1200" spc="-1" strike="noStrike">
               <a:solidFill>
                 <a:srgbClr val="000000"/>
               </a:solidFill>
@@ -2541,18 +2041,18 @@
       </p:grpSpPr>
       <p:sp>
         <p:nvSpPr>
-          <p:cNvPr id="60" name="PlaceHolder 1"/>
-          <p:cNvSpPr>
-            <a:spLocks noGrp="1"/>
-          </p:cNvSpPr>
-          <p:nvPr>
-            <p:ph type="title"/>
+          <p:cNvPr id="45" name="PlaceHolder 1"/>
+          <p:cNvSpPr>
+            <a:spLocks noGrp="1"/>
+          </p:cNvSpPr>
+          <p:nvPr>
+            <p:ph type="ftr" idx="31"/>
           </p:nvPr>
         </p:nvSpPr>
         <p:spPr>
           <a:xfrm>
-            <a:off x="1792440" y="4800600"/>
-            <a:ext cx="5486040" cy="566280"/>
+            <a:off x="3124080" y="6356520"/>
+            <a:ext cx="2894760" cy="364320"/>
           </a:xfrm>
           <a:prstGeom prst="rect">
             <a:avLst/>
@@ -2563,48 +2063,68 @@
           </a:ln>
         </p:spPr>
         <p:txBody>
-          <a:bodyPr lIns="91440" rIns="91440" tIns="45720" bIns="45720" anchor="b">
+          <a:bodyPr lIns="91440" rIns="91440" tIns="45720" bIns="45720" anchor="ctr">
             <a:noAutofit/>
           </a:bodyPr>
-          <a:p>
-            <a:pPr indent="0" defTabSz="457200">
-              <a:lnSpc>
-                <a:spcPct val="100000"/>
-              </a:lnSpc>
-              <a:buNone/>
-            </a:pPr>
-            <a:r>
-              <a:rPr b="1" lang="en-US" sz="2000" spc="-1" strike="noStrike">
-                <a:solidFill>
-                  <a:schemeClr val="dk1"/>
-                </a:solidFill>
-                <a:latin typeface="Calibri"/>
-              </a:rPr>
-              <a:t>Click to edit Master title style</a:t>
-            </a:r>
-            <a:endParaRPr b="0" lang="en-US" sz="2000" spc="-1" strike="noStrike">
-              <a:solidFill>
-                <a:schemeClr val="dk1"/>
-              </a:solidFill>
-              <a:latin typeface="Calibri"/>
-            </a:endParaRPr>
-          </a:p>
-        </p:txBody>
-      </p:sp>
-      <p:sp>
-        <p:nvSpPr>
-          <p:cNvPr id="61" name="PlaceHolder 2"/>
-          <p:cNvSpPr>
-            <a:spLocks noGrp="1"/>
-          </p:cNvSpPr>
-          <p:nvPr>
-            <p:ph type="body"/>
+          <a:lstStyle>
+            <a:lvl1pPr indent="0" algn="ctr">
+              <a:lnSpc>
+                <a:spcPct val="100000"/>
+              </a:lnSpc>
+              <a:buNone/>
+              <a:tabLst>
+                <a:tab algn="l" pos="0"/>
+              </a:tabLst>
+              <a:defRPr b="0" lang="bg-BG" sz="1400" spc="-1" strike="noStrike">
+                <a:solidFill>
+                  <a:srgbClr val="000000"/>
+                </a:solidFill>
+                <a:latin typeface="Times New Roman"/>
+              </a:defRPr>
+            </a:lvl1pPr>
+          </a:lstStyle>
+          <a:p>
+            <a:pPr indent="0" algn="ctr">
+              <a:lnSpc>
+                <a:spcPct val="100000"/>
+              </a:lnSpc>
+              <a:buNone/>
+              <a:tabLst>
+                <a:tab algn="l" pos="0"/>
+              </a:tabLst>
+            </a:pPr>
+            <a:r>
+              <a:rPr b="0" lang="bg-BG" sz="1400" spc="-1" strike="noStrike">
+                <a:solidFill>
+                  <a:srgbClr val="000000"/>
+                </a:solidFill>
+                <a:latin typeface="Times New Roman"/>
+              </a:rPr>
+              <a:t>&lt;долен колонтитул&gt;</a:t>
+            </a:r>
+            <a:endParaRPr b="0" lang="bg-BG" sz="1400" spc="-1" strike="noStrike">
+              <a:solidFill>
+                <a:srgbClr val="000000"/>
+              </a:solidFill>
+              <a:latin typeface="Times New Roman"/>
+            </a:endParaRPr>
+          </a:p>
+        </p:txBody>
+      </p:sp>
+      <p:sp>
+        <p:nvSpPr>
+          <p:cNvPr id="46" name="PlaceHolder 2"/>
+          <p:cNvSpPr>
+            <a:spLocks noGrp="1"/>
+          </p:cNvSpPr>
+          <p:nvPr>
+            <p:ph type="sldNum" idx="32"/>
           </p:nvPr>
         </p:nvSpPr>
         <p:spPr>
           <a:xfrm>
-            <a:off x="1792440" y="612720"/>
-            <a:ext cx="5486040" cy="4114440"/>
+            <a:off x="6553080" y="6356520"/>
+            <a:ext cx="2133000" cy="364320"/>
           </a:xfrm>
           <a:prstGeom prst="rect">
             <a:avLst/>
@@ -2615,221 +2135,72 @@
           </a:ln>
         </p:spPr>
         <p:txBody>
-          <a:bodyPr lIns="90000" rIns="90000" tIns="45000" bIns="45000" anchor="t">
+          <a:bodyPr lIns="91440" rIns="91440" tIns="45720" bIns="45720" anchor="ctr">
             <a:noAutofit/>
           </a:bodyPr>
-          <a:p>
-            <a:pPr marL="432000" indent="-324000">
-              <a:spcBef>
-                <a:spcPts val="1417"/>
-              </a:spcBef>
-              <a:buClr>
-                <a:srgbClr val="000000"/>
-              </a:buClr>
-              <a:buSzPct val="45000"/>
-              <a:buFont typeface="Wingdings" charset="2"/>
-              <a:buChar char=""/>
-            </a:pPr>
-            <a:r>
-              <a:rPr b="0" lang="en-US" sz="3200" spc="-1" strike="noStrike">
-                <a:solidFill>
-                  <a:schemeClr val="dk1"/>
+          <a:lstStyle>
+            <a:lvl1pPr indent="0" algn="r" defTabSz="457200">
+              <a:lnSpc>
+                <a:spcPct val="100000"/>
+              </a:lnSpc>
+              <a:buNone/>
+              <a:tabLst>
+                <a:tab algn="l" pos="0"/>
+              </a:tabLst>
+              <a:defRPr b="0" lang="en-US" sz="1200" spc="-1" strike="noStrike">
+                <a:solidFill>
+                  <a:schemeClr val="dk1">
+                    <a:tint val="75000"/>
+                  </a:schemeClr>
                 </a:solidFill>
                 <a:latin typeface="Calibri"/>
-              </a:rPr>
-              <a:t>Щракнете, за да редактирате формата на плана</a:t>
-            </a:r>
-            <a:endParaRPr b="0" lang="en-US" sz="3200" spc="-1" strike="noStrike">
-              <a:solidFill>
-                <a:schemeClr val="dk1"/>
-              </a:solidFill>
-              <a:latin typeface="Calibri"/>
-            </a:endParaRPr>
-          </a:p>
-          <a:p>
-            <a:pPr lvl="1" marL="864000" indent="-324000">
-              <a:spcBef>
-                <a:spcPts val="1134"/>
-              </a:spcBef>
-              <a:buClr>
-                <a:srgbClr val="000000"/>
-              </a:buClr>
-              <a:buSzPct val="75000"/>
-              <a:buFont typeface="Symbol" charset="2"/>
-              <a:buChar char=""/>
-            </a:pPr>
-            <a:r>
-              <a:rPr b="0" lang="en-US" sz="3200" spc="-1" strike="noStrike">
-                <a:solidFill>
-                  <a:schemeClr val="dk1"/>
+              </a:defRPr>
+            </a:lvl1pPr>
+          </a:lstStyle>
+          <a:p>
+            <a:pPr indent="0" algn="r" defTabSz="457200">
+              <a:lnSpc>
+                <a:spcPct val="100000"/>
+              </a:lnSpc>
+              <a:buNone/>
+              <a:tabLst>
+                <a:tab algn="l" pos="0"/>
+              </a:tabLst>
+            </a:pPr>
+            <a:fld id="{53FF76DB-60FA-4DF0-812D-383050B7A10F}" type="slidenum">
+              <a:rPr b="0" lang="en-US" sz="1200" spc="-1" strike="noStrike">
+                <a:solidFill>
+                  <a:schemeClr val="dk1">
+                    <a:tint val="75000"/>
+                  </a:schemeClr>
                 </a:solidFill>
                 <a:latin typeface="Calibri"/>
               </a:rPr>
-              <a:t>Второ ниво на плана</a:t>
-            </a:r>
-            <a:endParaRPr b="0" lang="en-US" sz="3200" spc="-1" strike="noStrike">
-              <a:solidFill>
-                <a:schemeClr val="dk1"/>
-              </a:solidFill>
-              <a:latin typeface="Calibri"/>
-            </a:endParaRPr>
-          </a:p>
-          <a:p>
-            <a:pPr lvl="2" marL="1296000" indent="-288000">
-              <a:spcBef>
-                <a:spcPts val="850"/>
-              </a:spcBef>
-              <a:buClr>
-                <a:srgbClr val="000000"/>
-              </a:buClr>
-              <a:buSzPct val="45000"/>
-              <a:buFont typeface="Wingdings" charset="2"/>
-              <a:buChar char=""/>
-            </a:pPr>
-            <a:r>
-              <a:rPr b="0" lang="en-US" sz="3200" spc="-1" strike="noStrike">
-                <a:solidFill>
-                  <a:schemeClr val="dk1"/>
-                </a:solidFill>
-                <a:latin typeface="Calibri"/>
-              </a:rPr>
-              <a:t>Трето ниво на плана</a:t>
-            </a:r>
-            <a:endParaRPr b="0" lang="en-US" sz="3200" spc="-1" strike="noStrike">
-              <a:solidFill>
-                <a:schemeClr val="dk1"/>
-              </a:solidFill>
-              <a:latin typeface="Calibri"/>
-            </a:endParaRPr>
-          </a:p>
-          <a:p>
-            <a:pPr lvl="3" marL="1728000" indent="-216000">
-              <a:spcBef>
-                <a:spcPts val="567"/>
-              </a:spcBef>
-              <a:buClr>
-                <a:srgbClr val="000000"/>
-              </a:buClr>
-              <a:buSzPct val="75000"/>
-              <a:buFont typeface="Symbol" charset="2"/>
-              <a:buChar char=""/>
-            </a:pPr>
-            <a:r>
-              <a:rPr b="0" lang="en-US" sz="3200" spc="-1" strike="noStrike">
-                <a:solidFill>
-                  <a:schemeClr val="dk1"/>
-                </a:solidFill>
-                <a:latin typeface="Calibri"/>
-              </a:rPr>
-              <a:t>Четвърто ниво на плана</a:t>
-            </a:r>
-            <a:endParaRPr b="0" lang="en-US" sz="3200" spc="-1" strike="noStrike">
-              <a:solidFill>
-                <a:schemeClr val="dk1"/>
-              </a:solidFill>
-              <a:latin typeface="Calibri"/>
-            </a:endParaRPr>
-          </a:p>
-          <a:p>
-            <a:pPr lvl="4" marL="2160000" indent="-216000">
-              <a:spcBef>
-                <a:spcPts val="283"/>
-              </a:spcBef>
-              <a:buClr>
-                <a:srgbClr val="000000"/>
-              </a:buClr>
-              <a:buSzPct val="45000"/>
-              <a:buFont typeface="Wingdings" charset="2"/>
-              <a:buChar char=""/>
-            </a:pPr>
-            <a:r>
-              <a:rPr b="0" lang="en-US" sz="3200" spc="-1" strike="noStrike">
-                <a:solidFill>
-                  <a:schemeClr val="dk1"/>
-                </a:solidFill>
-                <a:latin typeface="Calibri"/>
-              </a:rPr>
-              <a:t>Пето ниво на плана</a:t>
-            </a:r>
-            <a:endParaRPr b="0" lang="en-US" sz="3200" spc="-1" strike="noStrike">
-              <a:solidFill>
-                <a:schemeClr val="dk1"/>
-              </a:solidFill>
-              <a:latin typeface="Calibri"/>
-            </a:endParaRPr>
-          </a:p>
-          <a:p>
-            <a:pPr lvl="5" marL="2592000" indent="-216000">
-              <a:spcBef>
-                <a:spcPts val="283"/>
-              </a:spcBef>
-              <a:buClr>
-                <a:srgbClr val="000000"/>
-              </a:buClr>
-              <a:buSzPct val="45000"/>
-              <a:buFont typeface="Wingdings" charset="2"/>
-              <a:buChar char=""/>
-            </a:pPr>
-            <a:r>
-              <a:rPr b="0" lang="en-US" sz="3200" spc="-1" strike="noStrike">
-                <a:solidFill>
-                  <a:schemeClr val="dk1"/>
-                </a:solidFill>
-                <a:latin typeface="Calibri"/>
-              </a:rPr>
-              <a:t>Шесто ниво на плана</a:t>
-            </a:r>
-            <a:endParaRPr b="0" lang="en-US" sz="3200" spc="-1" strike="noStrike">
-              <a:solidFill>
-                <a:schemeClr val="dk1"/>
-              </a:solidFill>
-              <a:latin typeface="Calibri"/>
-            </a:endParaRPr>
-          </a:p>
-          <a:p>
-            <a:pPr lvl="6" marL="3024000" indent="-216000">
-              <a:spcBef>
-                <a:spcPts val="283"/>
-              </a:spcBef>
-              <a:buClr>
-                <a:srgbClr val="000000"/>
-              </a:buClr>
-              <a:buSzPct val="45000"/>
-              <a:buFont typeface="Wingdings" charset="2"/>
-              <a:buChar char=""/>
-            </a:pPr>
-            <a:r>
-              <a:rPr b="0" lang="en-US" sz="3200" spc="-1" strike="noStrike">
-                <a:solidFill>
-                  <a:schemeClr val="dk1"/>
-                </a:solidFill>
-                <a:latin typeface="Calibri"/>
-              </a:rPr>
-              <a:t>Седмо ниво на плана</a:t>
-            </a:r>
-            <a:endParaRPr b="0" lang="en-US" sz="3200" spc="-1" strike="noStrike">
-              <a:solidFill>
-                <a:schemeClr val="dk1"/>
-              </a:solidFill>
-              <a:latin typeface="Calibri"/>
-            </a:endParaRPr>
-          </a:p>
-        </p:txBody>
-      </p:sp>
-      <p:sp>
-        <p:nvSpPr>
-          <p:cNvPr id="62" name="PlaceHolder 3"/>
-          <p:cNvSpPr>
-            <a:spLocks noGrp="1"/>
-          </p:cNvSpPr>
-          <p:nvPr>
-            <p:ph type="body"/>
+              <a:t>&lt;число&gt;</a:t>
+            </a:fld>
+            <a:endParaRPr b="0" lang="bg-BG" sz="1200" spc="-1" strike="noStrike">
+              <a:solidFill>
+                <a:srgbClr val="000000"/>
+              </a:solidFill>
+              <a:latin typeface="Times New Roman"/>
+            </a:endParaRPr>
+          </a:p>
+        </p:txBody>
+      </p:sp>
+      <p:sp>
+        <p:nvSpPr>
+          <p:cNvPr id="47" name="PlaceHolder 3"/>
+          <p:cNvSpPr>
+            <a:spLocks noGrp="1"/>
+          </p:cNvSpPr>
+          <p:nvPr>
+            <p:ph type="dt" idx="33"/>
           </p:nvPr>
         </p:nvSpPr>
         <p:spPr>
           <a:xfrm>
-            <a:off x="1792440" y="5367240"/>
-            <a:ext cx="5486040" cy="804600"/>
+            <a:off x="457200" y="6356520"/>
+            <a:ext cx="2133000" cy="364320"/>
           </a:xfrm>
           <a:prstGeom prst="rect">
             <a:avLst/>
@@ -2840,139 +2211,11 @@
           </a:ln>
         </p:spPr>
         <p:txBody>
-          <a:bodyPr lIns="91440" rIns="91440" tIns="45720" bIns="45720" anchor="t">
-            <a:noAutofit/>
-          </a:bodyPr>
-          <a:p>
-            <a:pPr indent="0" defTabSz="457200">
-              <a:lnSpc>
-                <a:spcPct val="100000"/>
-              </a:lnSpc>
-              <a:spcBef>
-                <a:spcPts val="281"/>
-              </a:spcBef>
-              <a:buNone/>
-              <a:tabLst>
-                <a:tab algn="l" pos="0"/>
-              </a:tabLst>
-            </a:pPr>
-            <a:r>
-              <a:rPr b="0" lang="en-US" sz="1400" spc="-1" strike="noStrike">
-                <a:solidFill>
-                  <a:schemeClr val="dk1"/>
-                </a:solidFill>
-                <a:latin typeface="Calibri"/>
-              </a:rPr>
-              <a:t>Click to edit Master text styles</a:t>
-            </a:r>
-            <a:endParaRPr b="0" lang="en-US" sz="1400" spc="-1" strike="noStrike">
-              <a:solidFill>
-                <a:schemeClr val="dk1"/>
-              </a:solidFill>
-              <a:latin typeface="Calibri"/>
-            </a:endParaRPr>
-          </a:p>
-        </p:txBody>
-      </p:sp>
-      <p:sp>
-        <p:nvSpPr>
-          <p:cNvPr id="63" name="PlaceHolder 4"/>
-          <p:cNvSpPr>
-            <a:spLocks noGrp="1"/>
-          </p:cNvSpPr>
-          <p:nvPr>
-            <p:ph type="dt" idx="31"/>
-          </p:nvPr>
-        </p:nvSpPr>
-        <p:spPr>
-          <a:xfrm>
-            <a:off x="457200" y="6356520"/>
-            <a:ext cx="2133360" cy="364680"/>
-          </a:xfrm>
-          <a:prstGeom prst="rect">
-            <a:avLst/>
-          </a:prstGeom>
-          <a:noFill/>
-          <a:ln w="0">
-            <a:noFill/>
-          </a:ln>
-        </p:spPr>
-        <p:txBody>
           <a:bodyPr lIns="91440" rIns="91440" tIns="45720" bIns="45720" anchor="ctr">
             <a:noAutofit/>
           </a:bodyPr>
           <a:lstStyle>
-            <a:lvl1pPr indent="0" defTabSz="457200">
-              <a:lnSpc>
-                <a:spcPct val="100000"/>
-              </a:lnSpc>
-              <a:buNone/>
-              <a:defRPr b="0" lang="en-US" sz="1200" spc="-1" strike="noStrike">
-                <a:solidFill>
-                  <a:schemeClr val="dk1">
-                    <a:tint val="75000"/>
-                  </a:schemeClr>
-                </a:solidFill>
-                <a:latin typeface="Calibri"/>
-              </a:defRPr>
-            </a:lvl1pPr>
-          </a:lstStyle>
-          <a:p>
-            <a:pPr indent="0" defTabSz="457200">
-              <a:lnSpc>
-                <a:spcPct val="100000"/>
-              </a:lnSpc>
-              <a:buNone/>
-            </a:pPr>
-            <a:r>
-              <a:rPr b="0" lang="en-US" sz="1200" spc="-1" strike="noStrike">
-                <a:solidFill>
-                  <a:schemeClr val="dk1">
-                    <a:tint val="75000"/>
-                  </a:schemeClr>
-                </a:solidFill>
-                <a:latin typeface="Calibri"/>
-              </a:rPr>
-              <a:t>&lt;дата/час&gt;</a:t>
-            </a:r>
-            <a:endParaRPr b="0" lang="bg-BG" sz="1200" spc="-1" strike="noStrike">
-              <a:solidFill>
-                <a:srgbClr val="000000"/>
-              </a:solidFill>
-              <a:latin typeface="Times New Roman"/>
-            </a:endParaRPr>
-          </a:p>
-        </p:txBody>
-      </p:sp>
-      <p:sp>
-        <p:nvSpPr>
-          <p:cNvPr id="64" name="PlaceHolder 5"/>
-          <p:cNvSpPr>
-            <a:spLocks noGrp="1"/>
-          </p:cNvSpPr>
-          <p:nvPr>
-            <p:ph type="ftr" idx="32"/>
-          </p:nvPr>
-        </p:nvSpPr>
-        <p:spPr>
-          <a:xfrm>
-            <a:off x="3124080" y="6356520"/>
-            <a:ext cx="2895120" cy="364680"/>
-          </a:xfrm>
-          <a:prstGeom prst="rect">
-            <a:avLst/>
-          </a:prstGeom>
-          <a:noFill/>
-          <a:ln w="0">
-            <a:noFill/>
-          </a:ln>
-        </p:spPr>
-        <p:txBody>
-          <a:bodyPr lIns="91440" rIns="91440" tIns="45720" bIns="45720" anchor="ctr">
-            <a:noAutofit/>
-          </a:bodyPr>
-          <a:lstStyle>
-            <a:lvl1pPr indent="0" algn="ctr">
+            <a:lvl1pPr indent="0">
               <a:buNone/>
               <a:defRPr b="0" lang="bg-BG" sz="1400" spc="-1" strike="noStrike">
                 <a:solidFill>
@@ -2983,7 +2226,7 @@
             </a:lvl1pPr>
           </a:lstStyle>
           <a:p>
-            <a:pPr indent="0" algn="ctr">
+            <a:pPr indent="0">
               <a:buNone/>
             </a:pPr>
             <a:r>
@@ -2993,79 +2236,9 @@
                 </a:solidFill>
                 <a:latin typeface="Times New Roman"/>
               </a:rPr>
-              <a:t>&lt;долен колонтитул&gt;</a:t>
+              <a:t>&lt;дата/час&gt;</a:t>
             </a:r>
             <a:endParaRPr b="0" lang="bg-BG" sz="1400" spc="-1" strike="noStrike">
-              <a:solidFill>
-                <a:srgbClr val="000000"/>
-              </a:solidFill>
-              <a:latin typeface="Times New Roman"/>
-            </a:endParaRPr>
-          </a:p>
-        </p:txBody>
-      </p:sp>
-      <p:sp>
-        <p:nvSpPr>
-          <p:cNvPr id="65" name="PlaceHolder 6"/>
-          <p:cNvSpPr>
-            <a:spLocks noGrp="1"/>
-          </p:cNvSpPr>
-          <p:nvPr>
-            <p:ph type="sldNum" idx="33"/>
-          </p:nvPr>
-        </p:nvSpPr>
-        <p:spPr>
-          <a:xfrm>
-            <a:off x="6553080" y="6356520"/>
-            <a:ext cx="2133360" cy="364680"/>
-          </a:xfrm>
-          <a:prstGeom prst="rect">
-            <a:avLst/>
-          </a:prstGeom>
-          <a:noFill/>
-          <a:ln w="0">
-            <a:noFill/>
-          </a:ln>
-        </p:spPr>
-        <p:txBody>
-          <a:bodyPr lIns="91440" rIns="91440" tIns="45720" bIns="45720" anchor="ctr">
-            <a:noAutofit/>
-          </a:bodyPr>
-          <a:lstStyle>
-            <a:lvl1pPr indent="0" algn="r" defTabSz="457200">
-              <a:lnSpc>
-                <a:spcPct val="100000"/>
-              </a:lnSpc>
-              <a:buNone/>
-              <a:defRPr b="0" lang="en-US" sz="1200" spc="-1" strike="noStrike">
-                <a:solidFill>
-                  <a:schemeClr val="dk1">
-                    <a:tint val="75000"/>
-                  </a:schemeClr>
-                </a:solidFill>
-                <a:latin typeface="Calibri"/>
-              </a:defRPr>
-            </a:lvl1pPr>
-          </a:lstStyle>
-          <a:p>
-            <a:pPr indent="0" algn="r" defTabSz="457200">
-              <a:lnSpc>
-                <a:spcPct val="100000"/>
-              </a:lnSpc>
-              <a:buNone/>
-            </a:pPr>
-            <a:fld id="{DF5652BA-25EA-4B13-A835-28E018E3B8EF}" type="slidenum">
-              <a:rPr b="0" lang="en-US" sz="1200" spc="-1" strike="noStrike">
-                <a:solidFill>
-                  <a:schemeClr val="dk1">
-                    <a:tint val="75000"/>
-                  </a:schemeClr>
-                </a:solidFill>
-                <a:latin typeface="Calibri"/>
-              </a:rPr>
-              <a:t>&lt;число&gt;</a:t>
-            </a:fld>
-            <a:endParaRPr b="0" lang="bg-BG" sz="1200" spc="-1" strike="noStrike">
               <a:solidFill>
                 <a:srgbClr val="000000"/>
               </a:solidFill>
@@ -3102,7 +2275,7 @@
       </p:grpSpPr>
       <p:pic>
         <p:nvPicPr>
-          <p:cNvPr id="66" name="" descr=""/>
+          <p:cNvPr id="48" name="" descr=""/>
           <p:cNvPicPr/>
           <p:nvPr/>
         </p:nvPicPr>
@@ -3113,7 +2286,7 @@
         <p:spPr>
           <a:xfrm>
             <a:off x="0" y="0"/>
-            <a:ext cx="9146880" cy="6858720"/>
+            <a:ext cx="9146520" cy="6858360"/>
           </a:xfrm>
           <a:prstGeom prst="rect">
             <a:avLst/>
@@ -3125,7 +2298,7 @@
       </p:pic>
       <p:sp>
         <p:nvSpPr>
-          <p:cNvPr id="67" name="PlaceHolder 1"/>
+          <p:cNvPr id="49" name="PlaceHolder 1"/>
           <p:cNvSpPr>
             <a:spLocks noGrp="1"/>
           </p:cNvSpPr>
@@ -3135,8 +2308,8 @@
         </p:nvSpPr>
         <p:spPr>
           <a:xfrm>
-            <a:off x="456840" y="273240"/>
-            <a:ext cx="8229240" cy="1144800"/>
+            <a:off x="456840" y="-186120"/>
+            <a:ext cx="8228880" cy="2063520"/>
           </a:xfrm>
           <a:prstGeom prst="rect">
             <a:avLst/>
@@ -3151,11 +2324,11 @@
             <a:noAutofit/>
           </a:bodyPr>
           <a:p>
-            <a:pPr indent="0" algn="ctr">
-              <a:buNone/>
-            </a:pPr>
-            <a:r>
-              <a:rPr b="0" lang="bg-BG" sz="7269" spc="-1" strike="noStrike">
+            <a:pPr indent="0">
+              <a:buNone/>
+            </a:pPr>
+            <a:r>
+              <a:rPr b="0" lang="bg-BG" sz="1800" spc="-1" strike="noStrike">
                 <a:solidFill>
                   <a:srgbClr val="000000"/>
                 </a:solidFill>
@@ -3163,18 +2336,18 @@
               </a:rPr>
               <a:t>Щракнете, за да редактирате формата на заглавието</a:t>
             </a:r>
-            <a:endParaRPr b="0" lang="bg-BG" sz="7269" spc="-1" strike="noStrike">
-              <a:solidFill>
-                <a:srgbClr val="000000"/>
-              </a:solidFill>
-              <a:latin typeface="Arial"/>
-            </a:endParaRPr>
-          </a:p>
-        </p:txBody>
-      </p:sp>
-      <p:sp>
-        <p:nvSpPr>
-          <p:cNvPr id="68" name="PlaceHolder 2"/>
+            <a:endParaRPr b="0" lang="bg-BG" sz="1800" spc="-1" strike="noStrike">
+              <a:solidFill>
+                <a:srgbClr val="000000"/>
+              </a:solidFill>
+              <a:latin typeface="Arial"/>
+            </a:endParaRPr>
+          </a:p>
+        </p:txBody>
+      </p:sp>
+      <p:sp>
+        <p:nvSpPr>
+          <p:cNvPr id="50" name="PlaceHolder 2"/>
           <p:cNvSpPr>
             <a:spLocks noGrp="1"/>
           </p:cNvSpPr>
@@ -3185,28 +2358,347 @@
         <p:spPr>
           <a:xfrm>
             <a:off x="456840" y="1604160"/>
+            <a:ext cx="8228880" cy="3976920"/>
+          </a:xfrm>
+          <a:prstGeom prst="rect">
+            <a:avLst/>
+          </a:prstGeom>
+          <a:noFill/>
+          <a:ln w="0">
+            <a:noFill/>
+          </a:ln>
+        </p:spPr>
+        <p:txBody>
+          <a:bodyPr lIns="0" rIns="0" tIns="0" bIns="0" anchor="t">
+            <a:normAutofit/>
+          </a:bodyPr>
+          <a:p>
+            <a:pPr marL="432000" indent="-324000">
+              <a:spcBef>
+                <a:spcPts val="1417"/>
+              </a:spcBef>
+              <a:buClr>
+                <a:srgbClr val="000000"/>
+              </a:buClr>
+              <a:buSzPct val="45000"/>
+              <a:buFont typeface="Wingdings" charset="2"/>
+              <a:buChar char=""/>
+            </a:pPr>
+            <a:r>
+              <a:rPr b="0" lang="bg-BG" sz="1800" spc="-1" strike="noStrike">
+                <a:solidFill>
+                  <a:srgbClr val="000000"/>
+                </a:solidFill>
+                <a:latin typeface="Arial"/>
+              </a:rPr>
+              <a:t>Щракнете, за да редактирате формата на плана</a:t>
+            </a:r>
+            <a:endParaRPr b="0" lang="bg-BG" sz="1800" spc="-1" strike="noStrike">
+              <a:solidFill>
+                <a:srgbClr val="000000"/>
+              </a:solidFill>
+              <a:latin typeface="Arial"/>
+            </a:endParaRPr>
+          </a:p>
+          <a:p>
+            <a:pPr lvl="1" marL="864000" indent="-324000">
+              <a:spcBef>
+                <a:spcPts val="1134"/>
+              </a:spcBef>
+              <a:buClr>
+                <a:srgbClr val="000000"/>
+              </a:buClr>
+              <a:buSzPct val="75000"/>
+              <a:buFont typeface="Symbol" charset="2"/>
+              <a:buChar char=""/>
+            </a:pPr>
+            <a:r>
+              <a:rPr b="0" lang="bg-BG" sz="1800" spc="-1" strike="noStrike">
+                <a:solidFill>
+                  <a:srgbClr val="000000"/>
+                </a:solidFill>
+                <a:latin typeface="Arial"/>
+              </a:rPr>
+              <a:t>Второ ниво на плана</a:t>
+            </a:r>
+            <a:endParaRPr b="0" lang="bg-BG" sz="1800" spc="-1" strike="noStrike">
+              <a:solidFill>
+                <a:srgbClr val="000000"/>
+              </a:solidFill>
+              <a:latin typeface="Arial"/>
+            </a:endParaRPr>
+          </a:p>
+          <a:p>
+            <a:pPr lvl="2" marL="1296000" indent="-288000">
+              <a:spcBef>
+                <a:spcPts val="850"/>
+              </a:spcBef>
+              <a:buClr>
+                <a:srgbClr val="000000"/>
+              </a:buClr>
+              <a:buSzPct val="45000"/>
+              <a:buFont typeface="Wingdings" charset="2"/>
+              <a:buChar char=""/>
+            </a:pPr>
+            <a:r>
+              <a:rPr b="0" lang="bg-BG" sz="1800" spc="-1" strike="noStrike">
+                <a:solidFill>
+                  <a:srgbClr val="000000"/>
+                </a:solidFill>
+                <a:latin typeface="Arial"/>
+              </a:rPr>
+              <a:t>Трето ниво на плана</a:t>
+            </a:r>
+            <a:endParaRPr b="0" lang="bg-BG" sz="1800" spc="-1" strike="noStrike">
+              <a:solidFill>
+                <a:srgbClr val="000000"/>
+              </a:solidFill>
+              <a:latin typeface="Arial"/>
+            </a:endParaRPr>
+          </a:p>
+          <a:p>
+            <a:pPr lvl="3" marL="1728000" indent="-216000">
+              <a:spcBef>
+                <a:spcPts val="567"/>
+              </a:spcBef>
+              <a:buClr>
+                <a:srgbClr val="000000"/>
+              </a:buClr>
+              <a:buSzPct val="75000"/>
+              <a:buFont typeface="Symbol" charset="2"/>
+              <a:buChar char=""/>
+            </a:pPr>
+            <a:r>
+              <a:rPr b="0" lang="bg-BG" sz="1800" spc="-1" strike="noStrike">
+                <a:solidFill>
+                  <a:srgbClr val="000000"/>
+                </a:solidFill>
+                <a:latin typeface="Arial"/>
+              </a:rPr>
+              <a:t>Четвърто ниво на плана</a:t>
+            </a:r>
+            <a:endParaRPr b="0" lang="bg-BG" sz="1800" spc="-1" strike="noStrike">
+              <a:solidFill>
+                <a:srgbClr val="000000"/>
+              </a:solidFill>
+              <a:latin typeface="Arial"/>
+            </a:endParaRPr>
+          </a:p>
+          <a:p>
+            <a:pPr lvl="4" marL="2160000" indent="-216000">
+              <a:spcBef>
+                <a:spcPts val="283"/>
+              </a:spcBef>
+              <a:buClr>
+                <a:srgbClr val="000000"/>
+              </a:buClr>
+              <a:buSzPct val="45000"/>
+              <a:buFont typeface="Wingdings" charset="2"/>
+              <a:buChar char=""/>
+            </a:pPr>
+            <a:r>
+              <a:rPr b="0" lang="bg-BG" sz="1800" spc="-1" strike="noStrike">
+                <a:solidFill>
+                  <a:srgbClr val="000000"/>
+                </a:solidFill>
+                <a:latin typeface="Arial"/>
+              </a:rPr>
+              <a:t>Пето ниво на плана</a:t>
+            </a:r>
+            <a:endParaRPr b="0" lang="bg-BG" sz="1800" spc="-1" strike="noStrike">
+              <a:solidFill>
+                <a:srgbClr val="000000"/>
+              </a:solidFill>
+              <a:latin typeface="Arial"/>
+            </a:endParaRPr>
+          </a:p>
+          <a:p>
+            <a:pPr lvl="5" marL="2592000" indent="-216000">
+              <a:spcBef>
+                <a:spcPts val="283"/>
+              </a:spcBef>
+              <a:buClr>
+                <a:srgbClr val="000000"/>
+              </a:buClr>
+              <a:buSzPct val="45000"/>
+              <a:buFont typeface="Wingdings" charset="2"/>
+              <a:buChar char=""/>
+            </a:pPr>
+            <a:r>
+              <a:rPr b="0" lang="bg-BG" sz="1800" spc="-1" strike="noStrike">
+                <a:solidFill>
+                  <a:srgbClr val="000000"/>
+                </a:solidFill>
+                <a:latin typeface="Arial"/>
+              </a:rPr>
+              <a:t>Шесто ниво на плана</a:t>
+            </a:r>
+            <a:endParaRPr b="0" lang="bg-BG" sz="1800" spc="-1" strike="noStrike">
+              <a:solidFill>
+                <a:srgbClr val="000000"/>
+              </a:solidFill>
+              <a:latin typeface="Arial"/>
+            </a:endParaRPr>
+          </a:p>
+          <a:p>
+            <a:pPr lvl="6" marL="3024000" indent="-216000">
+              <a:spcBef>
+                <a:spcPts val="283"/>
+              </a:spcBef>
+              <a:buClr>
+                <a:srgbClr val="000000"/>
+              </a:buClr>
+              <a:buSzPct val="45000"/>
+              <a:buFont typeface="Wingdings" charset="2"/>
+              <a:buChar char=""/>
+            </a:pPr>
+            <a:r>
+              <a:rPr b="0" lang="bg-BG" sz="1800" spc="-1" strike="noStrike">
+                <a:solidFill>
+                  <a:srgbClr val="000000"/>
+                </a:solidFill>
+                <a:latin typeface="Arial"/>
+              </a:rPr>
+              <a:t>Седмо ниво на плана</a:t>
+            </a:r>
+            <a:endParaRPr b="0" lang="bg-BG" sz="1800" spc="-1" strike="noStrike">
+              <a:solidFill>
+                <a:srgbClr val="000000"/>
+              </a:solidFill>
+              <a:latin typeface="Arial"/>
+            </a:endParaRPr>
+          </a:p>
+        </p:txBody>
+      </p:sp>
+    </p:spTree>
+  </p:cSld>
+  <p:clrMap bg1="lt1" bg2="lt2" tx1="dk1" tx2="dk2" accent1="accent1" accent2="accent2" accent3="accent3" accent4="accent4" accent5="accent5" accent6="accent6" hlink="hlink" folHlink="folHlink"/>
+  <p:sldLayoutIdLst>
+    <p:sldLayoutId id="2147483671" r:id="rId3"/>
+  </p:sldLayoutIdLst>
+</p:sldMaster>
+</file>
+
+<file path=ppt/slideMasters/slideMaster13.xml><?xml version="1.0" encoding="utf-8"?>
+<p:sldMaster xmlns:a="http://schemas.openxmlformats.org/drawingml/2006/main" xmlns:p="http://schemas.openxmlformats.org/presentationml/2006/main" xmlns:r="http://schemas.openxmlformats.org/officeDocument/2006/relationships" xmlns:p14="http://schemas.microsoft.com/office/powerpoint/2010/main" xmlns:p15="http://schemas.microsoft.com/office/powerpoint/2012/main" xmlns:mc="http://schemas.openxmlformats.org/markup-compatibility/2006">
+  <p:cSld>
+    <p:spTree>
+      <p:nvGrpSpPr>
+        <p:cNvPr id="1" name=""/>
+        <p:cNvGrpSpPr/>
+        <p:nvPr/>
+      </p:nvGrpSpPr>
+      <p:grpSpPr>
+        <a:xfrm>
+          <a:off x="0" y="0"/>
+          <a:ext cx="0" cy="0"/>
+          <a:chOff x="0" y="0"/>
+          <a:chExt cx="0" cy="0"/>
+        </a:xfrm>
+      </p:grpSpPr>
+      <p:pic>
+        <p:nvPicPr>
+          <p:cNvPr id="53" name="" descr=""/>
+          <p:cNvPicPr/>
+          <p:nvPr/>
+        </p:nvPicPr>
+        <p:blipFill>
+          <a:blip r:embed="rId2"/>
+          <a:stretch/>
+        </p:blipFill>
+        <p:spPr>
+          <a:xfrm>
+            <a:off x="0" y="0"/>
+            <a:ext cx="9146520" cy="6858360"/>
+          </a:xfrm>
+          <a:prstGeom prst="rect">
+            <a:avLst/>
+          </a:prstGeom>
+          <a:ln w="0">
+            <a:noFill/>
+          </a:ln>
+        </p:spPr>
+      </p:pic>
+      <p:sp>
+        <p:nvSpPr>
+          <p:cNvPr id="54" name="PlaceHolder 1"/>
+          <p:cNvSpPr>
+            <a:spLocks noGrp="1"/>
+          </p:cNvSpPr>
+          <p:nvPr>
+            <p:ph type="title"/>
+          </p:nvPr>
+        </p:nvSpPr>
+        <p:spPr>
+          <a:xfrm>
+            <a:off x="456840" y="-186120"/>
+            <a:ext cx="8228880" cy="2063520"/>
+          </a:xfrm>
+          <a:prstGeom prst="rect">
+            <a:avLst/>
+          </a:prstGeom>
+          <a:noFill/>
+          <a:ln w="0">
+            <a:noFill/>
+          </a:ln>
+        </p:spPr>
+        <p:txBody>
+          <a:bodyPr lIns="0" rIns="0" tIns="0" bIns="0" anchor="ctr">
+            <a:noAutofit/>
+          </a:bodyPr>
+          <a:p>
+            <a:pPr indent="0">
+              <a:buNone/>
+            </a:pPr>
+            <a:r>
+              <a:rPr b="0" lang="bg-BG" sz="1800" spc="-1" strike="noStrike">
+                <a:solidFill>
+                  <a:srgbClr val="000000"/>
+                </a:solidFill>
+                <a:latin typeface="Arial"/>
+              </a:rPr>
+              <a:t>Щракнете, за да редактирате формата на заглавието</a:t>
+            </a:r>
+            <a:endParaRPr b="0" lang="bg-BG" sz="1800" spc="-1" strike="noStrike">
+              <a:solidFill>
+                <a:srgbClr val="000000"/>
+              </a:solidFill>
+              <a:latin typeface="Arial"/>
+            </a:endParaRPr>
+          </a:p>
+        </p:txBody>
+      </p:sp>
+      <p:sp>
+        <p:nvSpPr>
+          <p:cNvPr id="55" name="PlaceHolder 2"/>
+          <p:cNvSpPr>
+            <a:spLocks noGrp="1"/>
+          </p:cNvSpPr>
+          <p:nvPr>
+            <p:ph type="body"/>
+          </p:nvPr>
+        </p:nvSpPr>
+        <p:spPr>
+          <a:xfrm>
+            <a:off x="457200" y="1604520"/>
             <a:ext cx="8229240" cy="3977280"/>
           </a:xfrm>
           <a:prstGeom prst="rect">
             <a:avLst/>
           </a:prstGeom>
-          <a:solidFill>
-            <a:srgbClr val="729fcf"/>
-          </a:solidFill>
+          <a:noFill/>
           <a:ln w="0">
-            <a:solidFill>
-              <a:srgbClr val="3465a4"/>
-            </a:solidFill>
+            <a:noFill/>
           </a:ln>
         </p:spPr>
         <p:txBody>
           <a:bodyPr lIns="0" rIns="0" tIns="0" bIns="0" anchor="t">
-            <a:noAutofit/>
+            <a:normAutofit/>
           </a:bodyPr>
           <a:p>
             <a:pPr marL="432000" indent="-324000">
               <a:spcBef>
-                <a:spcPts val="2069"/>
+                <a:spcPts val="1417"/>
               </a:spcBef>
               <a:buClr>
                 <a:srgbClr val="000000"/>
@@ -3216,7 +2708,7 @@
               <a:buChar char=""/>
             </a:pPr>
             <a:r>
-              <a:rPr b="0" lang="bg-BG" sz="4680" spc="-1" strike="noStrike">
+              <a:rPr b="0" lang="bg-BG" sz="3200" spc="-1" strike="noStrike">
                 <a:solidFill>
                   <a:srgbClr val="000000"/>
                 </a:solidFill>
@@ -3224,7 +2716,7 @@
               </a:rPr>
               <a:t>Щракнете, за да редактирате формата на плана</a:t>
             </a:r>
-            <a:endParaRPr b="0" lang="bg-BG" sz="4680" spc="-1" strike="noStrike">
+            <a:endParaRPr b="0" lang="bg-BG" sz="3200" spc="-1" strike="noStrike">
               <a:solidFill>
                 <a:srgbClr val="000000"/>
               </a:solidFill>
@@ -3234,7 +2726,7 @@
           <a:p>
             <a:pPr lvl="1" marL="864000" indent="-324000">
               <a:spcBef>
-                <a:spcPts val="1655"/>
+                <a:spcPts val="1134"/>
               </a:spcBef>
               <a:buClr>
                 <a:srgbClr val="000000"/>
@@ -3244,7 +2736,7 @@
               <a:buChar char=""/>
             </a:pPr>
             <a:r>
-              <a:rPr b="0" lang="bg-BG" sz="4100" spc="-1" strike="noStrike">
+              <a:rPr b="0" lang="bg-BG" sz="2800" spc="-1" strike="noStrike">
                 <a:solidFill>
                   <a:srgbClr val="000000"/>
                 </a:solidFill>
@@ -3252,7 +2744,7 @@
               </a:rPr>
               <a:t>Второ ниво на плана</a:t>
             </a:r>
-            <a:endParaRPr b="0" lang="bg-BG" sz="4100" spc="-1" strike="noStrike">
+            <a:endParaRPr b="0" lang="bg-BG" sz="2800" spc="-1" strike="noStrike">
               <a:solidFill>
                 <a:srgbClr val="000000"/>
               </a:solidFill>
@@ -3262,7 +2754,7 @@
           <a:p>
             <a:pPr lvl="2" marL="1296000" indent="-288000">
               <a:spcBef>
-                <a:spcPts val="1239"/>
+                <a:spcPts val="850"/>
               </a:spcBef>
               <a:buClr>
                 <a:srgbClr val="000000"/>
@@ -3272,7 +2764,7 @@
               <a:buChar char=""/>
             </a:pPr>
             <a:r>
-              <a:rPr b="0" lang="bg-BG" sz="3509" spc="-1" strike="noStrike">
+              <a:rPr b="0" lang="bg-BG" sz="2400" spc="-1" strike="noStrike">
                 <a:solidFill>
                   <a:srgbClr val="000000"/>
                 </a:solidFill>
@@ -3280,7 +2772,7 @@
               </a:rPr>
               <a:t>Трето ниво на плана</a:t>
             </a:r>
-            <a:endParaRPr b="0" lang="bg-BG" sz="3509" spc="-1" strike="noStrike">
+            <a:endParaRPr b="0" lang="bg-BG" sz="2400" spc="-1" strike="noStrike">
               <a:solidFill>
                 <a:srgbClr val="000000"/>
               </a:solidFill>
@@ -3290,7 +2782,7 @@
           <a:p>
             <a:pPr lvl="3" marL="1728000" indent="-216000">
               <a:spcBef>
-                <a:spcPts val="825"/>
+                <a:spcPts val="567"/>
               </a:spcBef>
               <a:buClr>
                 <a:srgbClr val="000000"/>
@@ -3300,7 +2792,7 @@
               <a:buChar char=""/>
             </a:pPr>
             <a:r>
-              <a:rPr b="0" lang="bg-BG" sz="2930" spc="-1" strike="noStrike">
+              <a:rPr b="0" lang="bg-BG" sz="2000" spc="-1" strike="noStrike">
                 <a:solidFill>
                   <a:srgbClr val="000000"/>
                 </a:solidFill>
@@ -3308,7 +2800,7 @@
               </a:rPr>
               <a:t>Четвърто ниво на плана</a:t>
             </a:r>
-            <a:endParaRPr b="0" lang="bg-BG" sz="2930" spc="-1" strike="noStrike">
+            <a:endParaRPr b="0" lang="bg-BG" sz="2000" spc="-1" strike="noStrike">
               <a:solidFill>
                 <a:srgbClr val="000000"/>
               </a:solidFill>
@@ -3318,7 +2810,7 @@
           <a:p>
             <a:pPr lvl="4" marL="2160000" indent="-216000">
               <a:spcBef>
-                <a:spcPts val="411"/>
+                <a:spcPts val="283"/>
               </a:spcBef>
               <a:buClr>
                 <a:srgbClr val="000000"/>
@@ -3328,7 +2820,7 @@
               <a:buChar char=""/>
             </a:pPr>
             <a:r>
-              <a:rPr b="0" lang="bg-BG" sz="2930" spc="-1" strike="noStrike">
+              <a:rPr b="0" lang="bg-BG" sz="2000" spc="-1" strike="noStrike">
                 <a:solidFill>
                   <a:srgbClr val="000000"/>
                 </a:solidFill>
@@ -3336,7 +2828,7 @@
               </a:rPr>
               <a:t>Пето ниво на плана</a:t>
             </a:r>
-            <a:endParaRPr b="0" lang="bg-BG" sz="2930" spc="-1" strike="noStrike">
+            <a:endParaRPr b="0" lang="bg-BG" sz="2000" spc="-1" strike="noStrike">
               <a:solidFill>
                 <a:srgbClr val="000000"/>
               </a:solidFill>
@@ -3346,7 +2838,7 @@
           <a:p>
             <a:pPr lvl="5" marL="2592000" indent="-216000">
               <a:spcBef>
-                <a:spcPts val="411"/>
+                <a:spcPts val="283"/>
               </a:spcBef>
               <a:buClr>
                 <a:srgbClr val="000000"/>
@@ -3356,7 +2848,7 @@
               <a:buChar char=""/>
             </a:pPr>
             <a:r>
-              <a:rPr b="0" lang="bg-BG" sz="2930" spc="-1" strike="noStrike">
+              <a:rPr b="0" lang="bg-BG" sz="2000" spc="-1" strike="noStrike">
                 <a:solidFill>
                   <a:srgbClr val="000000"/>
                 </a:solidFill>
@@ -3364,7 +2856,7 @@
               </a:rPr>
               <a:t>Шесто ниво на плана</a:t>
             </a:r>
-            <a:endParaRPr b="0" lang="bg-BG" sz="2930" spc="-1" strike="noStrike">
+            <a:endParaRPr b="0" lang="bg-BG" sz="2000" spc="-1" strike="noStrike">
               <a:solidFill>
                 <a:srgbClr val="000000"/>
               </a:solidFill>
@@ -3374,7 +2866,7 @@
           <a:p>
             <a:pPr lvl="6" marL="3024000" indent="-216000">
               <a:spcBef>
-                <a:spcPts val="411"/>
+                <a:spcPts val="283"/>
               </a:spcBef>
               <a:buClr>
                 <a:srgbClr val="000000"/>
@@ -3384,7 +2876,7 @@
               <a:buChar char=""/>
             </a:pPr>
             <a:r>
-              <a:rPr b="0" lang="bg-BG" sz="2930" spc="-1" strike="noStrike">
+              <a:rPr b="0" lang="bg-BG" sz="2000" spc="-1" strike="noStrike">
                 <a:solidFill>
                   <a:srgbClr val="000000"/>
                 </a:solidFill>
@@ -3392,7 +2884,7 @@
               </a:rPr>
               <a:t>Седмо ниво на плана</a:t>
             </a:r>
-            <a:endParaRPr b="0" lang="bg-BG" sz="2930" spc="-1" strike="noStrike">
+            <a:endParaRPr b="0" lang="bg-BG" sz="2000" spc="-1" strike="noStrike">
               <a:solidFill>
                 <a:srgbClr val="000000"/>
               </a:solidFill>
@@ -3405,8 +2897,7 @@
   </p:cSld>
   <p:clrMap bg1="lt1" bg2="lt2" tx1="dk1" tx2="dk2" accent1="accent1" accent2="accent2" accent3="accent3" accent4="accent4" accent5="accent5" accent6="accent6" hlink="hlink" folHlink="folHlink"/>
   <p:sldLayoutIdLst>
-    <p:sldLayoutId id="2147483671" r:id="rId3"/>
-    <p:sldLayoutId id="2147483672" r:id="rId4"/>
+    <p:sldLayoutId id="2147483673" r:id="rId3"/>
   </p:sldLayoutIdLst>
 </p:sldMaster>
 </file>
@@ -3437,18 +2928,18 @@
       </p:grpSpPr>
       <p:sp>
         <p:nvSpPr>
-          <p:cNvPr id="7" name="PlaceHolder 1"/>
-          <p:cNvSpPr>
-            <a:spLocks noGrp="1"/>
-          </p:cNvSpPr>
-          <p:nvPr>
-            <p:ph type="title"/>
+          <p:cNvPr id="6" name="PlaceHolder 1"/>
+          <p:cNvSpPr>
+            <a:spLocks noGrp="1"/>
+          </p:cNvSpPr>
+          <p:nvPr>
+            <p:ph type="ftr" idx="4"/>
           </p:nvPr>
         </p:nvSpPr>
         <p:spPr>
           <a:xfrm>
-            <a:off x="457200" y="274680"/>
-            <a:ext cx="8229240" cy="1142640"/>
+            <a:off x="3124080" y="6356520"/>
+            <a:ext cx="2894760" cy="364320"/>
           </a:xfrm>
           <a:prstGeom prst="rect">
             <a:avLst/>
@@ -3462,45 +2953,65 @@
           <a:bodyPr lIns="91440" rIns="91440" tIns="45720" bIns="45720" anchor="ctr">
             <a:noAutofit/>
           </a:bodyPr>
-          <a:p>
-            <a:pPr indent="0" algn="ctr" defTabSz="457200">
-              <a:lnSpc>
-                <a:spcPct val="100000"/>
-              </a:lnSpc>
-              <a:buNone/>
-            </a:pPr>
-            <a:r>
-              <a:rPr b="0" lang="en-US" sz="4400" spc="-1" strike="noStrike">
-                <a:solidFill>
-                  <a:schemeClr val="dk1"/>
-                </a:solidFill>
-                <a:latin typeface="Calibri"/>
-              </a:rPr>
-              <a:t>Click to edit Master title style</a:t>
-            </a:r>
-            <a:endParaRPr b="0" lang="en-US" sz="4400" spc="-1" strike="noStrike">
-              <a:solidFill>
-                <a:schemeClr val="dk1"/>
-              </a:solidFill>
-              <a:latin typeface="Calibri"/>
-            </a:endParaRPr>
-          </a:p>
-        </p:txBody>
-      </p:sp>
-      <p:sp>
-        <p:nvSpPr>
-          <p:cNvPr id="8" name="PlaceHolder 2"/>
-          <p:cNvSpPr>
-            <a:spLocks noGrp="1"/>
-          </p:cNvSpPr>
-          <p:nvPr>
-            <p:ph type="body"/>
+          <a:lstStyle>
+            <a:lvl1pPr indent="0" algn="ctr">
+              <a:lnSpc>
+                <a:spcPct val="100000"/>
+              </a:lnSpc>
+              <a:buNone/>
+              <a:tabLst>
+                <a:tab algn="l" pos="0"/>
+              </a:tabLst>
+              <a:defRPr b="0" lang="bg-BG" sz="1400" spc="-1" strike="noStrike">
+                <a:solidFill>
+                  <a:srgbClr val="000000"/>
+                </a:solidFill>
+                <a:latin typeface="Times New Roman"/>
+              </a:defRPr>
+            </a:lvl1pPr>
+          </a:lstStyle>
+          <a:p>
+            <a:pPr indent="0" algn="ctr">
+              <a:lnSpc>
+                <a:spcPct val="100000"/>
+              </a:lnSpc>
+              <a:buNone/>
+              <a:tabLst>
+                <a:tab algn="l" pos="0"/>
+              </a:tabLst>
+            </a:pPr>
+            <a:r>
+              <a:rPr b="0" lang="bg-BG" sz="1400" spc="-1" strike="noStrike">
+                <a:solidFill>
+                  <a:srgbClr val="000000"/>
+                </a:solidFill>
+                <a:latin typeface="Times New Roman"/>
+              </a:rPr>
+              <a:t>&lt;долен колонтитул&gt;</a:t>
+            </a:r>
+            <a:endParaRPr b="0" lang="bg-BG" sz="1400" spc="-1" strike="noStrike">
+              <a:solidFill>
+                <a:srgbClr val="000000"/>
+              </a:solidFill>
+              <a:latin typeface="Times New Roman"/>
+            </a:endParaRPr>
+          </a:p>
+        </p:txBody>
+      </p:sp>
+      <p:sp>
+        <p:nvSpPr>
+          <p:cNvPr id="7" name="PlaceHolder 2"/>
+          <p:cNvSpPr>
+            <a:spLocks noGrp="1"/>
+          </p:cNvSpPr>
+          <p:nvPr>
+            <p:ph type="sldNum" idx="5"/>
           </p:nvPr>
         </p:nvSpPr>
         <p:spPr>
           <a:xfrm>
-            <a:off x="457200" y="1600200"/>
-            <a:ext cx="8229240" cy="4525560"/>
+            <a:off x="6553080" y="6356520"/>
+            <a:ext cx="2133000" cy="364320"/>
           </a:xfrm>
           <a:prstGeom prst="rect">
             <a:avLst/>
@@ -3511,175 +3022,72 @@
           </a:ln>
         </p:spPr>
         <p:txBody>
-          <a:bodyPr lIns="91440" rIns="91440" tIns="45720" bIns="45720" anchor="t" vert="eaVert">
+          <a:bodyPr lIns="91440" rIns="91440" tIns="45720" bIns="45720" anchor="ctr">
             <a:noAutofit/>
           </a:bodyPr>
-          <a:p>
-            <a:pPr marL="343080" indent="-343080" defTabSz="457200">
-              <a:lnSpc>
-                <a:spcPct val="100000"/>
-              </a:lnSpc>
-              <a:spcBef>
-                <a:spcPts val="641"/>
-              </a:spcBef>
-              <a:buClr>
-                <a:srgbClr val="000000"/>
-              </a:buClr>
-              <a:buFont typeface="Arial"/>
-              <a:buChar char="•"/>
-            </a:pPr>
-            <a:r>
-              <a:rPr b="0" lang="en-US" sz="3200" spc="-1" strike="noStrike">
-                <a:solidFill>
-                  <a:schemeClr val="dk1"/>
+          <a:lstStyle>
+            <a:lvl1pPr indent="0" algn="r" defTabSz="457200">
+              <a:lnSpc>
+                <a:spcPct val="100000"/>
+              </a:lnSpc>
+              <a:buNone/>
+              <a:tabLst>
+                <a:tab algn="l" pos="0"/>
+              </a:tabLst>
+              <a:defRPr b="0" lang="en-US" sz="1200" spc="-1" strike="noStrike">
+                <a:solidFill>
+                  <a:schemeClr val="dk1">
+                    <a:tint val="75000"/>
+                  </a:schemeClr>
                 </a:solidFill>
                 <a:latin typeface="Calibri"/>
-              </a:rPr>
-              <a:t>Click to edit Master text styles</a:t>
-            </a:r>
-            <a:endParaRPr b="0" lang="en-US" sz="3200" spc="-1" strike="noStrike">
-              <a:solidFill>
-                <a:schemeClr val="dk1"/>
-              </a:solidFill>
-              <a:latin typeface="Calibri"/>
-            </a:endParaRPr>
-          </a:p>
-          <a:p>
-            <a:pPr lvl="1" marL="743040" indent="-285840" defTabSz="457200">
-              <a:lnSpc>
-                <a:spcPct val="100000"/>
-              </a:lnSpc>
-              <a:spcBef>
-                <a:spcPts val="561"/>
-              </a:spcBef>
-              <a:buClr>
-                <a:srgbClr val="000000"/>
-              </a:buClr>
-              <a:buFont typeface="Arial"/>
-              <a:buChar char="–"/>
-            </a:pPr>
-            <a:r>
-              <a:rPr b="0" lang="en-US" sz="2800" spc="-1" strike="noStrike">
-                <a:solidFill>
-                  <a:schemeClr val="dk1"/>
+              </a:defRPr>
+            </a:lvl1pPr>
+          </a:lstStyle>
+          <a:p>
+            <a:pPr indent="0" algn="r" defTabSz="457200">
+              <a:lnSpc>
+                <a:spcPct val="100000"/>
+              </a:lnSpc>
+              <a:buNone/>
+              <a:tabLst>
+                <a:tab algn="l" pos="0"/>
+              </a:tabLst>
+            </a:pPr>
+            <a:fld id="{B44DE40E-03F2-44DE-8C33-5B2D4D2CA95D}" type="slidenum">
+              <a:rPr b="0" lang="en-US" sz="1200" spc="-1" strike="noStrike">
+                <a:solidFill>
+                  <a:schemeClr val="dk1">
+                    <a:tint val="75000"/>
+                  </a:schemeClr>
                 </a:solidFill>
                 <a:latin typeface="Calibri"/>
               </a:rPr>
-              <a:t>Second level</a:t>
-            </a:r>
-            <a:endParaRPr b="0" lang="en-US" sz="2800" spc="-1" strike="noStrike">
-              <a:solidFill>
-                <a:schemeClr val="dk1"/>
-              </a:solidFill>
-              <a:latin typeface="Calibri"/>
-            </a:endParaRPr>
-          </a:p>
-          <a:p>
-            <a:pPr lvl="2" marL="1143000" indent="-228600" defTabSz="457200">
-              <a:lnSpc>
-                <a:spcPct val="100000"/>
-              </a:lnSpc>
-              <a:spcBef>
-                <a:spcPts val="479"/>
-              </a:spcBef>
-              <a:buClr>
-                <a:srgbClr val="000000"/>
-              </a:buClr>
-              <a:buFont typeface="Arial"/>
-              <a:buChar char="•"/>
-            </a:pPr>
-            <a:r>
-              <a:rPr b="0" lang="en-US" sz="2400" spc="-1" strike="noStrike">
-                <a:solidFill>
-                  <a:schemeClr val="dk1"/>
-                </a:solidFill>
-                <a:latin typeface="Calibri"/>
-              </a:rPr>
-              <a:t>Third level</a:t>
-            </a:r>
-            <a:endParaRPr b="0" lang="en-US" sz="2400" spc="-1" strike="noStrike">
-              <a:solidFill>
-                <a:schemeClr val="dk1"/>
-              </a:solidFill>
-              <a:latin typeface="Calibri"/>
-            </a:endParaRPr>
-          </a:p>
-          <a:p>
-            <a:pPr lvl="3" marL="1600200" indent="-228600" defTabSz="457200">
-              <a:lnSpc>
-                <a:spcPct val="100000"/>
-              </a:lnSpc>
-              <a:spcBef>
-                <a:spcPts val="400"/>
-              </a:spcBef>
-              <a:buClr>
-                <a:srgbClr val="000000"/>
-              </a:buClr>
-              <a:buFont typeface="Arial"/>
-              <a:buChar char="–"/>
-            </a:pPr>
-            <a:r>
-              <a:rPr b="0" lang="en-US" sz="2000" spc="-1" strike="noStrike">
-                <a:solidFill>
-                  <a:schemeClr val="dk1"/>
-                </a:solidFill>
-                <a:latin typeface="Calibri"/>
-              </a:rPr>
-              <a:t>Fourth level</a:t>
-            </a:r>
-            <a:endParaRPr b="0" lang="en-US" sz="2000" spc="-1" strike="noStrike">
-              <a:solidFill>
-                <a:schemeClr val="dk1"/>
-              </a:solidFill>
-              <a:latin typeface="Calibri"/>
-            </a:endParaRPr>
-          </a:p>
-          <a:p>
-            <a:pPr lvl="4" marL="2057400" indent="-228600" defTabSz="457200">
-              <a:lnSpc>
-                <a:spcPct val="100000"/>
-              </a:lnSpc>
-              <a:spcBef>
-                <a:spcPts val="400"/>
-              </a:spcBef>
-              <a:buClr>
-                <a:srgbClr val="000000"/>
-              </a:buClr>
-              <a:buFont typeface="Arial"/>
-              <a:buChar char="»"/>
-            </a:pPr>
-            <a:r>
-              <a:rPr b="0" lang="en-US" sz="2000" spc="-1" strike="noStrike">
-                <a:solidFill>
-                  <a:schemeClr val="dk1"/>
-                </a:solidFill>
-                <a:latin typeface="Calibri"/>
-              </a:rPr>
-              <a:t>Fifth level</a:t>
-            </a:r>
-            <a:endParaRPr b="0" lang="en-US" sz="2000" spc="-1" strike="noStrike">
-              <a:solidFill>
-                <a:schemeClr val="dk1"/>
-              </a:solidFill>
-              <a:latin typeface="Calibri"/>
-            </a:endParaRPr>
-          </a:p>
-        </p:txBody>
-      </p:sp>
-      <p:sp>
-        <p:nvSpPr>
-          <p:cNvPr id="9" name="PlaceHolder 3"/>
-          <p:cNvSpPr>
-            <a:spLocks noGrp="1"/>
-          </p:cNvSpPr>
-          <p:nvPr>
-            <p:ph type="dt" idx="4"/>
+              <a:t>&lt;число&gt;</a:t>
+            </a:fld>
+            <a:endParaRPr b="0" lang="bg-BG" sz="1200" spc="-1" strike="noStrike">
+              <a:solidFill>
+                <a:srgbClr val="000000"/>
+              </a:solidFill>
+              <a:latin typeface="Times New Roman"/>
+            </a:endParaRPr>
+          </a:p>
+        </p:txBody>
+      </p:sp>
+      <p:sp>
+        <p:nvSpPr>
+          <p:cNvPr id="8" name="PlaceHolder 3"/>
+          <p:cNvSpPr>
+            <a:spLocks noGrp="1"/>
+          </p:cNvSpPr>
+          <p:nvPr>
+            <p:ph type="dt" idx="6"/>
           </p:nvPr>
         </p:nvSpPr>
         <p:spPr>
           <a:xfrm>
             <a:off x="457200" y="6356520"/>
-            <a:ext cx="2133360" cy="364680"/>
+            <a:ext cx="2133000" cy="364320"/>
           </a:xfrm>
           <a:prstGeom prst="rect">
             <a:avLst/>
@@ -3694,77 +3102,7 @@
             <a:noAutofit/>
           </a:bodyPr>
           <a:lstStyle>
-            <a:lvl1pPr indent="0" defTabSz="457200">
-              <a:lnSpc>
-                <a:spcPct val="100000"/>
-              </a:lnSpc>
-              <a:buNone/>
-              <a:defRPr b="0" lang="en-US" sz="1200" spc="-1" strike="noStrike">
-                <a:solidFill>
-                  <a:schemeClr val="dk1">
-                    <a:tint val="75000"/>
-                  </a:schemeClr>
-                </a:solidFill>
-                <a:latin typeface="Calibri"/>
-              </a:defRPr>
-            </a:lvl1pPr>
-          </a:lstStyle>
-          <a:p>
-            <a:pPr indent="0" defTabSz="457200">
-              <a:lnSpc>
-                <a:spcPct val="100000"/>
-              </a:lnSpc>
-              <a:buNone/>
-            </a:pPr>
-            <a:r>
-              <a:rPr b="0" lang="en-US" sz="1200" spc="-1" strike="noStrike">
-                <a:solidFill>
-                  <a:schemeClr val="dk1">
-                    <a:tint val="75000"/>
-                  </a:schemeClr>
-                </a:solidFill>
-                <a:latin typeface="Calibri"/>
-              </a:rPr>
-              <a:t>&lt;дата/час&gt;</a:t>
-            </a:r>
-            <a:endParaRPr b="0" lang="bg-BG" sz="1200" spc="-1" strike="noStrike">
-              <a:solidFill>
-                <a:srgbClr val="000000"/>
-              </a:solidFill>
-              <a:latin typeface="Times New Roman"/>
-            </a:endParaRPr>
-          </a:p>
-        </p:txBody>
-      </p:sp>
-      <p:sp>
-        <p:nvSpPr>
-          <p:cNvPr id="10" name="PlaceHolder 4"/>
-          <p:cNvSpPr>
-            <a:spLocks noGrp="1"/>
-          </p:cNvSpPr>
-          <p:nvPr>
-            <p:ph type="ftr" idx="5"/>
-          </p:nvPr>
-        </p:nvSpPr>
-        <p:spPr>
-          <a:xfrm>
-            <a:off x="3124080" y="6356520"/>
-            <a:ext cx="2895120" cy="364680"/>
-          </a:xfrm>
-          <a:prstGeom prst="rect">
-            <a:avLst/>
-          </a:prstGeom>
-          <a:noFill/>
-          <a:ln w="0">
-            <a:noFill/>
-          </a:ln>
-        </p:spPr>
-        <p:txBody>
-          <a:bodyPr lIns="91440" rIns="91440" tIns="45720" bIns="45720" anchor="ctr">
-            <a:noAutofit/>
-          </a:bodyPr>
-          <a:lstStyle>
-            <a:lvl1pPr indent="0" algn="ctr">
+            <a:lvl1pPr indent="0">
               <a:buNone/>
               <a:defRPr b="0" lang="bg-BG" sz="1400" spc="-1" strike="noStrike">
                 <a:solidFill>
@@ -3775,7 +3113,7 @@
             </a:lvl1pPr>
           </a:lstStyle>
           <a:p>
-            <a:pPr indent="0" algn="ctr">
+            <a:pPr indent="0">
               <a:buNone/>
             </a:pPr>
             <a:r>
@@ -3785,79 +3123,9 @@
                 </a:solidFill>
                 <a:latin typeface="Times New Roman"/>
               </a:rPr>
-              <a:t>&lt;долен колонтитул&gt;</a:t>
+              <a:t>&lt;дата/час&gt;</a:t>
             </a:r>
             <a:endParaRPr b="0" lang="bg-BG" sz="1400" spc="-1" strike="noStrike">
-              <a:solidFill>
-                <a:srgbClr val="000000"/>
-              </a:solidFill>
-              <a:latin typeface="Times New Roman"/>
-            </a:endParaRPr>
-          </a:p>
-        </p:txBody>
-      </p:sp>
-      <p:sp>
-        <p:nvSpPr>
-          <p:cNvPr id="11" name="PlaceHolder 5"/>
-          <p:cNvSpPr>
-            <a:spLocks noGrp="1"/>
-          </p:cNvSpPr>
-          <p:nvPr>
-            <p:ph type="sldNum" idx="6"/>
-          </p:nvPr>
-        </p:nvSpPr>
-        <p:spPr>
-          <a:xfrm>
-            <a:off x="6553080" y="6356520"/>
-            <a:ext cx="2133360" cy="364680"/>
-          </a:xfrm>
-          <a:prstGeom prst="rect">
-            <a:avLst/>
-          </a:prstGeom>
-          <a:noFill/>
-          <a:ln w="0">
-            <a:noFill/>
-          </a:ln>
-        </p:spPr>
-        <p:txBody>
-          <a:bodyPr lIns="91440" rIns="91440" tIns="45720" bIns="45720" anchor="ctr">
-            <a:noAutofit/>
-          </a:bodyPr>
-          <a:lstStyle>
-            <a:lvl1pPr indent="0" algn="r" defTabSz="457200">
-              <a:lnSpc>
-                <a:spcPct val="100000"/>
-              </a:lnSpc>
-              <a:buNone/>
-              <a:defRPr b="0" lang="en-US" sz="1200" spc="-1" strike="noStrike">
-                <a:solidFill>
-                  <a:schemeClr val="dk1">
-                    <a:tint val="75000"/>
-                  </a:schemeClr>
-                </a:solidFill>
-                <a:latin typeface="Calibri"/>
-              </a:defRPr>
-            </a:lvl1pPr>
-          </a:lstStyle>
-          <a:p>
-            <a:pPr indent="0" algn="r" defTabSz="457200">
-              <a:lnSpc>
-                <a:spcPct val="100000"/>
-              </a:lnSpc>
-              <a:buNone/>
-            </a:pPr>
-            <a:fld id="{99681858-95E7-45F2-AD19-B268B9212BA0}" type="slidenum">
-              <a:rPr b="0" lang="en-US" sz="1200" spc="-1" strike="noStrike">
-                <a:solidFill>
-                  <a:schemeClr val="dk1">
-                    <a:tint val="75000"/>
-                  </a:schemeClr>
-                </a:solidFill>
-                <a:latin typeface="Calibri"/>
-              </a:rPr>
-              <a:t>&lt;число&gt;</a:t>
-            </a:fld>
-            <a:endParaRPr b="0" lang="bg-BG" sz="1200" spc="-1" strike="noStrike">
               <a:solidFill>
                 <a:srgbClr val="000000"/>
               </a:solidFill>
@@ -3901,18 +3169,18 @@
       </p:grpSpPr>
       <p:sp>
         <p:nvSpPr>
-          <p:cNvPr id="12" name="PlaceHolder 1"/>
-          <p:cNvSpPr>
-            <a:spLocks noGrp="1"/>
-          </p:cNvSpPr>
-          <p:nvPr>
-            <p:ph type="title"/>
+          <p:cNvPr id="9" name="PlaceHolder 1"/>
+          <p:cNvSpPr>
+            <a:spLocks noGrp="1"/>
+          </p:cNvSpPr>
+          <p:nvPr>
+            <p:ph type="ftr" idx="7"/>
           </p:nvPr>
         </p:nvSpPr>
         <p:spPr>
           <a:xfrm>
-            <a:off x="6629400" y="274680"/>
-            <a:ext cx="2057040" cy="5851080"/>
+            <a:off x="3124080" y="6356520"/>
+            <a:ext cx="2894760" cy="364320"/>
           </a:xfrm>
           <a:prstGeom prst="rect">
             <a:avLst/>
@@ -3923,48 +3191,68 @@
           </a:ln>
         </p:spPr>
         <p:txBody>
-          <a:bodyPr lIns="91440" rIns="91440" tIns="45720" bIns="45720" anchor="ctr" vert="eaVert">
+          <a:bodyPr lIns="91440" rIns="91440" tIns="45720" bIns="45720" anchor="ctr">
             <a:noAutofit/>
           </a:bodyPr>
-          <a:p>
-            <a:pPr indent="0" algn="ctr" defTabSz="457200">
-              <a:lnSpc>
-                <a:spcPct val="100000"/>
-              </a:lnSpc>
-              <a:buNone/>
-            </a:pPr>
-            <a:r>
-              <a:rPr b="0" lang="en-US" sz="4400" spc="-1" strike="noStrike">
-                <a:solidFill>
-                  <a:schemeClr val="dk1"/>
-                </a:solidFill>
-                <a:latin typeface="Calibri"/>
-              </a:rPr>
-              <a:t>Click to edit Master title style</a:t>
-            </a:r>
-            <a:endParaRPr b="0" lang="en-US" sz="4400" spc="-1" strike="noStrike">
-              <a:solidFill>
-                <a:schemeClr val="dk1"/>
-              </a:solidFill>
-              <a:latin typeface="Calibri"/>
-            </a:endParaRPr>
-          </a:p>
-        </p:txBody>
-      </p:sp>
-      <p:sp>
-        <p:nvSpPr>
-          <p:cNvPr id="13" name="PlaceHolder 2"/>
-          <p:cNvSpPr>
-            <a:spLocks noGrp="1"/>
-          </p:cNvSpPr>
-          <p:nvPr>
-            <p:ph type="body"/>
+          <a:lstStyle>
+            <a:lvl1pPr indent="0" algn="ctr">
+              <a:lnSpc>
+                <a:spcPct val="100000"/>
+              </a:lnSpc>
+              <a:buNone/>
+              <a:tabLst>
+                <a:tab algn="l" pos="0"/>
+              </a:tabLst>
+              <a:defRPr b="0" lang="bg-BG" sz="1400" spc="-1" strike="noStrike">
+                <a:solidFill>
+                  <a:srgbClr val="000000"/>
+                </a:solidFill>
+                <a:latin typeface="Times New Roman"/>
+              </a:defRPr>
+            </a:lvl1pPr>
+          </a:lstStyle>
+          <a:p>
+            <a:pPr indent="0" algn="ctr">
+              <a:lnSpc>
+                <a:spcPct val="100000"/>
+              </a:lnSpc>
+              <a:buNone/>
+              <a:tabLst>
+                <a:tab algn="l" pos="0"/>
+              </a:tabLst>
+            </a:pPr>
+            <a:r>
+              <a:rPr b="0" lang="bg-BG" sz="1400" spc="-1" strike="noStrike">
+                <a:solidFill>
+                  <a:srgbClr val="000000"/>
+                </a:solidFill>
+                <a:latin typeface="Times New Roman"/>
+              </a:rPr>
+              <a:t>&lt;долен колонтитул&gt;</a:t>
+            </a:r>
+            <a:endParaRPr b="0" lang="bg-BG" sz="1400" spc="-1" strike="noStrike">
+              <a:solidFill>
+                <a:srgbClr val="000000"/>
+              </a:solidFill>
+              <a:latin typeface="Times New Roman"/>
+            </a:endParaRPr>
+          </a:p>
+        </p:txBody>
+      </p:sp>
+      <p:sp>
+        <p:nvSpPr>
+          <p:cNvPr id="10" name="PlaceHolder 2"/>
+          <p:cNvSpPr>
+            <a:spLocks noGrp="1"/>
+          </p:cNvSpPr>
+          <p:nvPr>
+            <p:ph type="sldNum" idx="8"/>
           </p:nvPr>
         </p:nvSpPr>
         <p:spPr>
           <a:xfrm>
-            <a:off x="457200" y="274680"/>
-            <a:ext cx="6019560" cy="5851080"/>
+            <a:off x="6553080" y="6356520"/>
+            <a:ext cx="2133000" cy="364320"/>
           </a:xfrm>
           <a:prstGeom prst="rect">
             <a:avLst/>
@@ -3975,175 +3263,72 @@
           </a:ln>
         </p:spPr>
         <p:txBody>
-          <a:bodyPr lIns="91440" rIns="91440" tIns="45720" bIns="45720" anchor="t" vert="eaVert">
+          <a:bodyPr lIns="91440" rIns="91440" tIns="45720" bIns="45720" anchor="ctr">
             <a:noAutofit/>
           </a:bodyPr>
-          <a:p>
-            <a:pPr marL="343080" indent="-343080" defTabSz="457200">
-              <a:lnSpc>
-                <a:spcPct val="100000"/>
-              </a:lnSpc>
-              <a:spcBef>
-                <a:spcPts val="641"/>
-              </a:spcBef>
-              <a:buClr>
-                <a:srgbClr val="000000"/>
-              </a:buClr>
-              <a:buFont typeface="Arial"/>
-              <a:buChar char="•"/>
-            </a:pPr>
-            <a:r>
-              <a:rPr b="0" lang="en-US" sz="3200" spc="-1" strike="noStrike">
-                <a:solidFill>
-                  <a:schemeClr val="dk1"/>
+          <a:lstStyle>
+            <a:lvl1pPr indent="0" algn="r" defTabSz="457200">
+              <a:lnSpc>
+                <a:spcPct val="100000"/>
+              </a:lnSpc>
+              <a:buNone/>
+              <a:tabLst>
+                <a:tab algn="l" pos="0"/>
+              </a:tabLst>
+              <a:defRPr b="0" lang="en-US" sz="1200" spc="-1" strike="noStrike">
+                <a:solidFill>
+                  <a:schemeClr val="dk1">
+                    <a:tint val="75000"/>
+                  </a:schemeClr>
                 </a:solidFill>
                 <a:latin typeface="Calibri"/>
-              </a:rPr>
-              <a:t>Click to edit Master text styles</a:t>
-            </a:r>
-            <a:endParaRPr b="0" lang="en-US" sz="3200" spc="-1" strike="noStrike">
-              <a:solidFill>
-                <a:schemeClr val="dk1"/>
-              </a:solidFill>
-              <a:latin typeface="Calibri"/>
-            </a:endParaRPr>
-          </a:p>
-          <a:p>
-            <a:pPr lvl="1" marL="743040" indent="-285840" defTabSz="457200">
-              <a:lnSpc>
-                <a:spcPct val="100000"/>
-              </a:lnSpc>
-              <a:spcBef>
-                <a:spcPts val="561"/>
-              </a:spcBef>
-              <a:buClr>
-                <a:srgbClr val="000000"/>
-              </a:buClr>
-              <a:buFont typeface="Arial"/>
-              <a:buChar char="–"/>
-            </a:pPr>
-            <a:r>
-              <a:rPr b="0" lang="en-US" sz="2800" spc="-1" strike="noStrike">
-                <a:solidFill>
-                  <a:schemeClr val="dk1"/>
+              </a:defRPr>
+            </a:lvl1pPr>
+          </a:lstStyle>
+          <a:p>
+            <a:pPr indent="0" algn="r" defTabSz="457200">
+              <a:lnSpc>
+                <a:spcPct val="100000"/>
+              </a:lnSpc>
+              <a:buNone/>
+              <a:tabLst>
+                <a:tab algn="l" pos="0"/>
+              </a:tabLst>
+            </a:pPr>
+            <a:fld id="{0C997C1F-33EC-4C89-8E64-29795A8BCF26}" type="slidenum">
+              <a:rPr b="0" lang="en-US" sz="1200" spc="-1" strike="noStrike">
+                <a:solidFill>
+                  <a:schemeClr val="dk1">
+                    <a:tint val="75000"/>
+                  </a:schemeClr>
                 </a:solidFill>
                 <a:latin typeface="Calibri"/>
               </a:rPr>
-              <a:t>Second level</a:t>
-            </a:r>
-            <a:endParaRPr b="0" lang="en-US" sz="2800" spc="-1" strike="noStrike">
-              <a:solidFill>
-                <a:schemeClr val="dk1"/>
-              </a:solidFill>
-              <a:latin typeface="Calibri"/>
-            </a:endParaRPr>
-          </a:p>
-          <a:p>
-            <a:pPr lvl="2" marL="1143000" indent="-228600" defTabSz="457200">
-              <a:lnSpc>
-                <a:spcPct val="100000"/>
-              </a:lnSpc>
-              <a:spcBef>
-                <a:spcPts val="479"/>
-              </a:spcBef>
-              <a:buClr>
-                <a:srgbClr val="000000"/>
-              </a:buClr>
-              <a:buFont typeface="Arial"/>
-              <a:buChar char="•"/>
-            </a:pPr>
-            <a:r>
-              <a:rPr b="0" lang="en-US" sz="2400" spc="-1" strike="noStrike">
-                <a:solidFill>
-                  <a:schemeClr val="dk1"/>
-                </a:solidFill>
-                <a:latin typeface="Calibri"/>
-              </a:rPr>
-              <a:t>Third level</a:t>
-            </a:r>
-            <a:endParaRPr b="0" lang="en-US" sz="2400" spc="-1" strike="noStrike">
-              <a:solidFill>
-                <a:schemeClr val="dk1"/>
-              </a:solidFill>
-              <a:latin typeface="Calibri"/>
-            </a:endParaRPr>
-          </a:p>
-          <a:p>
-            <a:pPr lvl="3" marL="1600200" indent="-228600" defTabSz="457200">
-              <a:lnSpc>
-                <a:spcPct val="100000"/>
-              </a:lnSpc>
-              <a:spcBef>
-                <a:spcPts val="400"/>
-              </a:spcBef>
-              <a:buClr>
-                <a:srgbClr val="000000"/>
-              </a:buClr>
-              <a:buFont typeface="Arial"/>
-              <a:buChar char="–"/>
-            </a:pPr>
-            <a:r>
-              <a:rPr b="0" lang="en-US" sz="2000" spc="-1" strike="noStrike">
-                <a:solidFill>
-                  <a:schemeClr val="dk1"/>
-                </a:solidFill>
-                <a:latin typeface="Calibri"/>
-              </a:rPr>
-              <a:t>Fourth level</a:t>
-            </a:r>
-            <a:endParaRPr b="0" lang="en-US" sz="2000" spc="-1" strike="noStrike">
-              <a:solidFill>
-                <a:schemeClr val="dk1"/>
-              </a:solidFill>
-              <a:latin typeface="Calibri"/>
-            </a:endParaRPr>
-          </a:p>
-          <a:p>
-            <a:pPr lvl="4" marL="2057400" indent="-228600" defTabSz="457200">
-              <a:lnSpc>
-                <a:spcPct val="100000"/>
-              </a:lnSpc>
-              <a:spcBef>
-                <a:spcPts val="400"/>
-              </a:spcBef>
-              <a:buClr>
-                <a:srgbClr val="000000"/>
-              </a:buClr>
-              <a:buFont typeface="Arial"/>
-              <a:buChar char="»"/>
-            </a:pPr>
-            <a:r>
-              <a:rPr b="0" lang="en-US" sz="2000" spc="-1" strike="noStrike">
-                <a:solidFill>
-                  <a:schemeClr val="dk1"/>
-                </a:solidFill>
-                <a:latin typeface="Calibri"/>
-              </a:rPr>
-              <a:t>Fifth level</a:t>
-            </a:r>
-            <a:endParaRPr b="0" lang="en-US" sz="2000" spc="-1" strike="noStrike">
-              <a:solidFill>
-                <a:schemeClr val="dk1"/>
-              </a:solidFill>
-              <a:latin typeface="Calibri"/>
-            </a:endParaRPr>
-          </a:p>
-        </p:txBody>
-      </p:sp>
-      <p:sp>
-        <p:nvSpPr>
-          <p:cNvPr id="14" name="PlaceHolder 3"/>
-          <p:cNvSpPr>
-            <a:spLocks noGrp="1"/>
-          </p:cNvSpPr>
-          <p:nvPr>
-            <p:ph type="dt" idx="7"/>
+              <a:t>&lt;число&gt;</a:t>
+            </a:fld>
+            <a:endParaRPr b="0" lang="bg-BG" sz="1200" spc="-1" strike="noStrike">
+              <a:solidFill>
+                <a:srgbClr val="000000"/>
+              </a:solidFill>
+              <a:latin typeface="Times New Roman"/>
+            </a:endParaRPr>
+          </a:p>
+        </p:txBody>
+      </p:sp>
+      <p:sp>
+        <p:nvSpPr>
+          <p:cNvPr id="11" name="PlaceHolder 3"/>
+          <p:cNvSpPr>
+            <a:spLocks noGrp="1"/>
+          </p:cNvSpPr>
+          <p:nvPr>
+            <p:ph type="dt" idx="9"/>
           </p:nvPr>
         </p:nvSpPr>
         <p:spPr>
           <a:xfrm>
             <a:off x="457200" y="6356520"/>
-            <a:ext cx="2133360" cy="364680"/>
+            <a:ext cx="2133000" cy="364320"/>
           </a:xfrm>
           <a:prstGeom prst="rect">
             <a:avLst/>
@@ -4158,77 +3343,7 @@
             <a:noAutofit/>
           </a:bodyPr>
           <a:lstStyle>
-            <a:lvl1pPr indent="0" defTabSz="457200">
-              <a:lnSpc>
-                <a:spcPct val="100000"/>
-              </a:lnSpc>
-              <a:buNone/>
-              <a:defRPr b="0" lang="en-US" sz="1200" spc="-1" strike="noStrike">
-                <a:solidFill>
-                  <a:schemeClr val="dk1">
-                    <a:tint val="75000"/>
-                  </a:schemeClr>
-                </a:solidFill>
-                <a:latin typeface="Calibri"/>
-              </a:defRPr>
-            </a:lvl1pPr>
-          </a:lstStyle>
-          <a:p>
-            <a:pPr indent="0" defTabSz="457200">
-              <a:lnSpc>
-                <a:spcPct val="100000"/>
-              </a:lnSpc>
-              <a:buNone/>
-            </a:pPr>
-            <a:r>
-              <a:rPr b="0" lang="en-US" sz="1200" spc="-1" strike="noStrike">
-                <a:solidFill>
-                  <a:schemeClr val="dk1">
-                    <a:tint val="75000"/>
-                  </a:schemeClr>
-                </a:solidFill>
-                <a:latin typeface="Calibri"/>
-              </a:rPr>
-              <a:t>&lt;дата/час&gt;</a:t>
-            </a:r>
-            <a:endParaRPr b="0" lang="bg-BG" sz="1200" spc="-1" strike="noStrike">
-              <a:solidFill>
-                <a:srgbClr val="000000"/>
-              </a:solidFill>
-              <a:latin typeface="Times New Roman"/>
-            </a:endParaRPr>
-          </a:p>
-        </p:txBody>
-      </p:sp>
-      <p:sp>
-        <p:nvSpPr>
-          <p:cNvPr id="15" name="PlaceHolder 4"/>
-          <p:cNvSpPr>
-            <a:spLocks noGrp="1"/>
-          </p:cNvSpPr>
-          <p:nvPr>
-            <p:ph type="ftr" idx="8"/>
-          </p:nvPr>
-        </p:nvSpPr>
-        <p:spPr>
-          <a:xfrm>
-            <a:off x="3124080" y="6356520"/>
-            <a:ext cx="2895120" cy="364680"/>
-          </a:xfrm>
-          <a:prstGeom prst="rect">
-            <a:avLst/>
-          </a:prstGeom>
-          <a:noFill/>
-          <a:ln w="0">
-            <a:noFill/>
-          </a:ln>
-        </p:spPr>
-        <p:txBody>
-          <a:bodyPr lIns="91440" rIns="91440" tIns="45720" bIns="45720" anchor="ctr">
-            <a:noAutofit/>
-          </a:bodyPr>
-          <a:lstStyle>
-            <a:lvl1pPr indent="0" algn="ctr">
+            <a:lvl1pPr indent="0">
               <a:buNone/>
               <a:defRPr b="0" lang="bg-BG" sz="1400" spc="-1" strike="noStrike">
                 <a:solidFill>
@@ -4239,7 +3354,7 @@
             </a:lvl1pPr>
           </a:lstStyle>
           <a:p>
-            <a:pPr indent="0" algn="ctr">
+            <a:pPr indent="0">
               <a:buNone/>
             </a:pPr>
             <a:r>
@@ -4249,79 +3364,9 @@
                 </a:solidFill>
                 <a:latin typeface="Times New Roman"/>
               </a:rPr>
-              <a:t>&lt;долен колонтитул&gt;</a:t>
+              <a:t>&lt;дата/час&gt;</a:t>
             </a:r>
             <a:endParaRPr b="0" lang="bg-BG" sz="1400" spc="-1" strike="noStrike">
-              <a:solidFill>
-                <a:srgbClr val="000000"/>
-              </a:solidFill>
-              <a:latin typeface="Times New Roman"/>
-            </a:endParaRPr>
-          </a:p>
-        </p:txBody>
-      </p:sp>
-      <p:sp>
-        <p:nvSpPr>
-          <p:cNvPr id="16" name="PlaceHolder 5"/>
-          <p:cNvSpPr>
-            <a:spLocks noGrp="1"/>
-          </p:cNvSpPr>
-          <p:nvPr>
-            <p:ph type="sldNum" idx="9"/>
-          </p:nvPr>
-        </p:nvSpPr>
-        <p:spPr>
-          <a:xfrm>
-            <a:off x="6553080" y="6356520"/>
-            <a:ext cx="2133360" cy="364680"/>
-          </a:xfrm>
-          <a:prstGeom prst="rect">
-            <a:avLst/>
-          </a:prstGeom>
-          <a:noFill/>
-          <a:ln w="0">
-            <a:noFill/>
-          </a:ln>
-        </p:spPr>
-        <p:txBody>
-          <a:bodyPr lIns="91440" rIns="91440" tIns="45720" bIns="45720" anchor="ctr">
-            <a:noAutofit/>
-          </a:bodyPr>
-          <a:lstStyle>
-            <a:lvl1pPr indent="0" algn="r" defTabSz="457200">
-              <a:lnSpc>
-                <a:spcPct val="100000"/>
-              </a:lnSpc>
-              <a:buNone/>
-              <a:defRPr b="0" lang="en-US" sz="1200" spc="-1" strike="noStrike">
-                <a:solidFill>
-                  <a:schemeClr val="dk1">
-                    <a:tint val="75000"/>
-                  </a:schemeClr>
-                </a:solidFill>
-                <a:latin typeface="Calibri"/>
-              </a:defRPr>
-            </a:lvl1pPr>
-          </a:lstStyle>
-          <a:p>
-            <a:pPr indent="0" algn="r" defTabSz="457200">
-              <a:lnSpc>
-                <a:spcPct val="100000"/>
-              </a:lnSpc>
-              <a:buNone/>
-            </a:pPr>
-            <a:fld id="{E6ADC2FE-BDF9-4CA1-ADF6-5D7BC89DEC42}" type="slidenum">
-              <a:rPr b="0" lang="en-US" sz="1200" spc="-1" strike="noStrike">
-                <a:solidFill>
-                  <a:schemeClr val="dk1">
-                    <a:tint val="75000"/>
-                  </a:schemeClr>
-                </a:solidFill>
-                <a:latin typeface="Calibri"/>
-              </a:rPr>
-              <a:t>&lt;число&gt;</a:t>
-            </a:fld>
-            <a:endParaRPr b="0" lang="bg-BG" sz="1200" spc="-1" strike="noStrike">
               <a:solidFill>
                 <a:srgbClr val="000000"/>
               </a:solidFill>
@@ -4365,7 +3410,7 @@
       </p:grpSpPr>
       <p:sp>
         <p:nvSpPr>
-          <p:cNvPr id="17" name="PlaceHolder 1"/>
+          <p:cNvPr id="12" name="PlaceHolder 1"/>
           <p:cNvSpPr>
             <a:spLocks noGrp="1"/>
           </p:cNvSpPr>
@@ -4375,8 +3420,8 @@
         </p:nvSpPr>
         <p:spPr>
           <a:xfrm>
-            <a:off x="457200" y="274680"/>
-            <a:ext cx="8229240" cy="1142640"/>
+            <a:off x="456840" y="-186120"/>
+            <a:ext cx="8228880" cy="2063520"/>
           </a:xfrm>
           <a:prstGeom prst="rect">
             <a:avLst/>
@@ -4387,37 +3432,34 @@
           </a:ln>
         </p:spPr>
         <p:txBody>
-          <a:bodyPr lIns="91440" rIns="91440" tIns="45720" bIns="45720" anchor="ctr">
+          <a:bodyPr lIns="0" rIns="0" tIns="0" bIns="0" anchor="ctr">
             <a:noAutofit/>
           </a:bodyPr>
           <a:p>
-            <a:pPr indent="0" algn="ctr" defTabSz="457200">
-              <a:lnSpc>
-                <a:spcPct val="100000"/>
-              </a:lnSpc>
-              <a:buNone/>
-            </a:pPr>
-            <a:r>
-              <a:rPr b="0" lang="en-US" sz="4400" spc="-1" strike="noStrike">
-                <a:solidFill>
-                  <a:schemeClr val="dk1"/>
-                </a:solidFill>
-                <a:latin typeface="Calibri"/>
-              </a:rPr>
-              <a:t>Click to edit Master title style</a:t>
-            </a:r>
-            <a:endParaRPr b="0" lang="en-US" sz="4400" spc="-1" strike="noStrike">
-              <a:solidFill>
-                <a:schemeClr val="dk1"/>
-              </a:solidFill>
-              <a:latin typeface="Calibri"/>
-            </a:endParaRPr>
-          </a:p>
-        </p:txBody>
-      </p:sp>
-      <p:sp>
-        <p:nvSpPr>
-          <p:cNvPr id="18" name="PlaceHolder 2"/>
+            <a:pPr indent="0">
+              <a:buNone/>
+            </a:pPr>
+            <a:r>
+              <a:rPr b="0" lang="bg-BG" sz="1800" spc="-1" strike="noStrike">
+                <a:solidFill>
+                  <a:srgbClr val="000000"/>
+                </a:solidFill>
+                <a:latin typeface="Arial"/>
+              </a:rPr>
+              <a:t>Щракнете, за да редактирате формата на заглавието</a:t>
+            </a:r>
+            <a:endParaRPr b="0" lang="bg-BG" sz="1800" spc="-1" strike="noStrike">
+              <a:solidFill>
+                <a:srgbClr val="000000"/>
+              </a:solidFill>
+              <a:latin typeface="Arial"/>
+            </a:endParaRPr>
+          </a:p>
+        </p:txBody>
+      </p:sp>
+      <p:sp>
+        <p:nvSpPr>
+          <p:cNvPr id="13" name="PlaceHolder 2"/>
           <p:cNvSpPr>
             <a:spLocks noGrp="1"/>
           </p:cNvSpPr>
@@ -4427,8 +3469,8 @@
         </p:nvSpPr>
         <p:spPr>
           <a:xfrm>
-            <a:off x="457200" y="1600200"/>
-            <a:ext cx="8229240" cy="4525560"/>
+            <a:off x="456840" y="1604160"/>
+            <a:ext cx="8228880" cy="3976920"/>
           </a:xfrm>
           <a:prstGeom prst="rect">
             <a:avLst/>
@@ -4439,175 +3481,221 @@
           </a:ln>
         </p:spPr>
         <p:txBody>
-          <a:bodyPr lIns="91440" rIns="91440" tIns="45720" bIns="45720" anchor="t">
-            <a:noAutofit/>
+          <a:bodyPr lIns="0" rIns="0" tIns="0" bIns="0" anchor="t">
+            <a:normAutofit/>
           </a:bodyPr>
           <a:p>
-            <a:pPr marL="343080" indent="-343080" defTabSz="457200">
-              <a:lnSpc>
-                <a:spcPct val="100000"/>
-              </a:lnSpc>
+            <a:pPr marL="432000" indent="-324000">
               <a:spcBef>
-                <a:spcPts val="641"/>
+                <a:spcPts val="1417"/>
               </a:spcBef>
               <a:buClr>
                 <a:srgbClr val="000000"/>
               </a:buClr>
-              <a:buFont typeface="Arial"/>
-              <a:buChar char="•"/>
-            </a:pPr>
-            <a:r>
-              <a:rPr b="0" lang="en-US" sz="3200" spc="-1" strike="noStrike">
-                <a:solidFill>
-                  <a:schemeClr val="dk1"/>
-                </a:solidFill>
-                <a:latin typeface="Calibri"/>
-              </a:rPr>
-              <a:t>Click to edit Master text styles</a:t>
-            </a:r>
-            <a:endParaRPr b="0" lang="en-US" sz="3200" spc="-1" strike="noStrike">
-              <a:solidFill>
-                <a:schemeClr val="dk1"/>
-              </a:solidFill>
-              <a:latin typeface="Calibri"/>
-            </a:endParaRPr>
-          </a:p>
-          <a:p>
-            <a:pPr lvl="1" marL="743040" indent="-285840" defTabSz="457200">
-              <a:lnSpc>
-                <a:spcPct val="100000"/>
-              </a:lnSpc>
+              <a:buSzPct val="45000"/>
+              <a:buFont typeface="Wingdings" charset="2"/>
+              <a:buChar char=""/>
+            </a:pPr>
+            <a:r>
+              <a:rPr b="0" lang="bg-BG" sz="1800" spc="-1" strike="noStrike">
+                <a:solidFill>
+                  <a:srgbClr val="000000"/>
+                </a:solidFill>
+                <a:latin typeface="Arial"/>
+              </a:rPr>
+              <a:t>Щракнете, за да редактирате формата на плана</a:t>
+            </a:r>
+            <a:endParaRPr b="0" lang="bg-BG" sz="1800" spc="-1" strike="noStrike">
+              <a:solidFill>
+                <a:srgbClr val="000000"/>
+              </a:solidFill>
+              <a:latin typeface="Arial"/>
+            </a:endParaRPr>
+          </a:p>
+          <a:p>
+            <a:pPr lvl="1" marL="864000" indent="-324000">
               <a:spcBef>
-                <a:spcPts val="561"/>
+                <a:spcPts val="1134"/>
               </a:spcBef>
               <a:buClr>
                 <a:srgbClr val="000000"/>
               </a:buClr>
-              <a:buFont typeface="Arial"/>
-              <a:buChar char="–"/>
-            </a:pPr>
-            <a:r>
-              <a:rPr b="0" lang="en-US" sz="2800" spc="-1" strike="noStrike">
-                <a:solidFill>
-                  <a:schemeClr val="dk1"/>
-                </a:solidFill>
-                <a:latin typeface="Calibri"/>
-              </a:rPr>
-              <a:t>Second level</a:t>
-            </a:r>
-            <a:endParaRPr b="0" lang="en-US" sz="2800" spc="-1" strike="noStrike">
-              <a:solidFill>
-                <a:schemeClr val="dk1"/>
-              </a:solidFill>
-              <a:latin typeface="Calibri"/>
-            </a:endParaRPr>
-          </a:p>
-          <a:p>
-            <a:pPr lvl="2" marL="1143000" indent="-228600" defTabSz="457200">
-              <a:lnSpc>
-                <a:spcPct val="100000"/>
-              </a:lnSpc>
+              <a:buSzPct val="75000"/>
+              <a:buFont typeface="Symbol" charset="2"/>
+              <a:buChar char=""/>
+            </a:pPr>
+            <a:r>
+              <a:rPr b="0" lang="bg-BG" sz="1800" spc="-1" strike="noStrike">
+                <a:solidFill>
+                  <a:srgbClr val="000000"/>
+                </a:solidFill>
+                <a:latin typeface="Arial"/>
+              </a:rPr>
+              <a:t>Второ ниво на плана</a:t>
+            </a:r>
+            <a:endParaRPr b="0" lang="bg-BG" sz="1800" spc="-1" strike="noStrike">
+              <a:solidFill>
+                <a:srgbClr val="000000"/>
+              </a:solidFill>
+              <a:latin typeface="Arial"/>
+            </a:endParaRPr>
+          </a:p>
+          <a:p>
+            <a:pPr lvl="2" marL="1296000" indent="-288000">
               <a:spcBef>
-                <a:spcPts val="479"/>
+                <a:spcPts val="850"/>
               </a:spcBef>
               <a:buClr>
                 <a:srgbClr val="000000"/>
               </a:buClr>
-              <a:buFont typeface="Arial"/>
-              <a:buChar char="•"/>
-            </a:pPr>
-            <a:r>
-              <a:rPr b="0" lang="en-US" sz="2400" spc="-1" strike="noStrike">
-                <a:solidFill>
-                  <a:schemeClr val="dk1"/>
-                </a:solidFill>
-                <a:latin typeface="Calibri"/>
-              </a:rPr>
-              <a:t>Third level</a:t>
-            </a:r>
-            <a:endParaRPr b="0" lang="en-US" sz="2400" spc="-1" strike="noStrike">
-              <a:solidFill>
-                <a:schemeClr val="dk1"/>
-              </a:solidFill>
-              <a:latin typeface="Calibri"/>
-            </a:endParaRPr>
-          </a:p>
-          <a:p>
-            <a:pPr lvl="3" marL="1600200" indent="-228600" defTabSz="457200">
-              <a:lnSpc>
-                <a:spcPct val="100000"/>
-              </a:lnSpc>
+              <a:buSzPct val="45000"/>
+              <a:buFont typeface="Wingdings" charset="2"/>
+              <a:buChar char=""/>
+            </a:pPr>
+            <a:r>
+              <a:rPr b="0" lang="bg-BG" sz="1800" spc="-1" strike="noStrike">
+                <a:solidFill>
+                  <a:srgbClr val="000000"/>
+                </a:solidFill>
+                <a:latin typeface="Arial"/>
+              </a:rPr>
+              <a:t>Трето ниво на плана</a:t>
+            </a:r>
+            <a:endParaRPr b="0" lang="bg-BG" sz="1800" spc="-1" strike="noStrike">
+              <a:solidFill>
+                <a:srgbClr val="000000"/>
+              </a:solidFill>
+              <a:latin typeface="Arial"/>
+            </a:endParaRPr>
+          </a:p>
+          <a:p>
+            <a:pPr lvl="3" marL="1728000" indent="-216000">
               <a:spcBef>
-                <a:spcPts val="400"/>
+                <a:spcPts val="567"/>
               </a:spcBef>
               <a:buClr>
                 <a:srgbClr val="000000"/>
               </a:buClr>
-              <a:buFont typeface="Arial"/>
-              <a:buChar char="–"/>
-            </a:pPr>
-            <a:r>
-              <a:rPr b="0" lang="en-US" sz="2000" spc="-1" strike="noStrike">
-                <a:solidFill>
-                  <a:schemeClr val="dk1"/>
-                </a:solidFill>
-                <a:latin typeface="Calibri"/>
-              </a:rPr>
-              <a:t>Fourth level</a:t>
-            </a:r>
-            <a:endParaRPr b="0" lang="en-US" sz="2000" spc="-1" strike="noStrike">
-              <a:solidFill>
-                <a:schemeClr val="dk1"/>
-              </a:solidFill>
-              <a:latin typeface="Calibri"/>
-            </a:endParaRPr>
-          </a:p>
-          <a:p>
-            <a:pPr lvl="4" marL="2057400" indent="-228600" defTabSz="457200">
-              <a:lnSpc>
-                <a:spcPct val="100000"/>
-              </a:lnSpc>
+              <a:buSzPct val="75000"/>
+              <a:buFont typeface="Symbol" charset="2"/>
+              <a:buChar char=""/>
+            </a:pPr>
+            <a:r>
+              <a:rPr b="0" lang="bg-BG" sz="1800" spc="-1" strike="noStrike">
+                <a:solidFill>
+                  <a:srgbClr val="000000"/>
+                </a:solidFill>
+                <a:latin typeface="Arial"/>
+              </a:rPr>
+              <a:t>Четвърто ниво на плана</a:t>
+            </a:r>
+            <a:endParaRPr b="0" lang="bg-BG" sz="1800" spc="-1" strike="noStrike">
+              <a:solidFill>
+                <a:srgbClr val="000000"/>
+              </a:solidFill>
+              <a:latin typeface="Arial"/>
+            </a:endParaRPr>
+          </a:p>
+          <a:p>
+            <a:pPr lvl="4" marL="2160000" indent="-216000">
               <a:spcBef>
-                <a:spcPts val="400"/>
+                <a:spcPts val="283"/>
               </a:spcBef>
               <a:buClr>
                 <a:srgbClr val="000000"/>
               </a:buClr>
-              <a:buFont typeface="Arial"/>
-              <a:buChar char="»"/>
-            </a:pPr>
-            <a:r>
-              <a:rPr b="0" lang="en-US" sz="2000" spc="-1" strike="noStrike">
-                <a:solidFill>
-                  <a:schemeClr val="dk1"/>
-                </a:solidFill>
-                <a:latin typeface="Calibri"/>
-              </a:rPr>
-              <a:t>Fifth level</a:t>
-            </a:r>
-            <a:endParaRPr b="0" lang="en-US" sz="2000" spc="-1" strike="noStrike">
-              <a:solidFill>
-                <a:schemeClr val="dk1"/>
-              </a:solidFill>
-              <a:latin typeface="Calibri"/>
-            </a:endParaRPr>
-          </a:p>
-        </p:txBody>
-      </p:sp>
-      <p:sp>
-        <p:nvSpPr>
-          <p:cNvPr id="19" name="PlaceHolder 3"/>
-          <p:cNvSpPr>
-            <a:spLocks noGrp="1"/>
-          </p:cNvSpPr>
-          <p:nvPr>
-            <p:ph type="dt" idx="10"/>
+              <a:buSzPct val="45000"/>
+              <a:buFont typeface="Wingdings" charset="2"/>
+              <a:buChar char=""/>
+            </a:pPr>
+            <a:r>
+              <a:rPr b="0" lang="bg-BG" sz="1800" spc="-1" strike="noStrike">
+                <a:solidFill>
+                  <a:srgbClr val="000000"/>
+                </a:solidFill>
+                <a:latin typeface="Arial"/>
+              </a:rPr>
+              <a:t>Пето ниво на плана</a:t>
+            </a:r>
+            <a:endParaRPr b="0" lang="bg-BG" sz="1800" spc="-1" strike="noStrike">
+              <a:solidFill>
+                <a:srgbClr val="000000"/>
+              </a:solidFill>
+              <a:latin typeface="Arial"/>
+            </a:endParaRPr>
+          </a:p>
+          <a:p>
+            <a:pPr lvl="5" marL="2592000" indent="-216000">
+              <a:spcBef>
+                <a:spcPts val="283"/>
+              </a:spcBef>
+              <a:buClr>
+                <a:srgbClr val="000000"/>
+              </a:buClr>
+              <a:buSzPct val="45000"/>
+              <a:buFont typeface="Wingdings" charset="2"/>
+              <a:buChar char=""/>
+            </a:pPr>
+            <a:r>
+              <a:rPr b="0" lang="bg-BG" sz="1800" spc="-1" strike="noStrike">
+                <a:solidFill>
+                  <a:srgbClr val="000000"/>
+                </a:solidFill>
+                <a:latin typeface="Arial"/>
+              </a:rPr>
+              <a:t>Шесто ниво на плана</a:t>
+            </a:r>
+            <a:endParaRPr b="0" lang="bg-BG" sz="1800" spc="-1" strike="noStrike">
+              <a:solidFill>
+                <a:srgbClr val="000000"/>
+              </a:solidFill>
+              <a:latin typeface="Arial"/>
+            </a:endParaRPr>
+          </a:p>
+          <a:p>
+            <a:pPr lvl="6" marL="3024000" indent="-216000">
+              <a:spcBef>
+                <a:spcPts val="283"/>
+              </a:spcBef>
+              <a:buClr>
+                <a:srgbClr val="000000"/>
+              </a:buClr>
+              <a:buSzPct val="45000"/>
+              <a:buFont typeface="Wingdings" charset="2"/>
+              <a:buChar char=""/>
+            </a:pPr>
+            <a:r>
+              <a:rPr b="0" lang="bg-BG" sz="1800" spc="-1" strike="noStrike">
+                <a:solidFill>
+                  <a:srgbClr val="000000"/>
+                </a:solidFill>
+                <a:latin typeface="Arial"/>
+              </a:rPr>
+              <a:t>Седмо ниво на плана</a:t>
+            </a:r>
+            <a:endParaRPr b="0" lang="bg-BG" sz="1800" spc="-1" strike="noStrike">
+              <a:solidFill>
+                <a:srgbClr val="000000"/>
+              </a:solidFill>
+              <a:latin typeface="Arial"/>
+            </a:endParaRPr>
+          </a:p>
+        </p:txBody>
+      </p:sp>
+      <p:sp>
+        <p:nvSpPr>
+          <p:cNvPr id="14" name="PlaceHolder 3"/>
+          <p:cNvSpPr>
+            <a:spLocks noGrp="1"/>
+          </p:cNvSpPr>
+          <p:nvPr>
+            <p:ph type="ftr" idx="10"/>
           </p:nvPr>
         </p:nvSpPr>
         <p:spPr>
           <a:xfrm>
-            <a:off x="457200" y="6356520"/>
-            <a:ext cx="2133360" cy="364680"/>
+            <a:off x="3124080" y="6356520"/>
+            <a:ext cx="2894760" cy="364320"/>
           </a:xfrm>
           <a:prstGeom prst="rect">
             <a:avLst/>
@@ -4622,40 +3710,42 @@
             <a:noAutofit/>
           </a:bodyPr>
           <a:lstStyle>
-            <a:lvl1pPr indent="0" defTabSz="457200">
-              <a:lnSpc>
-                <a:spcPct val="100000"/>
-              </a:lnSpc>
-              <a:buNone/>
-              <a:defRPr b="0" lang="en-US" sz="1200" spc="-1" strike="noStrike">
-                <a:solidFill>
-                  <a:schemeClr val="dk1">
-                    <a:tint val="75000"/>
-                  </a:schemeClr>
-                </a:solidFill>
-                <a:latin typeface="Calibri"/>
+            <a:lvl1pPr indent="0" algn="ctr">
+              <a:lnSpc>
+                <a:spcPct val="100000"/>
+              </a:lnSpc>
+              <a:buNone/>
+              <a:tabLst>
+                <a:tab algn="l" pos="0"/>
+              </a:tabLst>
+              <a:defRPr b="0" lang="bg-BG" sz="1400" spc="-1" strike="noStrike">
+                <a:solidFill>
+                  <a:srgbClr val="000000"/>
+                </a:solidFill>
+                <a:latin typeface="Times New Roman"/>
               </a:defRPr>
             </a:lvl1pPr>
           </a:lstStyle>
           <a:p>
-            <a:pPr indent="0" defTabSz="457200">
-              <a:lnSpc>
-                <a:spcPct val="100000"/>
-              </a:lnSpc>
-              <a:buNone/>
-            </a:pPr>
-            <a:r>
-              <a:rPr b="0" lang="en-US" sz="1200" spc="-1" strike="noStrike">
-                <a:solidFill>
-                  <a:schemeClr val="dk1">
-                    <a:tint val="75000"/>
-                  </a:schemeClr>
-                </a:solidFill>
-                <a:latin typeface="Calibri"/>
-              </a:rPr>
-              <a:t>&lt;дата/час&gt;</a:t>
-            </a:r>
-            <a:endParaRPr b="0" lang="bg-BG" sz="1200" spc="-1" strike="noStrike">
+            <a:pPr indent="0" algn="ctr">
+              <a:lnSpc>
+                <a:spcPct val="100000"/>
+              </a:lnSpc>
+              <a:buNone/>
+              <a:tabLst>
+                <a:tab algn="l" pos="0"/>
+              </a:tabLst>
+            </a:pPr>
+            <a:r>
+              <a:rPr b="0" lang="bg-BG" sz="1400" spc="-1" strike="noStrike">
+                <a:solidFill>
+                  <a:srgbClr val="000000"/>
+                </a:solidFill>
+                <a:latin typeface="Times New Roman"/>
+              </a:rPr>
+              <a:t>&lt;долен колонтитул&gt;</a:t>
+            </a:r>
+            <a:endParaRPr b="0" lang="bg-BG" sz="1400" spc="-1" strike="noStrike">
               <a:solidFill>
                 <a:srgbClr val="000000"/>
               </a:solidFill>
@@ -4666,18 +3756,18 @@
       </p:sp>
       <p:sp>
         <p:nvSpPr>
-          <p:cNvPr id="20" name="PlaceHolder 4"/>
-          <p:cNvSpPr>
-            <a:spLocks noGrp="1"/>
-          </p:cNvSpPr>
-          <p:nvPr>
-            <p:ph type="ftr" idx="11"/>
+          <p:cNvPr id="15" name="PlaceHolder 4"/>
+          <p:cNvSpPr>
+            <a:spLocks noGrp="1"/>
+          </p:cNvSpPr>
+          <p:nvPr>
+            <p:ph type="sldNum" idx="11"/>
           </p:nvPr>
         </p:nvSpPr>
         <p:spPr>
           <a:xfrm>
-            <a:off x="3124080" y="6356520"/>
-            <a:ext cx="2895120" cy="364680"/>
+            <a:off x="6553080" y="6356520"/>
+            <a:ext cx="2133000" cy="364320"/>
           </a:xfrm>
           <a:prstGeom prst="rect">
             <a:avLst/>
@@ -4692,30 +3782,46 @@
             <a:noAutofit/>
           </a:bodyPr>
           <a:lstStyle>
-            <a:lvl1pPr indent="0" algn="ctr">
-              <a:buNone/>
-              <a:defRPr b="0" lang="bg-BG" sz="1400" spc="-1" strike="noStrike">
-                <a:solidFill>
-                  <a:srgbClr val="000000"/>
-                </a:solidFill>
-                <a:latin typeface="Times New Roman"/>
+            <a:lvl1pPr indent="0" algn="r" defTabSz="457200">
+              <a:lnSpc>
+                <a:spcPct val="100000"/>
+              </a:lnSpc>
+              <a:buNone/>
+              <a:tabLst>
+                <a:tab algn="l" pos="0"/>
+              </a:tabLst>
+              <a:defRPr b="0" lang="en-US" sz="1200" spc="-1" strike="noStrike">
+                <a:solidFill>
+                  <a:schemeClr val="dk1">
+                    <a:tint val="75000"/>
+                  </a:schemeClr>
+                </a:solidFill>
+                <a:latin typeface="Calibri"/>
               </a:defRPr>
             </a:lvl1pPr>
           </a:lstStyle>
           <a:p>
-            <a:pPr indent="0" algn="ctr">
-              <a:buNone/>
-            </a:pPr>
-            <a:r>
-              <a:rPr b="0" lang="bg-BG" sz="1400" spc="-1" strike="noStrike">
-                <a:solidFill>
-                  <a:srgbClr val="000000"/>
-                </a:solidFill>
-                <a:latin typeface="Times New Roman"/>
-              </a:rPr>
-              <a:t>&lt;долен колонтитул&gt;</a:t>
-            </a:r>
-            <a:endParaRPr b="0" lang="bg-BG" sz="1400" spc="-1" strike="noStrike">
+            <a:pPr indent="0" algn="r" defTabSz="457200">
+              <a:lnSpc>
+                <a:spcPct val="100000"/>
+              </a:lnSpc>
+              <a:buNone/>
+              <a:tabLst>
+                <a:tab algn="l" pos="0"/>
+              </a:tabLst>
+            </a:pPr>
+            <a:fld id="{4EA6BD2F-C362-4ED0-820C-7F995B572635}" type="slidenum">
+              <a:rPr b="0" lang="en-US" sz="1200" spc="-1" strike="noStrike">
+                <a:solidFill>
+                  <a:schemeClr val="dk1">
+                    <a:tint val="75000"/>
+                  </a:schemeClr>
+                </a:solidFill>
+                <a:latin typeface="Calibri"/>
+              </a:rPr>
+              <a:t>&lt;число&gt;</a:t>
+            </a:fld>
+            <a:endParaRPr b="0" lang="bg-BG" sz="1200" spc="-1" strike="noStrike">
               <a:solidFill>
                 <a:srgbClr val="000000"/>
               </a:solidFill>
@@ -4726,18 +3832,18 @@
       </p:sp>
       <p:sp>
         <p:nvSpPr>
-          <p:cNvPr id="21" name="PlaceHolder 5"/>
-          <p:cNvSpPr>
-            <a:spLocks noGrp="1"/>
-          </p:cNvSpPr>
-          <p:nvPr>
-            <p:ph type="sldNum" idx="12"/>
+          <p:cNvPr id="16" name="PlaceHolder 5"/>
+          <p:cNvSpPr>
+            <a:spLocks noGrp="1"/>
+          </p:cNvSpPr>
+          <p:nvPr>
+            <p:ph type="dt" idx="12"/>
           </p:nvPr>
         </p:nvSpPr>
         <p:spPr>
           <a:xfrm>
-            <a:off x="6553080" y="6356520"/>
-            <a:ext cx="2133360" cy="364680"/>
+            <a:off x="457200" y="6356520"/>
+            <a:ext cx="2133000" cy="364320"/>
           </a:xfrm>
           <a:prstGeom prst="rect">
             <a:avLst/>
@@ -4752,40 +3858,30 @@
             <a:noAutofit/>
           </a:bodyPr>
           <a:lstStyle>
-            <a:lvl1pPr indent="0" algn="r" defTabSz="457200">
-              <a:lnSpc>
-                <a:spcPct val="100000"/>
-              </a:lnSpc>
-              <a:buNone/>
-              <a:defRPr b="0" lang="en-US" sz="1200" spc="-1" strike="noStrike">
-                <a:solidFill>
-                  <a:schemeClr val="dk1">
-                    <a:tint val="75000"/>
-                  </a:schemeClr>
-                </a:solidFill>
-                <a:latin typeface="Calibri"/>
+            <a:lvl1pPr indent="0">
+              <a:buNone/>
+              <a:defRPr b="0" lang="bg-BG" sz="1400" spc="-1" strike="noStrike">
+                <a:solidFill>
+                  <a:srgbClr val="000000"/>
+                </a:solidFill>
+                <a:latin typeface="Times New Roman"/>
               </a:defRPr>
             </a:lvl1pPr>
           </a:lstStyle>
           <a:p>
-            <a:pPr indent="0" algn="r" defTabSz="457200">
-              <a:lnSpc>
-                <a:spcPct val="100000"/>
-              </a:lnSpc>
-              <a:buNone/>
-            </a:pPr>
-            <a:fld id="{644315DD-4774-45C1-9FD5-84CAA1FB5959}" type="slidenum">
-              <a:rPr b="0" lang="en-US" sz="1200" spc="-1" strike="noStrike">
-                <a:solidFill>
-                  <a:schemeClr val="dk1">
-                    <a:tint val="75000"/>
-                  </a:schemeClr>
-                </a:solidFill>
-                <a:latin typeface="Calibri"/>
-              </a:rPr>
-              <a:t>&lt;число&gt;</a:t>
-            </a:fld>
-            <a:endParaRPr b="0" lang="bg-BG" sz="1200" spc="-1" strike="noStrike">
+            <a:pPr indent="0">
+              <a:buNone/>
+            </a:pPr>
+            <a:r>
+              <a:rPr b="0" lang="bg-BG" sz="1400" spc="-1" strike="noStrike">
+                <a:solidFill>
+                  <a:srgbClr val="000000"/>
+                </a:solidFill>
+                <a:latin typeface="Times New Roman"/>
+              </a:rPr>
+              <a:t>&lt;дата/час&gt;</a:t>
+            </a:r>
+            <a:endParaRPr b="0" lang="bg-BG" sz="1400" spc="-1" strike="noStrike">
               <a:solidFill>
                 <a:srgbClr val="000000"/>
               </a:solidFill>
@@ -4829,18 +3925,18 @@
       </p:grpSpPr>
       <p:sp>
         <p:nvSpPr>
-          <p:cNvPr id="24" name="PlaceHolder 1"/>
-          <p:cNvSpPr>
-            <a:spLocks noGrp="1"/>
-          </p:cNvSpPr>
-          <p:nvPr>
-            <p:ph type="title"/>
+          <p:cNvPr id="19" name="PlaceHolder 1"/>
+          <p:cNvSpPr>
+            <a:spLocks noGrp="1"/>
+          </p:cNvSpPr>
+          <p:nvPr>
+            <p:ph type="ftr" idx="13"/>
           </p:nvPr>
         </p:nvSpPr>
         <p:spPr>
           <a:xfrm>
-            <a:off x="722160" y="4406760"/>
-            <a:ext cx="7772040" cy="1361880"/>
+            <a:off x="3124080" y="6356520"/>
+            <a:ext cx="2894760" cy="364320"/>
           </a:xfrm>
           <a:prstGeom prst="rect">
             <a:avLst/>
@@ -4851,48 +3947,68 @@
           </a:ln>
         </p:spPr>
         <p:txBody>
-          <a:bodyPr lIns="91440" rIns="91440" tIns="45720" bIns="45720" anchor="t">
+          <a:bodyPr lIns="91440" rIns="91440" tIns="45720" bIns="45720" anchor="ctr">
             <a:noAutofit/>
           </a:bodyPr>
-          <a:p>
-            <a:pPr indent="0" defTabSz="457200">
-              <a:lnSpc>
-                <a:spcPct val="100000"/>
-              </a:lnSpc>
-              <a:buNone/>
-            </a:pPr>
-            <a:r>
-              <a:rPr b="1" lang="en-US" sz="4000" spc="-1" strike="noStrike" cap="all">
-                <a:solidFill>
-                  <a:schemeClr val="dk1"/>
-                </a:solidFill>
-                <a:latin typeface="Calibri"/>
-              </a:rPr>
-              <a:t>Click to edit Master title style</a:t>
-            </a:r>
-            <a:endParaRPr b="0" lang="en-US" sz="4000" spc="-1" strike="noStrike">
-              <a:solidFill>
-                <a:schemeClr val="dk1"/>
-              </a:solidFill>
-              <a:latin typeface="Calibri"/>
-            </a:endParaRPr>
-          </a:p>
-        </p:txBody>
-      </p:sp>
-      <p:sp>
-        <p:nvSpPr>
-          <p:cNvPr id="25" name="PlaceHolder 2"/>
-          <p:cNvSpPr>
-            <a:spLocks noGrp="1"/>
-          </p:cNvSpPr>
-          <p:nvPr>
-            <p:ph type="body"/>
+          <a:lstStyle>
+            <a:lvl1pPr indent="0" algn="ctr">
+              <a:lnSpc>
+                <a:spcPct val="100000"/>
+              </a:lnSpc>
+              <a:buNone/>
+              <a:tabLst>
+                <a:tab algn="l" pos="0"/>
+              </a:tabLst>
+              <a:defRPr b="0" lang="bg-BG" sz="1400" spc="-1" strike="noStrike">
+                <a:solidFill>
+                  <a:srgbClr val="000000"/>
+                </a:solidFill>
+                <a:latin typeface="Times New Roman"/>
+              </a:defRPr>
+            </a:lvl1pPr>
+          </a:lstStyle>
+          <a:p>
+            <a:pPr indent="0" algn="ctr">
+              <a:lnSpc>
+                <a:spcPct val="100000"/>
+              </a:lnSpc>
+              <a:buNone/>
+              <a:tabLst>
+                <a:tab algn="l" pos="0"/>
+              </a:tabLst>
+            </a:pPr>
+            <a:r>
+              <a:rPr b="0" lang="bg-BG" sz="1400" spc="-1" strike="noStrike">
+                <a:solidFill>
+                  <a:srgbClr val="000000"/>
+                </a:solidFill>
+                <a:latin typeface="Times New Roman"/>
+              </a:rPr>
+              <a:t>&lt;долен колонтитул&gt;</a:t>
+            </a:r>
+            <a:endParaRPr b="0" lang="bg-BG" sz="1400" spc="-1" strike="noStrike">
+              <a:solidFill>
+                <a:srgbClr val="000000"/>
+              </a:solidFill>
+              <a:latin typeface="Times New Roman"/>
+            </a:endParaRPr>
+          </a:p>
+        </p:txBody>
+      </p:sp>
+      <p:sp>
+        <p:nvSpPr>
+          <p:cNvPr id="20" name="PlaceHolder 2"/>
+          <p:cNvSpPr>
+            <a:spLocks noGrp="1"/>
+          </p:cNvSpPr>
+          <p:nvPr>
+            <p:ph type="sldNum" idx="14"/>
           </p:nvPr>
         </p:nvSpPr>
         <p:spPr>
           <a:xfrm>
-            <a:off x="722160" y="2906640"/>
-            <a:ext cx="7772040" cy="1499760"/>
+            <a:off x="6553080" y="6356520"/>
+            <a:ext cx="2133000" cy="364320"/>
           </a:xfrm>
           <a:prstGeom prst="rect">
             <a:avLst/>
@@ -4903,56 +4019,72 @@
           </a:ln>
         </p:spPr>
         <p:txBody>
-          <a:bodyPr lIns="91440" rIns="91440" tIns="45720" bIns="45720" anchor="b">
+          <a:bodyPr lIns="91440" rIns="91440" tIns="45720" bIns="45720" anchor="ctr">
             <a:noAutofit/>
           </a:bodyPr>
-          <a:p>
-            <a:pPr indent="0" defTabSz="457200">
-              <a:lnSpc>
-                <a:spcPct val="100000"/>
-              </a:lnSpc>
-              <a:spcBef>
-                <a:spcPts val="400"/>
-              </a:spcBef>
-              <a:buNone/>
-              <a:tabLst>
-                <a:tab algn="l" pos="0"/>
-              </a:tabLst>
-            </a:pPr>
-            <a:r>
-              <a:rPr b="0" lang="en-US" sz="2000" spc="-1" strike="noStrike">
+          <a:lstStyle>
+            <a:lvl1pPr indent="0" algn="r" defTabSz="457200">
+              <a:lnSpc>
+                <a:spcPct val="100000"/>
+              </a:lnSpc>
+              <a:buNone/>
+              <a:tabLst>
+                <a:tab algn="l" pos="0"/>
+              </a:tabLst>
+              <a:defRPr b="0" lang="en-US" sz="1200" spc="-1" strike="noStrike">
                 <a:solidFill>
                   <a:schemeClr val="dk1">
                     <a:tint val="75000"/>
                   </a:schemeClr>
                 </a:solidFill>
                 <a:latin typeface="Calibri"/>
-              </a:rPr>
-              <a:t>Click to edit Master text styles</a:t>
-            </a:r>
-            <a:endParaRPr b="0" lang="en-US" sz="2000" spc="-1" strike="noStrike">
-              <a:solidFill>
-                <a:schemeClr val="dk1"/>
-              </a:solidFill>
-              <a:latin typeface="Calibri"/>
-            </a:endParaRPr>
-          </a:p>
-        </p:txBody>
-      </p:sp>
-      <p:sp>
-        <p:nvSpPr>
-          <p:cNvPr id="26" name="PlaceHolder 3"/>
-          <p:cNvSpPr>
-            <a:spLocks noGrp="1"/>
-          </p:cNvSpPr>
-          <p:nvPr>
-            <p:ph type="dt" idx="13"/>
+              </a:defRPr>
+            </a:lvl1pPr>
+          </a:lstStyle>
+          <a:p>
+            <a:pPr indent="0" algn="r" defTabSz="457200">
+              <a:lnSpc>
+                <a:spcPct val="100000"/>
+              </a:lnSpc>
+              <a:buNone/>
+              <a:tabLst>
+                <a:tab algn="l" pos="0"/>
+              </a:tabLst>
+            </a:pPr>
+            <a:fld id="{14013BB6-CE4D-4AB6-9967-73C59D248C09}" type="slidenum">
+              <a:rPr b="0" lang="en-US" sz="1200" spc="-1" strike="noStrike">
+                <a:solidFill>
+                  <a:schemeClr val="dk1">
+                    <a:tint val="75000"/>
+                  </a:schemeClr>
+                </a:solidFill>
+                <a:latin typeface="Calibri"/>
+              </a:rPr>
+              <a:t>&lt;число&gt;</a:t>
+            </a:fld>
+            <a:endParaRPr b="0" lang="bg-BG" sz="1200" spc="-1" strike="noStrike">
+              <a:solidFill>
+                <a:srgbClr val="000000"/>
+              </a:solidFill>
+              <a:latin typeface="Times New Roman"/>
+            </a:endParaRPr>
+          </a:p>
+        </p:txBody>
+      </p:sp>
+      <p:sp>
+        <p:nvSpPr>
+          <p:cNvPr id="21" name="PlaceHolder 3"/>
+          <p:cNvSpPr>
+            <a:spLocks noGrp="1"/>
+          </p:cNvSpPr>
+          <p:nvPr>
+            <p:ph type="dt" idx="15"/>
           </p:nvPr>
         </p:nvSpPr>
         <p:spPr>
           <a:xfrm>
             <a:off x="457200" y="6356520"/>
-            <a:ext cx="2133360" cy="364680"/>
+            <a:ext cx="2133000" cy="364320"/>
           </a:xfrm>
           <a:prstGeom prst="rect">
             <a:avLst/>
@@ -4967,77 +4099,7 @@
             <a:noAutofit/>
           </a:bodyPr>
           <a:lstStyle>
-            <a:lvl1pPr indent="0" defTabSz="457200">
-              <a:lnSpc>
-                <a:spcPct val="100000"/>
-              </a:lnSpc>
-              <a:buNone/>
-              <a:defRPr b="0" lang="en-US" sz="1200" spc="-1" strike="noStrike">
-                <a:solidFill>
-                  <a:schemeClr val="dk1">
-                    <a:tint val="75000"/>
-                  </a:schemeClr>
-                </a:solidFill>
-                <a:latin typeface="Calibri"/>
-              </a:defRPr>
-            </a:lvl1pPr>
-          </a:lstStyle>
-          <a:p>
-            <a:pPr indent="0" defTabSz="457200">
-              <a:lnSpc>
-                <a:spcPct val="100000"/>
-              </a:lnSpc>
-              <a:buNone/>
-            </a:pPr>
-            <a:r>
-              <a:rPr b="0" lang="en-US" sz="1200" spc="-1" strike="noStrike">
-                <a:solidFill>
-                  <a:schemeClr val="dk1">
-                    <a:tint val="75000"/>
-                  </a:schemeClr>
-                </a:solidFill>
-                <a:latin typeface="Calibri"/>
-              </a:rPr>
-              <a:t>&lt;дата/час&gt;</a:t>
-            </a:r>
-            <a:endParaRPr b="0" lang="bg-BG" sz="1200" spc="-1" strike="noStrike">
-              <a:solidFill>
-                <a:srgbClr val="000000"/>
-              </a:solidFill>
-              <a:latin typeface="Times New Roman"/>
-            </a:endParaRPr>
-          </a:p>
-        </p:txBody>
-      </p:sp>
-      <p:sp>
-        <p:nvSpPr>
-          <p:cNvPr id="27" name="PlaceHolder 4"/>
-          <p:cNvSpPr>
-            <a:spLocks noGrp="1"/>
-          </p:cNvSpPr>
-          <p:nvPr>
-            <p:ph type="ftr" idx="14"/>
-          </p:nvPr>
-        </p:nvSpPr>
-        <p:spPr>
-          <a:xfrm>
-            <a:off x="3124080" y="6356520"/>
-            <a:ext cx="2895120" cy="364680"/>
-          </a:xfrm>
-          <a:prstGeom prst="rect">
-            <a:avLst/>
-          </a:prstGeom>
-          <a:noFill/>
-          <a:ln w="0">
-            <a:noFill/>
-          </a:ln>
-        </p:spPr>
-        <p:txBody>
-          <a:bodyPr lIns="91440" rIns="91440" tIns="45720" bIns="45720" anchor="ctr">
-            <a:noAutofit/>
-          </a:bodyPr>
-          <a:lstStyle>
-            <a:lvl1pPr indent="0" algn="ctr">
+            <a:lvl1pPr indent="0">
               <a:buNone/>
               <a:defRPr b="0" lang="bg-BG" sz="1400" spc="-1" strike="noStrike">
                 <a:solidFill>
@@ -5048,7 +4110,7 @@
             </a:lvl1pPr>
           </a:lstStyle>
           <a:p>
-            <a:pPr indent="0" algn="ctr">
+            <a:pPr indent="0">
               <a:buNone/>
             </a:pPr>
             <a:r>
@@ -5058,79 +4120,9 @@
                 </a:solidFill>
                 <a:latin typeface="Times New Roman"/>
               </a:rPr>
-              <a:t>&lt;долен колонтитул&gt;</a:t>
+              <a:t>&lt;дата/час&gt;</a:t>
             </a:r>
             <a:endParaRPr b="0" lang="bg-BG" sz="1400" spc="-1" strike="noStrike">
-              <a:solidFill>
-                <a:srgbClr val="000000"/>
-              </a:solidFill>
-              <a:latin typeface="Times New Roman"/>
-            </a:endParaRPr>
-          </a:p>
-        </p:txBody>
-      </p:sp>
-      <p:sp>
-        <p:nvSpPr>
-          <p:cNvPr id="28" name="PlaceHolder 5"/>
-          <p:cNvSpPr>
-            <a:spLocks noGrp="1"/>
-          </p:cNvSpPr>
-          <p:nvPr>
-            <p:ph type="sldNum" idx="15"/>
-          </p:nvPr>
-        </p:nvSpPr>
-        <p:spPr>
-          <a:xfrm>
-            <a:off x="6553080" y="6356520"/>
-            <a:ext cx="2133360" cy="364680"/>
-          </a:xfrm>
-          <a:prstGeom prst="rect">
-            <a:avLst/>
-          </a:prstGeom>
-          <a:noFill/>
-          <a:ln w="0">
-            <a:noFill/>
-          </a:ln>
-        </p:spPr>
-        <p:txBody>
-          <a:bodyPr lIns="91440" rIns="91440" tIns="45720" bIns="45720" anchor="ctr">
-            <a:noAutofit/>
-          </a:bodyPr>
-          <a:lstStyle>
-            <a:lvl1pPr indent="0" algn="r" defTabSz="457200">
-              <a:lnSpc>
-                <a:spcPct val="100000"/>
-              </a:lnSpc>
-              <a:buNone/>
-              <a:defRPr b="0" lang="en-US" sz="1200" spc="-1" strike="noStrike">
-                <a:solidFill>
-                  <a:schemeClr val="dk1">
-                    <a:tint val="75000"/>
-                  </a:schemeClr>
-                </a:solidFill>
-                <a:latin typeface="Calibri"/>
-              </a:defRPr>
-            </a:lvl1pPr>
-          </a:lstStyle>
-          <a:p>
-            <a:pPr indent="0" algn="r" defTabSz="457200">
-              <a:lnSpc>
-                <a:spcPct val="100000"/>
-              </a:lnSpc>
-              <a:buNone/>
-            </a:pPr>
-            <a:fld id="{4EB2A51D-B7C3-4891-ADCB-9AC126A5F496}" type="slidenum">
-              <a:rPr b="0" lang="en-US" sz="1200" spc="-1" strike="noStrike">
-                <a:solidFill>
-                  <a:schemeClr val="dk1">
-                    <a:tint val="75000"/>
-                  </a:schemeClr>
-                </a:solidFill>
-                <a:latin typeface="Calibri"/>
-              </a:rPr>
-              <a:t>&lt;число&gt;</a:t>
-            </a:fld>
-            <a:endParaRPr b="0" lang="bg-BG" sz="1200" spc="-1" strike="noStrike">
               <a:solidFill>
                 <a:srgbClr val="000000"/>
               </a:solidFill>
@@ -5174,7 +4166,7 @@
       </p:grpSpPr>
       <p:sp>
         <p:nvSpPr>
-          <p:cNvPr id="29" name="PlaceHolder 1"/>
+          <p:cNvPr id="22" name="PlaceHolder 1"/>
           <p:cNvSpPr>
             <a:spLocks noGrp="1"/>
           </p:cNvSpPr>
@@ -5184,8 +4176,8 @@
         </p:nvSpPr>
         <p:spPr>
           <a:xfrm>
-            <a:off x="457200" y="274680"/>
-            <a:ext cx="8229240" cy="1142640"/>
+            <a:off x="456840" y="-186120"/>
+            <a:ext cx="8228880" cy="2063520"/>
           </a:xfrm>
           <a:prstGeom prst="rect">
             <a:avLst/>
@@ -5196,37 +4188,34 @@
           </a:ln>
         </p:spPr>
         <p:txBody>
-          <a:bodyPr lIns="91440" rIns="91440" tIns="45720" bIns="45720" anchor="ctr">
+          <a:bodyPr lIns="0" rIns="0" tIns="0" bIns="0" anchor="ctr">
             <a:noAutofit/>
           </a:bodyPr>
           <a:p>
-            <a:pPr indent="0" algn="ctr" defTabSz="457200">
-              <a:lnSpc>
-                <a:spcPct val="100000"/>
-              </a:lnSpc>
-              <a:buNone/>
-            </a:pPr>
-            <a:r>
-              <a:rPr b="0" lang="en-US" sz="4400" spc="-1" strike="noStrike">
-                <a:solidFill>
-                  <a:schemeClr val="dk1"/>
-                </a:solidFill>
-                <a:latin typeface="Calibri"/>
-              </a:rPr>
-              <a:t>Click to edit Master title style</a:t>
-            </a:r>
-            <a:endParaRPr b="0" lang="en-US" sz="4400" spc="-1" strike="noStrike">
-              <a:solidFill>
-                <a:schemeClr val="dk1"/>
-              </a:solidFill>
-              <a:latin typeface="Calibri"/>
-            </a:endParaRPr>
-          </a:p>
-        </p:txBody>
-      </p:sp>
-      <p:sp>
-        <p:nvSpPr>
-          <p:cNvPr id="30" name="PlaceHolder 2"/>
+            <a:pPr indent="0">
+              <a:buNone/>
+            </a:pPr>
+            <a:r>
+              <a:rPr b="0" lang="bg-BG" sz="1800" spc="-1" strike="noStrike">
+                <a:solidFill>
+                  <a:srgbClr val="000000"/>
+                </a:solidFill>
+                <a:latin typeface="Arial"/>
+              </a:rPr>
+              <a:t>Щракнете, за да редактирате формата на заглавието</a:t>
+            </a:r>
+            <a:endParaRPr b="0" lang="bg-BG" sz="1800" spc="-1" strike="noStrike">
+              <a:solidFill>
+                <a:srgbClr val="000000"/>
+              </a:solidFill>
+              <a:latin typeface="Arial"/>
+            </a:endParaRPr>
+          </a:p>
+        </p:txBody>
+      </p:sp>
+      <p:sp>
+        <p:nvSpPr>
+          <p:cNvPr id="23" name="PlaceHolder 2"/>
           <p:cNvSpPr>
             <a:spLocks noGrp="1"/>
           </p:cNvSpPr>
@@ -5236,8 +4225,8 @@
         </p:nvSpPr>
         <p:spPr>
           <a:xfrm>
-            <a:off x="457200" y="1600200"/>
-            <a:ext cx="4038120" cy="4525560"/>
+            <a:off x="456840" y="1604160"/>
+            <a:ext cx="4015440" cy="3976920"/>
           </a:xfrm>
           <a:prstGeom prst="rect">
             <a:avLst/>
@@ -5248,164 +4237,210 @@
           </a:ln>
         </p:spPr>
         <p:txBody>
-          <a:bodyPr lIns="91440" rIns="91440" tIns="45720" bIns="45720" anchor="t">
-            <a:noAutofit/>
+          <a:bodyPr lIns="0" rIns="0" tIns="0" bIns="0" anchor="t">
+            <a:normAutofit fontScale="93333"/>
           </a:bodyPr>
           <a:p>
-            <a:pPr marL="343080" indent="-343080" defTabSz="457200">
-              <a:lnSpc>
-                <a:spcPct val="100000"/>
-              </a:lnSpc>
+            <a:pPr marL="432000" indent="-324000">
               <a:spcBef>
-                <a:spcPts val="561"/>
+                <a:spcPts val="1417"/>
               </a:spcBef>
               <a:buClr>
                 <a:srgbClr val="000000"/>
               </a:buClr>
-              <a:buFont typeface="Arial"/>
-              <a:buChar char="•"/>
-            </a:pPr>
-            <a:r>
-              <a:rPr b="0" lang="en-US" sz="2800" spc="-1" strike="noStrike">
-                <a:solidFill>
-                  <a:schemeClr val="dk1"/>
-                </a:solidFill>
-                <a:latin typeface="Calibri"/>
-              </a:rPr>
-              <a:t>Click to edit Master text styles</a:t>
-            </a:r>
-            <a:endParaRPr b="0" lang="en-US" sz="2800" spc="-1" strike="noStrike">
-              <a:solidFill>
-                <a:schemeClr val="dk1"/>
-              </a:solidFill>
-              <a:latin typeface="Calibri"/>
-            </a:endParaRPr>
-          </a:p>
-          <a:p>
-            <a:pPr lvl="1" marL="743040" indent="-285840" defTabSz="457200">
-              <a:lnSpc>
-                <a:spcPct val="100000"/>
-              </a:lnSpc>
+              <a:buSzPct val="45000"/>
+              <a:buFont typeface="Wingdings" charset="2"/>
+              <a:buChar char=""/>
+            </a:pPr>
+            <a:r>
+              <a:rPr b="0" lang="bg-BG" sz="1800" spc="-1" strike="noStrike">
+                <a:solidFill>
+                  <a:srgbClr val="000000"/>
+                </a:solidFill>
+                <a:latin typeface="Arial"/>
+              </a:rPr>
+              <a:t>Щракнете, за да редактирате формата на плана</a:t>
+            </a:r>
+            <a:endParaRPr b="0" lang="bg-BG" sz="1800" spc="-1" strike="noStrike">
+              <a:solidFill>
+                <a:srgbClr val="000000"/>
+              </a:solidFill>
+              <a:latin typeface="Arial"/>
+            </a:endParaRPr>
+          </a:p>
+          <a:p>
+            <a:pPr lvl="1" marL="864000" indent="-324000">
               <a:spcBef>
-                <a:spcPts val="479"/>
+                <a:spcPts val="1134"/>
               </a:spcBef>
               <a:buClr>
                 <a:srgbClr val="000000"/>
               </a:buClr>
-              <a:buFont typeface="Arial"/>
-              <a:buChar char="–"/>
-            </a:pPr>
-            <a:r>
-              <a:rPr b="0" lang="en-US" sz="2400" spc="-1" strike="noStrike">
-                <a:solidFill>
-                  <a:schemeClr val="dk1"/>
-                </a:solidFill>
-                <a:latin typeface="Calibri"/>
-              </a:rPr>
-              <a:t>Second level</a:t>
-            </a:r>
-            <a:endParaRPr b="0" lang="en-US" sz="2400" spc="-1" strike="noStrike">
-              <a:solidFill>
-                <a:schemeClr val="dk1"/>
-              </a:solidFill>
-              <a:latin typeface="Calibri"/>
-            </a:endParaRPr>
-          </a:p>
-          <a:p>
-            <a:pPr lvl="2" marL="1143000" indent="-228600" defTabSz="457200">
-              <a:lnSpc>
-                <a:spcPct val="100000"/>
-              </a:lnSpc>
+              <a:buSzPct val="75000"/>
+              <a:buFont typeface="Symbol" charset="2"/>
+              <a:buChar char=""/>
+            </a:pPr>
+            <a:r>
+              <a:rPr b="0" lang="bg-BG" sz="1800" spc="-1" strike="noStrike">
+                <a:solidFill>
+                  <a:srgbClr val="000000"/>
+                </a:solidFill>
+                <a:latin typeface="Arial"/>
+              </a:rPr>
+              <a:t>Второ ниво на плана</a:t>
+            </a:r>
+            <a:endParaRPr b="0" lang="bg-BG" sz="1800" spc="-1" strike="noStrike">
+              <a:solidFill>
+                <a:srgbClr val="000000"/>
+              </a:solidFill>
+              <a:latin typeface="Arial"/>
+            </a:endParaRPr>
+          </a:p>
+          <a:p>
+            <a:pPr lvl="2" marL="1296000" indent="-288000">
               <a:spcBef>
-                <a:spcPts val="400"/>
+                <a:spcPts val="850"/>
               </a:spcBef>
               <a:buClr>
                 <a:srgbClr val="000000"/>
               </a:buClr>
-              <a:buFont typeface="Arial"/>
-              <a:buChar char="•"/>
-            </a:pPr>
-            <a:r>
-              <a:rPr b="0" lang="en-US" sz="2000" spc="-1" strike="noStrike">
-                <a:solidFill>
-                  <a:schemeClr val="dk1"/>
-                </a:solidFill>
-                <a:latin typeface="Calibri"/>
-              </a:rPr>
-              <a:t>Third level</a:t>
-            </a:r>
-            <a:endParaRPr b="0" lang="en-US" sz="2000" spc="-1" strike="noStrike">
-              <a:solidFill>
-                <a:schemeClr val="dk1"/>
-              </a:solidFill>
-              <a:latin typeface="Calibri"/>
-            </a:endParaRPr>
-          </a:p>
-          <a:p>
-            <a:pPr lvl="3" marL="1600200" indent="-228600" defTabSz="457200">
-              <a:lnSpc>
-                <a:spcPct val="100000"/>
-              </a:lnSpc>
+              <a:buSzPct val="45000"/>
+              <a:buFont typeface="Wingdings" charset="2"/>
+              <a:buChar char=""/>
+            </a:pPr>
+            <a:r>
+              <a:rPr b="0" lang="bg-BG" sz="1800" spc="-1" strike="noStrike">
+                <a:solidFill>
+                  <a:srgbClr val="000000"/>
+                </a:solidFill>
+                <a:latin typeface="Arial"/>
+              </a:rPr>
+              <a:t>Трето ниво на плана</a:t>
+            </a:r>
+            <a:endParaRPr b="0" lang="bg-BG" sz="1800" spc="-1" strike="noStrike">
+              <a:solidFill>
+                <a:srgbClr val="000000"/>
+              </a:solidFill>
+              <a:latin typeface="Arial"/>
+            </a:endParaRPr>
+          </a:p>
+          <a:p>
+            <a:pPr lvl="3" marL="1728000" indent="-216000">
               <a:spcBef>
-                <a:spcPts val="360"/>
+                <a:spcPts val="567"/>
               </a:spcBef>
               <a:buClr>
                 <a:srgbClr val="000000"/>
               </a:buClr>
-              <a:buFont typeface="Arial"/>
-              <a:buChar char="–"/>
-            </a:pPr>
-            <a:r>
-              <a:rPr b="0" lang="en-US" sz="1800" spc="-1" strike="noStrike">
-                <a:solidFill>
-                  <a:schemeClr val="dk1"/>
-                </a:solidFill>
-                <a:latin typeface="Calibri"/>
-              </a:rPr>
-              <a:t>Fourth level</a:t>
-            </a:r>
-            <a:endParaRPr b="0" lang="en-US" sz="1800" spc="-1" strike="noStrike">
-              <a:solidFill>
-                <a:schemeClr val="dk1"/>
-              </a:solidFill>
-              <a:latin typeface="Calibri"/>
-            </a:endParaRPr>
-          </a:p>
-          <a:p>
-            <a:pPr lvl="4" marL="2057400" indent="-228600" defTabSz="457200">
-              <a:lnSpc>
-                <a:spcPct val="100000"/>
-              </a:lnSpc>
+              <a:buSzPct val="75000"/>
+              <a:buFont typeface="Symbol" charset="2"/>
+              <a:buChar char=""/>
+            </a:pPr>
+            <a:r>
+              <a:rPr b="0" lang="bg-BG" sz="1800" spc="-1" strike="noStrike">
+                <a:solidFill>
+                  <a:srgbClr val="000000"/>
+                </a:solidFill>
+                <a:latin typeface="Arial"/>
+              </a:rPr>
+              <a:t>Четвърто ниво на плана</a:t>
+            </a:r>
+            <a:endParaRPr b="0" lang="bg-BG" sz="1800" spc="-1" strike="noStrike">
+              <a:solidFill>
+                <a:srgbClr val="000000"/>
+              </a:solidFill>
+              <a:latin typeface="Arial"/>
+            </a:endParaRPr>
+          </a:p>
+          <a:p>
+            <a:pPr lvl="4" marL="2160000" indent="-216000">
               <a:spcBef>
-                <a:spcPts val="360"/>
+                <a:spcPts val="283"/>
               </a:spcBef>
               <a:buClr>
                 <a:srgbClr val="000000"/>
               </a:buClr>
-              <a:buFont typeface="Arial"/>
-              <a:buChar char="»"/>
-            </a:pPr>
-            <a:r>
-              <a:rPr b="0" lang="en-US" sz="1800" spc="-1" strike="noStrike">
-                <a:solidFill>
-                  <a:schemeClr val="dk1"/>
-                </a:solidFill>
-                <a:latin typeface="Calibri"/>
-              </a:rPr>
-              <a:t>Fifth level</a:t>
-            </a:r>
-            <a:endParaRPr b="0" lang="en-US" sz="1800" spc="-1" strike="noStrike">
-              <a:solidFill>
-                <a:schemeClr val="dk1"/>
-              </a:solidFill>
-              <a:latin typeface="Calibri"/>
-            </a:endParaRPr>
-          </a:p>
-        </p:txBody>
-      </p:sp>
-      <p:sp>
-        <p:nvSpPr>
-          <p:cNvPr id="31" name="PlaceHolder 3"/>
+              <a:buSzPct val="45000"/>
+              <a:buFont typeface="Wingdings" charset="2"/>
+              <a:buChar char=""/>
+            </a:pPr>
+            <a:r>
+              <a:rPr b="0" lang="bg-BG" sz="1800" spc="-1" strike="noStrike">
+                <a:solidFill>
+                  <a:srgbClr val="000000"/>
+                </a:solidFill>
+                <a:latin typeface="Arial"/>
+              </a:rPr>
+              <a:t>Пето ниво на плана</a:t>
+            </a:r>
+            <a:endParaRPr b="0" lang="bg-BG" sz="1800" spc="-1" strike="noStrike">
+              <a:solidFill>
+                <a:srgbClr val="000000"/>
+              </a:solidFill>
+              <a:latin typeface="Arial"/>
+            </a:endParaRPr>
+          </a:p>
+          <a:p>
+            <a:pPr lvl="5" marL="2592000" indent="-216000">
+              <a:spcBef>
+                <a:spcPts val="283"/>
+              </a:spcBef>
+              <a:buClr>
+                <a:srgbClr val="000000"/>
+              </a:buClr>
+              <a:buSzPct val="45000"/>
+              <a:buFont typeface="Wingdings" charset="2"/>
+              <a:buChar char=""/>
+            </a:pPr>
+            <a:r>
+              <a:rPr b="0" lang="bg-BG" sz="1800" spc="-1" strike="noStrike">
+                <a:solidFill>
+                  <a:srgbClr val="000000"/>
+                </a:solidFill>
+                <a:latin typeface="Arial"/>
+              </a:rPr>
+              <a:t>Шесто ниво на плана</a:t>
+            </a:r>
+            <a:endParaRPr b="0" lang="bg-BG" sz="1800" spc="-1" strike="noStrike">
+              <a:solidFill>
+                <a:srgbClr val="000000"/>
+              </a:solidFill>
+              <a:latin typeface="Arial"/>
+            </a:endParaRPr>
+          </a:p>
+          <a:p>
+            <a:pPr lvl="6" marL="3024000" indent="-216000">
+              <a:spcBef>
+                <a:spcPts val="283"/>
+              </a:spcBef>
+              <a:buClr>
+                <a:srgbClr val="000000"/>
+              </a:buClr>
+              <a:buSzPct val="45000"/>
+              <a:buFont typeface="Wingdings" charset="2"/>
+              <a:buChar char=""/>
+            </a:pPr>
+            <a:r>
+              <a:rPr b="0" lang="bg-BG" sz="1800" spc="-1" strike="noStrike">
+                <a:solidFill>
+                  <a:srgbClr val="000000"/>
+                </a:solidFill>
+                <a:latin typeface="Arial"/>
+              </a:rPr>
+              <a:t>Седмо ниво на плана</a:t>
+            </a:r>
+            <a:endParaRPr b="0" lang="bg-BG" sz="1800" spc="-1" strike="noStrike">
+              <a:solidFill>
+                <a:srgbClr val="000000"/>
+              </a:solidFill>
+              <a:latin typeface="Arial"/>
+            </a:endParaRPr>
+          </a:p>
+        </p:txBody>
+      </p:sp>
+      <p:sp>
+        <p:nvSpPr>
+          <p:cNvPr id="24" name="PlaceHolder 3"/>
           <p:cNvSpPr>
             <a:spLocks noGrp="1"/>
           </p:cNvSpPr>
@@ -5415,8 +4450,8 @@
         </p:nvSpPr>
         <p:spPr>
           <a:xfrm>
-            <a:off x="4648320" y="1600200"/>
-            <a:ext cx="4038120" cy="4525560"/>
+            <a:off x="4673880" y="1604160"/>
+            <a:ext cx="4015440" cy="3976920"/>
           </a:xfrm>
           <a:prstGeom prst="rect">
             <a:avLst/>
@@ -5427,175 +4462,221 @@
           </a:ln>
         </p:spPr>
         <p:txBody>
-          <a:bodyPr lIns="91440" rIns="91440" tIns="45720" bIns="45720" anchor="t">
-            <a:noAutofit/>
+          <a:bodyPr lIns="0" rIns="0" tIns="0" bIns="0" anchor="t">
+            <a:normAutofit fontScale="93333"/>
           </a:bodyPr>
           <a:p>
-            <a:pPr marL="343080" indent="-343080" defTabSz="457200">
-              <a:lnSpc>
-                <a:spcPct val="100000"/>
-              </a:lnSpc>
+            <a:pPr marL="432000" indent="-324000">
               <a:spcBef>
-                <a:spcPts val="561"/>
+                <a:spcPts val="1417"/>
               </a:spcBef>
               <a:buClr>
                 <a:srgbClr val="000000"/>
               </a:buClr>
-              <a:buFont typeface="Arial"/>
-              <a:buChar char="•"/>
-            </a:pPr>
-            <a:r>
-              <a:rPr b="0" lang="en-US" sz="2800" spc="-1" strike="noStrike">
-                <a:solidFill>
-                  <a:schemeClr val="dk1"/>
-                </a:solidFill>
-                <a:latin typeface="Calibri"/>
-              </a:rPr>
-              <a:t>Click to edit Master text styles</a:t>
-            </a:r>
-            <a:endParaRPr b="0" lang="en-US" sz="2800" spc="-1" strike="noStrike">
-              <a:solidFill>
-                <a:schemeClr val="dk1"/>
-              </a:solidFill>
-              <a:latin typeface="Calibri"/>
-            </a:endParaRPr>
-          </a:p>
-          <a:p>
-            <a:pPr lvl="1" marL="743040" indent="-285840" defTabSz="457200">
-              <a:lnSpc>
-                <a:spcPct val="100000"/>
-              </a:lnSpc>
+              <a:buSzPct val="45000"/>
+              <a:buFont typeface="Wingdings" charset="2"/>
+              <a:buChar char=""/>
+            </a:pPr>
+            <a:r>
+              <a:rPr b="0" lang="bg-BG" sz="1800" spc="-1" strike="noStrike">
+                <a:solidFill>
+                  <a:srgbClr val="000000"/>
+                </a:solidFill>
+                <a:latin typeface="Arial"/>
+              </a:rPr>
+              <a:t>Щракнете, за да редактирате формата на плана</a:t>
+            </a:r>
+            <a:endParaRPr b="0" lang="bg-BG" sz="1800" spc="-1" strike="noStrike">
+              <a:solidFill>
+                <a:srgbClr val="000000"/>
+              </a:solidFill>
+              <a:latin typeface="Arial"/>
+            </a:endParaRPr>
+          </a:p>
+          <a:p>
+            <a:pPr lvl="1" marL="864000" indent="-324000">
               <a:spcBef>
-                <a:spcPts val="479"/>
+                <a:spcPts val="1134"/>
               </a:spcBef>
               <a:buClr>
                 <a:srgbClr val="000000"/>
               </a:buClr>
-              <a:buFont typeface="Arial"/>
-              <a:buChar char="–"/>
-            </a:pPr>
-            <a:r>
-              <a:rPr b="0" lang="en-US" sz="2400" spc="-1" strike="noStrike">
-                <a:solidFill>
-                  <a:schemeClr val="dk1"/>
-                </a:solidFill>
-                <a:latin typeface="Calibri"/>
-              </a:rPr>
-              <a:t>Second level</a:t>
-            </a:r>
-            <a:endParaRPr b="0" lang="en-US" sz="2400" spc="-1" strike="noStrike">
-              <a:solidFill>
-                <a:schemeClr val="dk1"/>
-              </a:solidFill>
-              <a:latin typeface="Calibri"/>
-            </a:endParaRPr>
-          </a:p>
-          <a:p>
-            <a:pPr lvl="2" marL="1143000" indent="-228600" defTabSz="457200">
-              <a:lnSpc>
-                <a:spcPct val="100000"/>
-              </a:lnSpc>
+              <a:buSzPct val="75000"/>
+              <a:buFont typeface="Symbol" charset="2"/>
+              <a:buChar char=""/>
+            </a:pPr>
+            <a:r>
+              <a:rPr b="0" lang="bg-BG" sz="1800" spc="-1" strike="noStrike">
+                <a:solidFill>
+                  <a:srgbClr val="000000"/>
+                </a:solidFill>
+                <a:latin typeface="Arial"/>
+              </a:rPr>
+              <a:t>Второ ниво на плана</a:t>
+            </a:r>
+            <a:endParaRPr b="0" lang="bg-BG" sz="1800" spc="-1" strike="noStrike">
+              <a:solidFill>
+                <a:srgbClr val="000000"/>
+              </a:solidFill>
+              <a:latin typeface="Arial"/>
+            </a:endParaRPr>
+          </a:p>
+          <a:p>
+            <a:pPr lvl="2" marL="1296000" indent="-288000">
               <a:spcBef>
-                <a:spcPts val="400"/>
+                <a:spcPts val="850"/>
               </a:spcBef>
               <a:buClr>
                 <a:srgbClr val="000000"/>
               </a:buClr>
-              <a:buFont typeface="Arial"/>
-              <a:buChar char="•"/>
-            </a:pPr>
-            <a:r>
-              <a:rPr b="0" lang="en-US" sz="2000" spc="-1" strike="noStrike">
-                <a:solidFill>
-                  <a:schemeClr val="dk1"/>
-                </a:solidFill>
-                <a:latin typeface="Calibri"/>
-              </a:rPr>
-              <a:t>Third level</a:t>
-            </a:r>
-            <a:endParaRPr b="0" lang="en-US" sz="2000" spc="-1" strike="noStrike">
-              <a:solidFill>
-                <a:schemeClr val="dk1"/>
-              </a:solidFill>
-              <a:latin typeface="Calibri"/>
-            </a:endParaRPr>
-          </a:p>
-          <a:p>
-            <a:pPr lvl="3" marL="1600200" indent="-228600" defTabSz="457200">
-              <a:lnSpc>
-                <a:spcPct val="100000"/>
-              </a:lnSpc>
+              <a:buSzPct val="45000"/>
+              <a:buFont typeface="Wingdings" charset="2"/>
+              <a:buChar char=""/>
+            </a:pPr>
+            <a:r>
+              <a:rPr b="0" lang="bg-BG" sz="1800" spc="-1" strike="noStrike">
+                <a:solidFill>
+                  <a:srgbClr val="000000"/>
+                </a:solidFill>
+                <a:latin typeface="Arial"/>
+              </a:rPr>
+              <a:t>Трето ниво на плана</a:t>
+            </a:r>
+            <a:endParaRPr b="0" lang="bg-BG" sz="1800" spc="-1" strike="noStrike">
+              <a:solidFill>
+                <a:srgbClr val="000000"/>
+              </a:solidFill>
+              <a:latin typeface="Arial"/>
+            </a:endParaRPr>
+          </a:p>
+          <a:p>
+            <a:pPr lvl="3" marL="1728000" indent="-216000">
               <a:spcBef>
-                <a:spcPts val="360"/>
+                <a:spcPts val="567"/>
               </a:spcBef>
               <a:buClr>
                 <a:srgbClr val="000000"/>
               </a:buClr>
-              <a:buFont typeface="Arial"/>
-              <a:buChar char="–"/>
-            </a:pPr>
-            <a:r>
-              <a:rPr b="0" lang="en-US" sz="1800" spc="-1" strike="noStrike">
-                <a:solidFill>
-                  <a:schemeClr val="dk1"/>
-                </a:solidFill>
-                <a:latin typeface="Calibri"/>
-              </a:rPr>
-              <a:t>Fourth level</a:t>
-            </a:r>
-            <a:endParaRPr b="0" lang="en-US" sz="1800" spc="-1" strike="noStrike">
-              <a:solidFill>
-                <a:schemeClr val="dk1"/>
-              </a:solidFill>
-              <a:latin typeface="Calibri"/>
-            </a:endParaRPr>
-          </a:p>
-          <a:p>
-            <a:pPr lvl="4" marL="2057400" indent="-228600" defTabSz="457200">
-              <a:lnSpc>
-                <a:spcPct val="100000"/>
-              </a:lnSpc>
+              <a:buSzPct val="75000"/>
+              <a:buFont typeface="Symbol" charset="2"/>
+              <a:buChar char=""/>
+            </a:pPr>
+            <a:r>
+              <a:rPr b="0" lang="bg-BG" sz="1800" spc="-1" strike="noStrike">
+                <a:solidFill>
+                  <a:srgbClr val="000000"/>
+                </a:solidFill>
+                <a:latin typeface="Arial"/>
+              </a:rPr>
+              <a:t>Четвърто ниво на плана</a:t>
+            </a:r>
+            <a:endParaRPr b="0" lang="bg-BG" sz="1800" spc="-1" strike="noStrike">
+              <a:solidFill>
+                <a:srgbClr val="000000"/>
+              </a:solidFill>
+              <a:latin typeface="Arial"/>
+            </a:endParaRPr>
+          </a:p>
+          <a:p>
+            <a:pPr lvl="4" marL="2160000" indent="-216000">
               <a:spcBef>
-                <a:spcPts val="360"/>
+                <a:spcPts val="283"/>
               </a:spcBef>
               <a:buClr>
                 <a:srgbClr val="000000"/>
               </a:buClr>
-              <a:buFont typeface="Arial"/>
-              <a:buChar char="»"/>
-            </a:pPr>
-            <a:r>
-              <a:rPr b="0" lang="en-US" sz="1800" spc="-1" strike="noStrike">
-                <a:solidFill>
-                  <a:schemeClr val="dk1"/>
-                </a:solidFill>
-                <a:latin typeface="Calibri"/>
-              </a:rPr>
-              <a:t>Fifth level</a:t>
-            </a:r>
-            <a:endParaRPr b="0" lang="en-US" sz="1800" spc="-1" strike="noStrike">
-              <a:solidFill>
-                <a:schemeClr val="dk1"/>
-              </a:solidFill>
-              <a:latin typeface="Calibri"/>
-            </a:endParaRPr>
-          </a:p>
-        </p:txBody>
-      </p:sp>
-      <p:sp>
-        <p:nvSpPr>
-          <p:cNvPr id="32" name="PlaceHolder 4"/>
-          <p:cNvSpPr>
-            <a:spLocks noGrp="1"/>
-          </p:cNvSpPr>
-          <p:nvPr>
-            <p:ph type="dt" idx="16"/>
+              <a:buSzPct val="45000"/>
+              <a:buFont typeface="Wingdings" charset="2"/>
+              <a:buChar char=""/>
+            </a:pPr>
+            <a:r>
+              <a:rPr b="0" lang="bg-BG" sz="1800" spc="-1" strike="noStrike">
+                <a:solidFill>
+                  <a:srgbClr val="000000"/>
+                </a:solidFill>
+                <a:latin typeface="Arial"/>
+              </a:rPr>
+              <a:t>Пето ниво на плана</a:t>
+            </a:r>
+            <a:endParaRPr b="0" lang="bg-BG" sz="1800" spc="-1" strike="noStrike">
+              <a:solidFill>
+                <a:srgbClr val="000000"/>
+              </a:solidFill>
+              <a:latin typeface="Arial"/>
+            </a:endParaRPr>
+          </a:p>
+          <a:p>
+            <a:pPr lvl="5" marL="2592000" indent="-216000">
+              <a:spcBef>
+                <a:spcPts val="283"/>
+              </a:spcBef>
+              <a:buClr>
+                <a:srgbClr val="000000"/>
+              </a:buClr>
+              <a:buSzPct val="45000"/>
+              <a:buFont typeface="Wingdings" charset="2"/>
+              <a:buChar char=""/>
+            </a:pPr>
+            <a:r>
+              <a:rPr b="0" lang="bg-BG" sz="1800" spc="-1" strike="noStrike">
+                <a:solidFill>
+                  <a:srgbClr val="000000"/>
+                </a:solidFill>
+                <a:latin typeface="Arial"/>
+              </a:rPr>
+              <a:t>Шесто ниво на плана</a:t>
+            </a:r>
+            <a:endParaRPr b="0" lang="bg-BG" sz="1800" spc="-1" strike="noStrike">
+              <a:solidFill>
+                <a:srgbClr val="000000"/>
+              </a:solidFill>
+              <a:latin typeface="Arial"/>
+            </a:endParaRPr>
+          </a:p>
+          <a:p>
+            <a:pPr lvl="6" marL="3024000" indent="-216000">
+              <a:spcBef>
+                <a:spcPts val="283"/>
+              </a:spcBef>
+              <a:buClr>
+                <a:srgbClr val="000000"/>
+              </a:buClr>
+              <a:buSzPct val="45000"/>
+              <a:buFont typeface="Wingdings" charset="2"/>
+              <a:buChar char=""/>
+            </a:pPr>
+            <a:r>
+              <a:rPr b="0" lang="bg-BG" sz="1800" spc="-1" strike="noStrike">
+                <a:solidFill>
+                  <a:srgbClr val="000000"/>
+                </a:solidFill>
+                <a:latin typeface="Arial"/>
+              </a:rPr>
+              <a:t>Седмо ниво на плана</a:t>
+            </a:r>
+            <a:endParaRPr b="0" lang="bg-BG" sz="1800" spc="-1" strike="noStrike">
+              <a:solidFill>
+                <a:srgbClr val="000000"/>
+              </a:solidFill>
+              <a:latin typeface="Arial"/>
+            </a:endParaRPr>
+          </a:p>
+        </p:txBody>
+      </p:sp>
+      <p:sp>
+        <p:nvSpPr>
+          <p:cNvPr id="25" name="PlaceHolder 4"/>
+          <p:cNvSpPr>
+            <a:spLocks noGrp="1"/>
+          </p:cNvSpPr>
+          <p:nvPr>
+            <p:ph type="ftr" idx="16"/>
           </p:nvPr>
         </p:nvSpPr>
         <p:spPr>
           <a:xfrm>
-            <a:off x="457200" y="6356520"/>
-            <a:ext cx="2133360" cy="364680"/>
+            <a:off x="3124080" y="6356520"/>
+            <a:ext cx="2894760" cy="364320"/>
           </a:xfrm>
           <a:prstGeom prst="rect">
             <a:avLst/>
@@ -5610,40 +4691,42 @@
             <a:noAutofit/>
           </a:bodyPr>
           <a:lstStyle>
-            <a:lvl1pPr indent="0" defTabSz="457200">
-              <a:lnSpc>
-                <a:spcPct val="100000"/>
-              </a:lnSpc>
-              <a:buNone/>
-              <a:defRPr b="0" lang="en-US" sz="1200" spc="-1" strike="noStrike">
-                <a:solidFill>
-                  <a:schemeClr val="dk1">
-                    <a:tint val="75000"/>
-                  </a:schemeClr>
-                </a:solidFill>
-                <a:latin typeface="Calibri"/>
+            <a:lvl1pPr indent="0" algn="ctr">
+              <a:lnSpc>
+                <a:spcPct val="100000"/>
+              </a:lnSpc>
+              <a:buNone/>
+              <a:tabLst>
+                <a:tab algn="l" pos="0"/>
+              </a:tabLst>
+              <a:defRPr b="0" lang="bg-BG" sz="1400" spc="-1" strike="noStrike">
+                <a:solidFill>
+                  <a:srgbClr val="000000"/>
+                </a:solidFill>
+                <a:latin typeface="Times New Roman"/>
               </a:defRPr>
             </a:lvl1pPr>
           </a:lstStyle>
           <a:p>
-            <a:pPr indent="0" defTabSz="457200">
-              <a:lnSpc>
-                <a:spcPct val="100000"/>
-              </a:lnSpc>
-              <a:buNone/>
-            </a:pPr>
-            <a:r>
-              <a:rPr b="0" lang="en-US" sz="1200" spc="-1" strike="noStrike">
-                <a:solidFill>
-                  <a:schemeClr val="dk1">
-                    <a:tint val="75000"/>
-                  </a:schemeClr>
-                </a:solidFill>
-                <a:latin typeface="Calibri"/>
-              </a:rPr>
-              <a:t>&lt;дата/час&gt;</a:t>
-            </a:r>
-            <a:endParaRPr b="0" lang="bg-BG" sz="1200" spc="-1" strike="noStrike">
+            <a:pPr indent="0" algn="ctr">
+              <a:lnSpc>
+                <a:spcPct val="100000"/>
+              </a:lnSpc>
+              <a:buNone/>
+              <a:tabLst>
+                <a:tab algn="l" pos="0"/>
+              </a:tabLst>
+            </a:pPr>
+            <a:r>
+              <a:rPr b="0" lang="bg-BG" sz="1400" spc="-1" strike="noStrike">
+                <a:solidFill>
+                  <a:srgbClr val="000000"/>
+                </a:solidFill>
+                <a:latin typeface="Times New Roman"/>
+              </a:rPr>
+              <a:t>&lt;долен колонтитул&gt;</a:t>
+            </a:r>
+            <a:endParaRPr b="0" lang="bg-BG" sz="1400" spc="-1" strike="noStrike">
               <a:solidFill>
                 <a:srgbClr val="000000"/>
               </a:solidFill>
@@ -5654,18 +4737,18 @@
       </p:sp>
       <p:sp>
         <p:nvSpPr>
-          <p:cNvPr id="33" name="PlaceHolder 5"/>
-          <p:cNvSpPr>
-            <a:spLocks noGrp="1"/>
-          </p:cNvSpPr>
-          <p:nvPr>
-            <p:ph type="ftr" idx="17"/>
+          <p:cNvPr id="26" name="PlaceHolder 5"/>
+          <p:cNvSpPr>
+            <a:spLocks noGrp="1"/>
+          </p:cNvSpPr>
+          <p:nvPr>
+            <p:ph type="sldNum" idx="17"/>
           </p:nvPr>
         </p:nvSpPr>
         <p:spPr>
           <a:xfrm>
-            <a:off x="3124080" y="6356520"/>
-            <a:ext cx="2895120" cy="364680"/>
+            <a:off x="6553080" y="6356520"/>
+            <a:ext cx="2133000" cy="364320"/>
           </a:xfrm>
           <a:prstGeom prst="rect">
             <a:avLst/>
@@ -5680,30 +4763,46 @@
             <a:noAutofit/>
           </a:bodyPr>
           <a:lstStyle>
-            <a:lvl1pPr indent="0" algn="ctr">
-              <a:buNone/>
-              <a:defRPr b="0" lang="bg-BG" sz="1400" spc="-1" strike="noStrike">
-                <a:solidFill>
-                  <a:srgbClr val="000000"/>
-                </a:solidFill>
-                <a:latin typeface="Times New Roman"/>
+            <a:lvl1pPr indent="0" algn="r" defTabSz="457200">
+              <a:lnSpc>
+                <a:spcPct val="100000"/>
+              </a:lnSpc>
+              <a:buNone/>
+              <a:tabLst>
+                <a:tab algn="l" pos="0"/>
+              </a:tabLst>
+              <a:defRPr b="0" lang="en-US" sz="1200" spc="-1" strike="noStrike">
+                <a:solidFill>
+                  <a:schemeClr val="dk1">
+                    <a:tint val="75000"/>
+                  </a:schemeClr>
+                </a:solidFill>
+                <a:latin typeface="Calibri"/>
               </a:defRPr>
             </a:lvl1pPr>
           </a:lstStyle>
           <a:p>
-            <a:pPr indent="0" algn="ctr">
-              <a:buNone/>
-            </a:pPr>
-            <a:r>
-              <a:rPr b="0" lang="bg-BG" sz="1400" spc="-1" strike="noStrike">
-                <a:solidFill>
-                  <a:srgbClr val="000000"/>
-                </a:solidFill>
-                <a:latin typeface="Times New Roman"/>
-              </a:rPr>
-              <a:t>&lt;долен колонтитул&gt;</a:t>
-            </a:r>
-            <a:endParaRPr b="0" lang="bg-BG" sz="1400" spc="-1" strike="noStrike">
+            <a:pPr indent="0" algn="r" defTabSz="457200">
+              <a:lnSpc>
+                <a:spcPct val="100000"/>
+              </a:lnSpc>
+              <a:buNone/>
+              <a:tabLst>
+                <a:tab algn="l" pos="0"/>
+              </a:tabLst>
+            </a:pPr>
+            <a:fld id="{AF61B140-A76C-470F-8E76-B7BB93E123A7}" type="slidenum">
+              <a:rPr b="0" lang="en-US" sz="1200" spc="-1" strike="noStrike">
+                <a:solidFill>
+                  <a:schemeClr val="dk1">
+                    <a:tint val="75000"/>
+                  </a:schemeClr>
+                </a:solidFill>
+                <a:latin typeface="Calibri"/>
+              </a:rPr>
+              <a:t>&lt;число&gt;</a:t>
+            </a:fld>
+            <a:endParaRPr b="0" lang="bg-BG" sz="1200" spc="-1" strike="noStrike">
               <a:solidFill>
                 <a:srgbClr val="000000"/>
               </a:solidFill>
@@ -5714,18 +4813,18 @@
       </p:sp>
       <p:sp>
         <p:nvSpPr>
-          <p:cNvPr id="34" name="PlaceHolder 6"/>
-          <p:cNvSpPr>
-            <a:spLocks noGrp="1"/>
-          </p:cNvSpPr>
-          <p:nvPr>
-            <p:ph type="sldNum" idx="18"/>
+          <p:cNvPr id="27" name="PlaceHolder 6"/>
+          <p:cNvSpPr>
+            <a:spLocks noGrp="1"/>
+          </p:cNvSpPr>
+          <p:nvPr>
+            <p:ph type="dt" idx="18"/>
           </p:nvPr>
         </p:nvSpPr>
         <p:spPr>
           <a:xfrm>
-            <a:off x="6553080" y="6356520"/>
-            <a:ext cx="2133360" cy="364680"/>
+            <a:off x="457200" y="6356520"/>
+            <a:ext cx="2133000" cy="364320"/>
           </a:xfrm>
           <a:prstGeom prst="rect">
             <a:avLst/>
@@ -5740,40 +4839,30 @@
             <a:noAutofit/>
           </a:bodyPr>
           <a:lstStyle>
-            <a:lvl1pPr indent="0" algn="r" defTabSz="457200">
-              <a:lnSpc>
-                <a:spcPct val="100000"/>
-              </a:lnSpc>
-              <a:buNone/>
-              <a:defRPr b="0" lang="en-US" sz="1200" spc="-1" strike="noStrike">
-                <a:solidFill>
-                  <a:schemeClr val="dk1">
-                    <a:tint val="75000"/>
-                  </a:schemeClr>
-                </a:solidFill>
-                <a:latin typeface="Calibri"/>
+            <a:lvl1pPr indent="0">
+              <a:buNone/>
+              <a:defRPr b="0" lang="bg-BG" sz="1400" spc="-1" strike="noStrike">
+                <a:solidFill>
+                  <a:srgbClr val="000000"/>
+                </a:solidFill>
+                <a:latin typeface="Times New Roman"/>
               </a:defRPr>
             </a:lvl1pPr>
           </a:lstStyle>
           <a:p>
-            <a:pPr indent="0" algn="r" defTabSz="457200">
-              <a:lnSpc>
-                <a:spcPct val="100000"/>
-              </a:lnSpc>
-              <a:buNone/>
-            </a:pPr>
-            <a:fld id="{FC9E3964-4020-43C8-A70E-88F0D3BDE430}" type="slidenum">
-              <a:rPr b="0" lang="en-US" sz="1200" spc="-1" strike="noStrike">
-                <a:solidFill>
-                  <a:schemeClr val="dk1">
-                    <a:tint val="75000"/>
-                  </a:schemeClr>
-                </a:solidFill>
-                <a:latin typeface="Calibri"/>
-              </a:rPr>
-              <a:t>&lt;число&gt;</a:t>
-            </a:fld>
-            <a:endParaRPr b="0" lang="bg-BG" sz="1200" spc="-1" strike="noStrike">
+            <a:pPr indent="0">
+              <a:buNone/>
+            </a:pPr>
+            <a:r>
+              <a:rPr b="0" lang="bg-BG" sz="1400" spc="-1" strike="noStrike">
+                <a:solidFill>
+                  <a:srgbClr val="000000"/>
+                </a:solidFill>
+                <a:latin typeface="Times New Roman"/>
+              </a:rPr>
+              <a:t>&lt;дата/час&gt;</a:t>
+            </a:r>
+            <a:endParaRPr b="0" lang="bg-BG" sz="1400" spc="-1" strike="noStrike">
               <a:solidFill>
                 <a:srgbClr val="000000"/>
               </a:solidFill>
@@ -5817,18 +4906,18 @@
       </p:grpSpPr>
       <p:sp>
         <p:nvSpPr>
-          <p:cNvPr id="38" name="PlaceHolder 1"/>
-          <p:cNvSpPr>
-            <a:spLocks noGrp="1"/>
-          </p:cNvSpPr>
-          <p:nvPr>
-            <p:ph type="title"/>
+          <p:cNvPr id="31" name="PlaceHolder 1"/>
+          <p:cNvSpPr>
+            <a:spLocks noGrp="1"/>
+          </p:cNvSpPr>
+          <p:nvPr>
+            <p:ph type="ftr" idx="19"/>
           </p:nvPr>
         </p:nvSpPr>
         <p:spPr>
           <a:xfrm>
-            <a:off x="457200" y="274680"/>
-            <a:ext cx="8229240" cy="1142640"/>
+            <a:off x="3124080" y="6356520"/>
+            <a:ext cx="2894760" cy="364320"/>
           </a:xfrm>
           <a:prstGeom prst="rect">
             <a:avLst/>
@@ -5842,45 +4931,65 @@
           <a:bodyPr lIns="91440" rIns="91440" tIns="45720" bIns="45720" anchor="ctr">
             <a:noAutofit/>
           </a:bodyPr>
-          <a:p>
-            <a:pPr indent="0" algn="ctr" defTabSz="457200">
-              <a:lnSpc>
-                <a:spcPct val="100000"/>
-              </a:lnSpc>
-              <a:buNone/>
-            </a:pPr>
-            <a:r>
-              <a:rPr b="0" lang="en-US" sz="4400" spc="-1" strike="noStrike">
-                <a:solidFill>
-                  <a:schemeClr val="dk1"/>
-                </a:solidFill>
-                <a:latin typeface="Calibri"/>
-              </a:rPr>
-              <a:t>Click to edit Master title style</a:t>
-            </a:r>
-            <a:endParaRPr b="0" lang="en-US" sz="4400" spc="-1" strike="noStrike">
-              <a:solidFill>
-                <a:schemeClr val="dk1"/>
-              </a:solidFill>
-              <a:latin typeface="Calibri"/>
-            </a:endParaRPr>
-          </a:p>
-        </p:txBody>
-      </p:sp>
-      <p:sp>
-        <p:nvSpPr>
-          <p:cNvPr id="39" name="PlaceHolder 2"/>
-          <p:cNvSpPr>
-            <a:spLocks noGrp="1"/>
-          </p:cNvSpPr>
-          <p:nvPr>
-            <p:ph type="body"/>
+          <a:lstStyle>
+            <a:lvl1pPr indent="0" algn="ctr">
+              <a:lnSpc>
+                <a:spcPct val="100000"/>
+              </a:lnSpc>
+              <a:buNone/>
+              <a:tabLst>
+                <a:tab algn="l" pos="0"/>
+              </a:tabLst>
+              <a:defRPr b="0" lang="bg-BG" sz="1400" spc="-1" strike="noStrike">
+                <a:solidFill>
+                  <a:srgbClr val="000000"/>
+                </a:solidFill>
+                <a:latin typeface="Times New Roman"/>
+              </a:defRPr>
+            </a:lvl1pPr>
+          </a:lstStyle>
+          <a:p>
+            <a:pPr indent="0" algn="ctr">
+              <a:lnSpc>
+                <a:spcPct val="100000"/>
+              </a:lnSpc>
+              <a:buNone/>
+              <a:tabLst>
+                <a:tab algn="l" pos="0"/>
+              </a:tabLst>
+            </a:pPr>
+            <a:r>
+              <a:rPr b="0" lang="bg-BG" sz="1400" spc="-1" strike="noStrike">
+                <a:solidFill>
+                  <a:srgbClr val="000000"/>
+                </a:solidFill>
+                <a:latin typeface="Times New Roman"/>
+              </a:rPr>
+              <a:t>&lt;долен колонтитул&gt;</a:t>
+            </a:r>
+            <a:endParaRPr b="0" lang="bg-BG" sz="1400" spc="-1" strike="noStrike">
+              <a:solidFill>
+                <a:srgbClr val="000000"/>
+              </a:solidFill>
+              <a:latin typeface="Times New Roman"/>
+            </a:endParaRPr>
+          </a:p>
+        </p:txBody>
+      </p:sp>
+      <p:sp>
+        <p:nvSpPr>
+          <p:cNvPr id="32" name="PlaceHolder 2"/>
+          <p:cNvSpPr>
+            <a:spLocks noGrp="1"/>
+          </p:cNvSpPr>
+          <p:nvPr>
+            <p:ph type="sldNum" idx="20"/>
           </p:nvPr>
         </p:nvSpPr>
         <p:spPr>
           <a:xfrm>
-            <a:off x="457200" y="1535040"/>
-            <a:ext cx="4039920" cy="639360"/>
+            <a:off x="6553080" y="6356520"/>
+            <a:ext cx="2133000" cy="364320"/>
           </a:xfrm>
           <a:prstGeom prst="rect">
             <a:avLst/>
@@ -5891,54 +5000,72 @@
           </a:ln>
         </p:spPr>
         <p:txBody>
-          <a:bodyPr lIns="91440" rIns="91440" tIns="45720" bIns="45720" anchor="b">
+          <a:bodyPr lIns="91440" rIns="91440" tIns="45720" bIns="45720" anchor="ctr">
             <a:noAutofit/>
           </a:bodyPr>
-          <a:p>
-            <a:pPr indent="0" defTabSz="457200">
-              <a:lnSpc>
-                <a:spcPct val="100000"/>
-              </a:lnSpc>
-              <a:spcBef>
-                <a:spcPts val="479"/>
-              </a:spcBef>
-              <a:buNone/>
-              <a:tabLst>
-                <a:tab algn="l" pos="0"/>
-              </a:tabLst>
-            </a:pPr>
-            <a:r>
-              <a:rPr b="1" lang="en-US" sz="2400" spc="-1" strike="noStrike">
-                <a:solidFill>
-                  <a:schemeClr val="dk1"/>
+          <a:lstStyle>
+            <a:lvl1pPr indent="0" algn="r" defTabSz="457200">
+              <a:lnSpc>
+                <a:spcPct val="100000"/>
+              </a:lnSpc>
+              <a:buNone/>
+              <a:tabLst>
+                <a:tab algn="l" pos="0"/>
+              </a:tabLst>
+              <a:defRPr b="0" lang="en-US" sz="1200" spc="-1" strike="noStrike">
+                <a:solidFill>
+                  <a:schemeClr val="dk1">
+                    <a:tint val="75000"/>
+                  </a:schemeClr>
                 </a:solidFill>
                 <a:latin typeface="Calibri"/>
-              </a:rPr>
-              <a:t>Click to edit Master text styles</a:t>
-            </a:r>
-            <a:endParaRPr b="0" lang="en-US" sz="2400" spc="-1" strike="noStrike">
-              <a:solidFill>
-                <a:schemeClr val="dk1"/>
-              </a:solidFill>
-              <a:latin typeface="Calibri"/>
-            </a:endParaRPr>
-          </a:p>
-        </p:txBody>
-      </p:sp>
-      <p:sp>
-        <p:nvSpPr>
-          <p:cNvPr id="40" name="PlaceHolder 3"/>
-          <p:cNvSpPr>
-            <a:spLocks noGrp="1"/>
-          </p:cNvSpPr>
-          <p:nvPr>
-            <p:ph type="body"/>
+              </a:defRPr>
+            </a:lvl1pPr>
+          </a:lstStyle>
+          <a:p>
+            <a:pPr indent="0" algn="r" defTabSz="457200">
+              <a:lnSpc>
+                <a:spcPct val="100000"/>
+              </a:lnSpc>
+              <a:buNone/>
+              <a:tabLst>
+                <a:tab algn="l" pos="0"/>
+              </a:tabLst>
+            </a:pPr>
+            <a:fld id="{97FC1B09-4887-443F-920F-4064B1B646EC}" type="slidenum">
+              <a:rPr b="0" lang="en-US" sz="1200" spc="-1" strike="noStrike">
+                <a:solidFill>
+                  <a:schemeClr val="dk1">
+                    <a:tint val="75000"/>
+                  </a:schemeClr>
+                </a:solidFill>
+                <a:latin typeface="Calibri"/>
+              </a:rPr>
+              <a:t>&lt;число&gt;</a:t>
+            </a:fld>
+            <a:endParaRPr b="0" lang="bg-BG" sz="1200" spc="-1" strike="noStrike">
+              <a:solidFill>
+                <a:srgbClr val="000000"/>
+              </a:solidFill>
+              <a:latin typeface="Times New Roman"/>
+            </a:endParaRPr>
+          </a:p>
+        </p:txBody>
+      </p:sp>
+      <p:sp>
+        <p:nvSpPr>
+          <p:cNvPr id="33" name="PlaceHolder 3"/>
+          <p:cNvSpPr>
+            <a:spLocks noGrp="1"/>
+          </p:cNvSpPr>
+          <p:nvPr>
+            <p:ph type="dt" idx="21"/>
           </p:nvPr>
         </p:nvSpPr>
         <p:spPr>
           <a:xfrm>
-            <a:off x="457200" y="2174760"/>
-            <a:ext cx="4039920" cy="3951000"/>
+            <a:off x="457200" y="6356520"/>
+            <a:ext cx="2133000" cy="364320"/>
           </a:xfrm>
           <a:prstGeom prst="rect">
             <a:avLst/>
@@ -5949,497 +5076,11 @@
           </a:ln>
         </p:spPr>
         <p:txBody>
-          <a:bodyPr lIns="91440" rIns="91440" tIns="45720" bIns="45720" anchor="t">
-            <a:noAutofit/>
-          </a:bodyPr>
-          <a:p>
-            <a:pPr marL="343080" indent="-343080" defTabSz="457200">
-              <a:lnSpc>
-                <a:spcPct val="100000"/>
-              </a:lnSpc>
-              <a:spcBef>
-                <a:spcPts val="479"/>
-              </a:spcBef>
-              <a:buClr>
-                <a:srgbClr val="000000"/>
-              </a:buClr>
-              <a:buFont typeface="Arial"/>
-              <a:buChar char="•"/>
-            </a:pPr>
-            <a:r>
-              <a:rPr b="0" lang="en-US" sz="2400" spc="-1" strike="noStrike">
-                <a:solidFill>
-                  <a:schemeClr val="dk1"/>
-                </a:solidFill>
-                <a:latin typeface="Calibri"/>
-              </a:rPr>
-              <a:t>Click to edit Master text styles</a:t>
-            </a:r>
-            <a:endParaRPr b="0" lang="en-US" sz="2400" spc="-1" strike="noStrike">
-              <a:solidFill>
-                <a:schemeClr val="dk1"/>
-              </a:solidFill>
-              <a:latin typeface="Calibri"/>
-            </a:endParaRPr>
-          </a:p>
-          <a:p>
-            <a:pPr lvl="1" marL="743040" indent="-285840" defTabSz="457200">
-              <a:lnSpc>
-                <a:spcPct val="100000"/>
-              </a:lnSpc>
-              <a:spcBef>
-                <a:spcPts val="400"/>
-              </a:spcBef>
-              <a:buClr>
-                <a:srgbClr val="000000"/>
-              </a:buClr>
-              <a:buFont typeface="Arial"/>
-              <a:buChar char="–"/>
-            </a:pPr>
-            <a:r>
-              <a:rPr b="0" lang="en-US" sz="2000" spc="-1" strike="noStrike">
-                <a:solidFill>
-                  <a:schemeClr val="dk1"/>
-                </a:solidFill>
-                <a:latin typeface="Calibri"/>
-              </a:rPr>
-              <a:t>Second level</a:t>
-            </a:r>
-            <a:endParaRPr b="0" lang="en-US" sz="2000" spc="-1" strike="noStrike">
-              <a:solidFill>
-                <a:schemeClr val="dk1"/>
-              </a:solidFill>
-              <a:latin typeface="Calibri"/>
-            </a:endParaRPr>
-          </a:p>
-          <a:p>
-            <a:pPr lvl="2" marL="1143000" indent="-228600" defTabSz="457200">
-              <a:lnSpc>
-                <a:spcPct val="100000"/>
-              </a:lnSpc>
-              <a:spcBef>
-                <a:spcPts val="360"/>
-              </a:spcBef>
-              <a:buClr>
-                <a:srgbClr val="000000"/>
-              </a:buClr>
-              <a:buFont typeface="Arial"/>
-              <a:buChar char="•"/>
-            </a:pPr>
-            <a:r>
-              <a:rPr b="0" lang="en-US" sz="1800" spc="-1" strike="noStrike">
-                <a:solidFill>
-                  <a:schemeClr val="dk1"/>
-                </a:solidFill>
-                <a:latin typeface="Calibri"/>
-              </a:rPr>
-              <a:t>Third level</a:t>
-            </a:r>
-            <a:endParaRPr b="0" lang="en-US" sz="1800" spc="-1" strike="noStrike">
-              <a:solidFill>
-                <a:schemeClr val="dk1"/>
-              </a:solidFill>
-              <a:latin typeface="Calibri"/>
-            </a:endParaRPr>
-          </a:p>
-          <a:p>
-            <a:pPr lvl="3" marL="1600200" indent="-228600" defTabSz="457200">
-              <a:lnSpc>
-                <a:spcPct val="100000"/>
-              </a:lnSpc>
-              <a:spcBef>
-                <a:spcPts val="320"/>
-              </a:spcBef>
-              <a:buClr>
-                <a:srgbClr val="000000"/>
-              </a:buClr>
-              <a:buFont typeface="Arial"/>
-              <a:buChar char="–"/>
-            </a:pPr>
-            <a:r>
-              <a:rPr b="0" lang="en-US" sz="1600" spc="-1" strike="noStrike">
-                <a:solidFill>
-                  <a:schemeClr val="dk1"/>
-                </a:solidFill>
-                <a:latin typeface="Calibri"/>
-              </a:rPr>
-              <a:t>Fourth level</a:t>
-            </a:r>
-            <a:endParaRPr b="0" lang="en-US" sz="1600" spc="-1" strike="noStrike">
-              <a:solidFill>
-                <a:schemeClr val="dk1"/>
-              </a:solidFill>
-              <a:latin typeface="Calibri"/>
-            </a:endParaRPr>
-          </a:p>
-          <a:p>
-            <a:pPr lvl="4" marL="2057400" indent="-228600" defTabSz="457200">
-              <a:lnSpc>
-                <a:spcPct val="100000"/>
-              </a:lnSpc>
-              <a:spcBef>
-                <a:spcPts val="320"/>
-              </a:spcBef>
-              <a:buClr>
-                <a:srgbClr val="000000"/>
-              </a:buClr>
-              <a:buFont typeface="Arial"/>
-              <a:buChar char="»"/>
-            </a:pPr>
-            <a:r>
-              <a:rPr b="0" lang="en-US" sz="1600" spc="-1" strike="noStrike">
-                <a:solidFill>
-                  <a:schemeClr val="dk1"/>
-                </a:solidFill>
-                <a:latin typeface="Calibri"/>
-              </a:rPr>
-              <a:t>Fifth level</a:t>
-            </a:r>
-            <a:endParaRPr b="0" lang="en-US" sz="1600" spc="-1" strike="noStrike">
-              <a:solidFill>
-                <a:schemeClr val="dk1"/>
-              </a:solidFill>
-              <a:latin typeface="Calibri"/>
-            </a:endParaRPr>
-          </a:p>
-        </p:txBody>
-      </p:sp>
-      <p:sp>
-        <p:nvSpPr>
-          <p:cNvPr id="41" name="PlaceHolder 4"/>
-          <p:cNvSpPr>
-            <a:spLocks noGrp="1"/>
-          </p:cNvSpPr>
-          <p:nvPr>
-            <p:ph type="body"/>
-          </p:nvPr>
-        </p:nvSpPr>
-        <p:spPr>
-          <a:xfrm>
-            <a:off x="4645080" y="1535040"/>
-            <a:ext cx="4041360" cy="639360"/>
-          </a:xfrm>
-          <a:prstGeom prst="rect">
-            <a:avLst/>
-          </a:prstGeom>
-          <a:noFill/>
-          <a:ln w="0">
-            <a:noFill/>
-          </a:ln>
-        </p:spPr>
-        <p:txBody>
-          <a:bodyPr lIns="91440" rIns="91440" tIns="45720" bIns="45720" anchor="b">
-            <a:noAutofit/>
-          </a:bodyPr>
-          <a:p>
-            <a:pPr indent="0" defTabSz="457200">
-              <a:lnSpc>
-                <a:spcPct val="100000"/>
-              </a:lnSpc>
-              <a:spcBef>
-                <a:spcPts val="479"/>
-              </a:spcBef>
-              <a:buNone/>
-              <a:tabLst>
-                <a:tab algn="l" pos="0"/>
-              </a:tabLst>
-            </a:pPr>
-            <a:r>
-              <a:rPr b="1" lang="en-US" sz="2400" spc="-1" strike="noStrike">
-                <a:solidFill>
-                  <a:schemeClr val="dk1"/>
-                </a:solidFill>
-                <a:latin typeface="Calibri"/>
-              </a:rPr>
-              <a:t>Click to edit Master text styles</a:t>
-            </a:r>
-            <a:endParaRPr b="0" lang="en-US" sz="2400" spc="-1" strike="noStrike">
-              <a:solidFill>
-                <a:schemeClr val="dk1"/>
-              </a:solidFill>
-              <a:latin typeface="Calibri"/>
-            </a:endParaRPr>
-          </a:p>
-        </p:txBody>
-      </p:sp>
-      <p:sp>
-        <p:nvSpPr>
-          <p:cNvPr id="42" name="PlaceHolder 5"/>
-          <p:cNvSpPr>
-            <a:spLocks noGrp="1"/>
-          </p:cNvSpPr>
-          <p:nvPr>
-            <p:ph type="body"/>
-          </p:nvPr>
-        </p:nvSpPr>
-        <p:spPr>
-          <a:xfrm>
-            <a:off x="4645080" y="2174760"/>
-            <a:ext cx="4041360" cy="3951000"/>
-          </a:xfrm>
-          <a:prstGeom prst="rect">
-            <a:avLst/>
-          </a:prstGeom>
-          <a:noFill/>
-          <a:ln w="0">
-            <a:noFill/>
-          </a:ln>
-        </p:spPr>
-        <p:txBody>
-          <a:bodyPr lIns="91440" rIns="91440" tIns="45720" bIns="45720" anchor="t">
-            <a:noAutofit/>
-          </a:bodyPr>
-          <a:p>
-            <a:pPr marL="343080" indent="-343080" defTabSz="457200">
-              <a:lnSpc>
-                <a:spcPct val="100000"/>
-              </a:lnSpc>
-              <a:spcBef>
-                <a:spcPts val="479"/>
-              </a:spcBef>
-              <a:buClr>
-                <a:srgbClr val="000000"/>
-              </a:buClr>
-              <a:buFont typeface="Arial"/>
-              <a:buChar char="•"/>
-            </a:pPr>
-            <a:r>
-              <a:rPr b="0" lang="en-US" sz="2400" spc="-1" strike="noStrike">
-                <a:solidFill>
-                  <a:schemeClr val="dk1"/>
-                </a:solidFill>
-                <a:latin typeface="Calibri"/>
-              </a:rPr>
-              <a:t>Click to edit Master text styles</a:t>
-            </a:r>
-            <a:endParaRPr b="0" lang="en-US" sz="2400" spc="-1" strike="noStrike">
-              <a:solidFill>
-                <a:schemeClr val="dk1"/>
-              </a:solidFill>
-              <a:latin typeface="Calibri"/>
-            </a:endParaRPr>
-          </a:p>
-          <a:p>
-            <a:pPr lvl="1" marL="743040" indent="-285840" defTabSz="457200">
-              <a:lnSpc>
-                <a:spcPct val="100000"/>
-              </a:lnSpc>
-              <a:spcBef>
-                <a:spcPts val="400"/>
-              </a:spcBef>
-              <a:buClr>
-                <a:srgbClr val="000000"/>
-              </a:buClr>
-              <a:buFont typeface="Arial"/>
-              <a:buChar char="–"/>
-            </a:pPr>
-            <a:r>
-              <a:rPr b="0" lang="en-US" sz="2000" spc="-1" strike="noStrike">
-                <a:solidFill>
-                  <a:schemeClr val="dk1"/>
-                </a:solidFill>
-                <a:latin typeface="Calibri"/>
-              </a:rPr>
-              <a:t>Second level</a:t>
-            </a:r>
-            <a:endParaRPr b="0" lang="en-US" sz="2000" spc="-1" strike="noStrike">
-              <a:solidFill>
-                <a:schemeClr val="dk1"/>
-              </a:solidFill>
-              <a:latin typeface="Calibri"/>
-            </a:endParaRPr>
-          </a:p>
-          <a:p>
-            <a:pPr lvl="2" marL="1143000" indent="-228600" defTabSz="457200">
-              <a:lnSpc>
-                <a:spcPct val="100000"/>
-              </a:lnSpc>
-              <a:spcBef>
-                <a:spcPts val="360"/>
-              </a:spcBef>
-              <a:buClr>
-                <a:srgbClr val="000000"/>
-              </a:buClr>
-              <a:buFont typeface="Arial"/>
-              <a:buChar char="•"/>
-            </a:pPr>
-            <a:r>
-              <a:rPr b="0" lang="en-US" sz="1800" spc="-1" strike="noStrike">
-                <a:solidFill>
-                  <a:schemeClr val="dk1"/>
-                </a:solidFill>
-                <a:latin typeface="Calibri"/>
-              </a:rPr>
-              <a:t>Third level</a:t>
-            </a:r>
-            <a:endParaRPr b="0" lang="en-US" sz="1800" spc="-1" strike="noStrike">
-              <a:solidFill>
-                <a:schemeClr val="dk1"/>
-              </a:solidFill>
-              <a:latin typeface="Calibri"/>
-            </a:endParaRPr>
-          </a:p>
-          <a:p>
-            <a:pPr lvl="3" marL="1600200" indent="-228600" defTabSz="457200">
-              <a:lnSpc>
-                <a:spcPct val="100000"/>
-              </a:lnSpc>
-              <a:spcBef>
-                <a:spcPts val="320"/>
-              </a:spcBef>
-              <a:buClr>
-                <a:srgbClr val="000000"/>
-              </a:buClr>
-              <a:buFont typeface="Arial"/>
-              <a:buChar char="–"/>
-            </a:pPr>
-            <a:r>
-              <a:rPr b="0" lang="en-US" sz="1600" spc="-1" strike="noStrike">
-                <a:solidFill>
-                  <a:schemeClr val="dk1"/>
-                </a:solidFill>
-                <a:latin typeface="Calibri"/>
-              </a:rPr>
-              <a:t>Fourth level</a:t>
-            </a:r>
-            <a:endParaRPr b="0" lang="en-US" sz="1600" spc="-1" strike="noStrike">
-              <a:solidFill>
-                <a:schemeClr val="dk1"/>
-              </a:solidFill>
-              <a:latin typeface="Calibri"/>
-            </a:endParaRPr>
-          </a:p>
-          <a:p>
-            <a:pPr lvl="4" marL="2057400" indent="-228600" defTabSz="457200">
-              <a:lnSpc>
-                <a:spcPct val="100000"/>
-              </a:lnSpc>
-              <a:spcBef>
-                <a:spcPts val="320"/>
-              </a:spcBef>
-              <a:buClr>
-                <a:srgbClr val="000000"/>
-              </a:buClr>
-              <a:buFont typeface="Arial"/>
-              <a:buChar char="»"/>
-            </a:pPr>
-            <a:r>
-              <a:rPr b="0" lang="en-US" sz="1600" spc="-1" strike="noStrike">
-                <a:solidFill>
-                  <a:schemeClr val="dk1"/>
-                </a:solidFill>
-                <a:latin typeface="Calibri"/>
-              </a:rPr>
-              <a:t>Fifth level</a:t>
-            </a:r>
-            <a:endParaRPr b="0" lang="en-US" sz="1600" spc="-1" strike="noStrike">
-              <a:solidFill>
-                <a:schemeClr val="dk1"/>
-              </a:solidFill>
-              <a:latin typeface="Calibri"/>
-            </a:endParaRPr>
-          </a:p>
-        </p:txBody>
-      </p:sp>
-      <p:sp>
-        <p:nvSpPr>
-          <p:cNvPr id="43" name="PlaceHolder 6"/>
-          <p:cNvSpPr>
-            <a:spLocks noGrp="1"/>
-          </p:cNvSpPr>
-          <p:nvPr>
-            <p:ph type="dt" idx="19"/>
-          </p:nvPr>
-        </p:nvSpPr>
-        <p:spPr>
-          <a:xfrm>
-            <a:off x="457200" y="6356520"/>
-            <a:ext cx="2133360" cy="364680"/>
-          </a:xfrm>
-          <a:prstGeom prst="rect">
-            <a:avLst/>
-          </a:prstGeom>
-          <a:noFill/>
-          <a:ln w="0">
-            <a:noFill/>
-          </a:ln>
-        </p:spPr>
-        <p:txBody>
           <a:bodyPr lIns="91440" rIns="91440" tIns="45720" bIns="45720" anchor="ctr">
             <a:noAutofit/>
           </a:bodyPr>
           <a:lstStyle>
-            <a:lvl1pPr indent="0" defTabSz="457200">
-              <a:lnSpc>
-                <a:spcPct val="100000"/>
-              </a:lnSpc>
-              <a:buNone/>
-              <a:defRPr b="0" lang="en-US" sz="1200" spc="-1" strike="noStrike">
-                <a:solidFill>
-                  <a:schemeClr val="dk1">
-                    <a:tint val="75000"/>
-                  </a:schemeClr>
-                </a:solidFill>
-                <a:latin typeface="Calibri"/>
-              </a:defRPr>
-            </a:lvl1pPr>
-          </a:lstStyle>
-          <a:p>
-            <a:pPr indent="0" defTabSz="457200">
-              <a:lnSpc>
-                <a:spcPct val="100000"/>
-              </a:lnSpc>
-              <a:buNone/>
-            </a:pPr>
-            <a:r>
-              <a:rPr b="0" lang="en-US" sz="1200" spc="-1" strike="noStrike">
-                <a:solidFill>
-                  <a:schemeClr val="dk1">
-                    <a:tint val="75000"/>
-                  </a:schemeClr>
-                </a:solidFill>
-                <a:latin typeface="Calibri"/>
-              </a:rPr>
-              <a:t>&lt;дата/час&gt;</a:t>
-            </a:r>
-            <a:endParaRPr b="0" lang="bg-BG" sz="1200" spc="-1" strike="noStrike">
-              <a:solidFill>
-                <a:srgbClr val="000000"/>
-              </a:solidFill>
-              <a:latin typeface="Times New Roman"/>
-            </a:endParaRPr>
-          </a:p>
-        </p:txBody>
-      </p:sp>
-      <p:sp>
-        <p:nvSpPr>
-          <p:cNvPr id="44" name="PlaceHolder 7"/>
-          <p:cNvSpPr>
-            <a:spLocks noGrp="1"/>
-          </p:cNvSpPr>
-          <p:nvPr>
-            <p:ph type="ftr" idx="20"/>
-          </p:nvPr>
-        </p:nvSpPr>
-        <p:spPr>
-          <a:xfrm>
-            <a:off x="3124080" y="6356520"/>
-            <a:ext cx="2895120" cy="364680"/>
-          </a:xfrm>
-          <a:prstGeom prst="rect">
-            <a:avLst/>
-          </a:prstGeom>
-          <a:noFill/>
-          <a:ln w="0">
-            <a:noFill/>
-          </a:ln>
-        </p:spPr>
-        <p:txBody>
-          <a:bodyPr lIns="91440" rIns="91440" tIns="45720" bIns="45720" anchor="ctr">
-            <a:noAutofit/>
-          </a:bodyPr>
-          <a:lstStyle>
-            <a:lvl1pPr indent="0" algn="ctr">
+            <a:lvl1pPr indent="0">
               <a:buNone/>
               <a:defRPr b="0" lang="bg-BG" sz="1400" spc="-1" strike="noStrike">
                 <a:solidFill>
@@ -6450,7 +5091,7 @@
             </a:lvl1pPr>
           </a:lstStyle>
           <a:p>
-            <a:pPr indent="0" algn="ctr">
+            <a:pPr indent="0">
               <a:buNone/>
             </a:pPr>
             <a:r>
@@ -6460,79 +5101,9 @@
                 </a:solidFill>
                 <a:latin typeface="Times New Roman"/>
               </a:rPr>
-              <a:t>&lt;долен колонтитул&gt;</a:t>
+              <a:t>&lt;дата/час&gt;</a:t>
             </a:r>
             <a:endParaRPr b="0" lang="bg-BG" sz="1400" spc="-1" strike="noStrike">
-              <a:solidFill>
-                <a:srgbClr val="000000"/>
-              </a:solidFill>
-              <a:latin typeface="Times New Roman"/>
-            </a:endParaRPr>
-          </a:p>
-        </p:txBody>
-      </p:sp>
-      <p:sp>
-        <p:nvSpPr>
-          <p:cNvPr id="45" name="PlaceHolder 8"/>
-          <p:cNvSpPr>
-            <a:spLocks noGrp="1"/>
-          </p:cNvSpPr>
-          <p:nvPr>
-            <p:ph type="sldNum" idx="21"/>
-          </p:nvPr>
-        </p:nvSpPr>
-        <p:spPr>
-          <a:xfrm>
-            <a:off x="6553080" y="6356520"/>
-            <a:ext cx="2133360" cy="364680"/>
-          </a:xfrm>
-          <a:prstGeom prst="rect">
-            <a:avLst/>
-          </a:prstGeom>
-          <a:noFill/>
-          <a:ln w="0">
-            <a:noFill/>
-          </a:ln>
-        </p:spPr>
-        <p:txBody>
-          <a:bodyPr lIns="91440" rIns="91440" tIns="45720" bIns="45720" anchor="ctr">
-            <a:noAutofit/>
-          </a:bodyPr>
-          <a:lstStyle>
-            <a:lvl1pPr indent="0" algn="r" defTabSz="457200">
-              <a:lnSpc>
-                <a:spcPct val="100000"/>
-              </a:lnSpc>
-              <a:buNone/>
-              <a:defRPr b="0" lang="en-US" sz="1200" spc="-1" strike="noStrike">
-                <a:solidFill>
-                  <a:schemeClr val="dk1">
-                    <a:tint val="75000"/>
-                  </a:schemeClr>
-                </a:solidFill>
-                <a:latin typeface="Calibri"/>
-              </a:defRPr>
-            </a:lvl1pPr>
-          </a:lstStyle>
-          <a:p>
-            <a:pPr indent="0" algn="r" defTabSz="457200">
-              <a:lnSpc>
-                <a:spcPct val="100000"/>
-              </a:lnSpc>
-              <a:buNone/>
-            </a:pPr>
-            <a:fld id="{1726ED49-4514-4DC5-BCEB-10771D774F99}" type="slidenum">
-              <a:rPr b="0" lang="en-US" sz="1200" spc="-1" strike="noStrike">
-                <a:solidFill>
-                  <a:schemeClr val="dk1">
-                    <a:tint val="75000"/>
-                  </a:schemeClr>
-                </a:solidFill>
-                <a:latin typeface="Calibri"/>
-              </a:rPr>
-              <a:t>&lt;число&gt;</a:t>
-            </a:fld>
-            <a:endParaRPr b="0" lang="bg-BG" sz="1200" spc="-1" strike="noStrike">
               <a:solidFill>
                 <a:srgbClr val="000000"/>
               </a:solidFill>
@@ -6576,7 +5147,7 @@
       </p:grpSpPr>
       <p:sp>
         <p:nvSpPr>
-          <p:cNvPr id="46" name="PlaceHolder 1"/>
+          <p:cNvPr id="34" name="PlaceHolder 1"/>
           <p:cNvSpPr>
             <a:spLocks noGrp="1"/>
           </p:cNvSpPr>
@@ -6586,8 +5157,8 @@
         </p:nvSpPr>
         <p:spPr>
           <a:xfrm>
-            <a:off x="457200" y="274680"/>
-            <a:ext cx="8229240" cy="1142640"/>
+            <a:off x="456840" y="-186120"/>
+            <a:ext cx="8228880" cy="2063520"/>
           </a:xfrm>
           <a:prstGeom prst="rect">
             <a:avLst/>
@@ -6598,48 +5169,45 @@
           </a:ln>
         </p:spPr>
         <p:txBody>
-          <a:bodyPr lIns="91440" rIns="91440" tIns="45720" bIns="45720" anchor="ctr">
+          <a:bodyPr lIns="0" rIns="0" tIns="0" bIns="0" anchor="ctr">
             <a:noAutofit/>
           </a:bodyPr>
           <a:p>
-            <a:pPr indent="0" algn="ctr" defTabSz="457200">
-              <a:lnSpc>
-                <a:spcPct val="100000"/>
-              </a:lnSpc>
-              <a:buNone/>
-            </a:pPr>
-            <a:r>
-              <a:rPr b="0" lang="en-US" sz="4400" spc="-1" strike="noStrike">
-                <a:solidFill>
-                  <a:schemeClr val="dk1"/>
-                </a:solidFill>
-                <a:latin typeface="Calibri"/>
-              </a:rPr>
-              <a:t>Click to edit Master title style</a:t>
-            </a:r>
-            <a:endParaRPr b="0" lang="en-US" sz="4400" spc="-1" strike="noStrike">
-              <a:solidFill>
-                <a:schemeClr val="dk1"/>
-              </a:solidFill>
-              <a:latin typeface="Calibri"/>
-            </a:endParaRPr>
-          </a:p>
-        </p:txBody>
-      </p:sp>
-      <p:sp>
-        <p:nvSpPr>
-          <p:cNvPr id="47" name="PlaceHolder 2"/>
-          <p:cNvSpPr>
-            <a:spLocks noGrp="1"/>
-          </p:cNvSpPr>
-          <p:nvPr>
-            <p:ph type="dt" idx="22"/>
+            <a:pPr indent="0">
+              <a:buNone/>
+            </a:pPr>
+            <a:r>
+              <a:rPr b="0" lang="bg-BG" sz="1800" spc="-1" strike="noStrike">
+                <a:solidFill>
+                  <a:srgbClr val="000000"/>
+                </a:solidFill>
+                <a:latin typeface="Arial"/>
+              </a:rPr>
+              <a:t>Щракнете, за да редактирате формата на заглавието</a:t>
+            </a:r>
+            <a:endParaRPr b="0" lang="bg-BG" sz="1800" spc="-1" strike="noStrike">
+              <a:solidFill>
+                <a:srgbClr val="000000"/>
+              </a:solidFill>
+              <a:latin typeface="Arial"/>
+            </a:endParaRPr>
+          </a:p>
+        </p:txBody>
+      </p:sp>
+      <p:sp>
+        <p:nvSpPr>
+          <p:cNvPr id="35" name="PlaceHolder 2"/>
+          <p:cNvSpPr>
+            <a:spLocks noGrp="1"/>
+          </p:cNvSpPr>
+          <p:nvPr>
+            <p:ph type="ftr" idx="22"/>
           </p:nvPr>
         </p:nvSpPr>
         <p:spPr>
           <a:xfrm>
-            <a:off x="457200" y="6356520"/>
-            <a:ext cx="2133360" cy="364680"/>
+            <a:off x="3124080" y="6356520"/>
+            <a:ext cx="2894760" cy="364320"/>
           </a:xfrm>
           <a:prstGeom prst="rect">
             <a:avLst/>
@@ -6654,40 +5222,42 @@
             <a:noAutofit/>
           </a:bodyPr>
           <a:lstStyle>
-            <a:lvl1pPr indent="0" defTabSz="457200">
-              <a:lnSpc>
-                <a:spcPct val="100000"/>
-              </a:lnSpc>
-              <a:buNone/>
-              <a:defRPr b="0" lang="en-US" sz="1200" spc="-1" strike="noStrike">
-                <a:solidFill>
-                  <a:schemeClr val="dk1">
-                    <a:tint val="75000"/>
-                  </a:schemeClr>
-                </a:solidFill>
-                <a:latin typeface="Calibri"/>
+            <a:lvl1pPr indent="0" algn="ctr">
+              <a:lnSpc>
+                <a:spcPct val="100000"/>
+              </a:lnSpc>
+              <a:buNone/>
+              <a:tabLst>
+                <a:tab algn="l" pos="0"/>
+              </a:tabLst>
+              <a:defRPr b="0" lang="bg-BG" sz="1400" spc="-1" strike="noStrike">
+                <a:solidFill>
+                  <a:srgbClr val="000000"/>
+                </a:solidFill>
+                <a:latin typeface="Times New Roman"/>
               </a:defRPr>
             </a:lvl1pPr>
           </a:lstStyle>
           <a:p>
-            <a:pPr indent="0" defTabSz="457200">
-              <a:lnSpc>
-                <a:spcPct val="100000"/>
-              </a:lnSpc>
-              <a:buNone/>
-            </a:pPr>
-            <a:r>
-              <a:rPr b="0" lang="en-US" sz="1200" spc="-1" strike="noStrike">
-                <a:solidFill>
-                  <a:schemeClr val="dk1">
-                    <a:tint val="75000"/>
-                  </a:schemeClr>
-                </a:solidFill>
-                <a:latin typeface="Calibri"/>
-              </a:rPr>
-              <a:t>&lt;дата/час&gt;</a:t>
-            </a:r>
-            <a:endParaRPr b="0" lang="bg-BG" sz="1200" spc="-1" strike="noStrike">
+            <a:pPr indent="0" algn="ctr">
+              <a:lnSpc>
+                <a:spcPct val="100000"/>
+              </a:lnSpc>
+              <a:buNone/>
+              <a:tabLst>
+                <a:tab algn="l" pos="0"/>
+              </a:tabLst>
+            </a:pPr>
+            <a:r>
+              <a:rPr b="0" lang="bg-BG" sz="1400" spc="-1" strike="noStrike">
+                <a:solidFill>
+                  <a:srgbClr val="000000"/>
+                </a:solidFill>
+                <a:latin typeface="Times New Roman"/>
+              </a:rPr>
+              <a:t>&lt;долен колонтитул&gt;</a:t>
+            </a:r>
+            <a:endParaRPr b="0" lang="bg-BG" sz="1400" spc="-1" strike="noStrike">
               <a:solidFill>
                 <a:srgbClr val="000000"/>
               </a:solidFill>
@@ -6698,18 +5268,18 @@
       </p:sp>
       <p:sp>
         <p:nvSpPr>
-          <p:cNvPr id="48" name="PlaceHolder 3"/>
-          <p:cNvSpPr>
-            <a:spLocks noGrp="1"/>
-          </p:cNvSpPr>
-          <p:nvPr>
-            <p:ph type="ftr" idx="23"/>
+          <p:cNvPr id="36" name="PlaceHolder 3"/>
+          <p:cNvSpPr>
+            <a:spLocks noGrp="1"/>
+          </p:cNvSpPr>
+          <p:nvPr>
+            <p:ph type="sldNum" idx="23"/>
           </p:nvPr>
         </p:nvSpPr>
         <p:spPr>
           <a:xfrm>
-            <a:off x="3124080" y="6356520"/>
-            <a:ext cx="2895120" cy="364680"/>
+            <a:off x="6553080" y="6356520"/>
+            <a:ext cx="2133000" cy="364320"/>
           </a:xfrm>
           <a:prstGeom prst="rect">
             <a:avLst/>
@@ -6724,30 +5294,46 @@
             <a:noAutofit/>
           </a:bodyPr>
           <a:lstStyle>
-            <a:lvl1pPr indent="0" algn="ctr">
-              <a:buNone/>
-              <a:defRPr b="0" lang="bg-BG" sz="1400" spc="-1" strike="noStrike">
-                <a:solidFill>
-                  <a:srgbClr val="000000"/>
-                </a:solidFill>
-                <a:latin typeface="Times New Roman"/>
+            <a:lvl1pPr indent="0" algn="r" defTabSz="457200">
+              <a:lnSpc>
+                <a:spcPct val="100000"/>
+              </a:lnSpc>
+              <a:buNone/>
+              <a:tabLst>
+                <a:tab algn="l" pos="0"/>
+              </a:tabLst>
+              <a:defRPr b="0" lang="en-US" sz="1200" spc="-1" strike="noStrike">
+                <a:solidFill>
+                  <a:schemeClr val="dk1">
+                    <a:tint val="75000"/>
+                  </a:schemeClr>
+                </a:solidFill>
+                <a:latin typeface="Calibri"/>
               </a:defRPr>
             </a:lvl1pPr>
           </a:lstStyle>
           <a:p>
-            <a:pPr indent="0" algn="ctr">
-              <a:buNone/>
-            </a:pPr>
-            <a:r>
-              <a:rPr b="0" lang="bg-BG" sz="1400" spc="-1" strike="noStrike">
-                <a:solidFill>
-                  <a:srgbClr val="000000"/>
-                </a:solidFill>
-                <a:latin typeface="Times New Roman"/>
-              </a:rPr>
-              <a:t>&lt;долен колонтитул&gt;</a:t>
-            </a:r>
-            <a:endParaRPr b="0" lang="bg-BG" sz="1400" spc="-1" strike="noStrike">
+            <a:pPr indent="0" algn="r" defTabSz="457200">
+              <a:lnSpc>
+                <a:spcPct val="100000"/>
+              </a:lnSpc>
+              <a:buNone/>
+              <a:tabLst>
+                <a:tab algn="l" pos="0"/>
+              </a:tabLst>
+            </a:pPr>
+            <a:fld id="{06EC174F-689B-42C4-BA2C-1BD64EA409EB}" type="slidenum">
+              <a:rPr b="0" lang="en-US" sz="1200" spc="-1" strike="noStrike">
+                <a:solidFill>
+                  <a:schemeClr val="dk1">
+                    <a:tint val="75000"/>
+                  </a:schemeClr>
+                </a:solidFill>
+                <a:latin typeface="Calibri"/>
+              </a:rPr>
+              <a:t>&lt;число&gt;</a:t>
+            </a:fld>
+            <a:endParaRPr b="0" lang="bg-BG" sz="1200" spc="-1" strike="noStrike">
               <a:solidFill>
                 <a:srgbClr val="000000"/>
               </a:solidFill>
@@ -6758,18 +5344,18 @@
       </p:sp>
       <p:sp>
         <p:nvSpPr>
-          <p:cNvPr id="49" name="PlaceHolder 4"/>
-          <p:cNvSpPr>
-            <a:spLocks noGrp="1"/>
-          </p:cNvSpPr>
-          <p:nvPr>
-            <p:ph type="sldNum" idx="24"/>
+          <p:cNvPr id="37" name="PlaceHolder 4"/>
+          <p:cNvSpPr>
+            <a:spLocks noGrp="1"/>
+          </p:cNvSpPr>
+          <p:nvPr>
+            <p:ph type="dt" idx="24"/>
           </p:nvPr>
         </p:nvSpPr>
         <p:spPr>
           <a:xfrm>
-            <a:off x="6553080" y="6356520"/>
-            <a:ext cx="2133360" cy="364680"/>
+            <a:off x="457200" y="6356520"/>
+            <a:ext cx="2133000" cy="364320"/>
           </a:xfrm>
           <a:prstGeom prst="rect">
             <a:avLst/>
@@ -6784,40 +5370,30 @@
             <a:noAutofit/>
           </a:bodyPr>
           <a:lstStyle>
-            <a:lvl1pPr indent="0" algn="r" defTabSz="457200">
-              <a:lnSpc>
-                <a:spcPct val="100000"/>
-              </a:lnSpc>
-              <a:buNone/>
-              <a:defRPr b="0" lang="en-US" sz="1200" spc="-1" strike="noStrike">
-                <a:solidFill>
-                  <a:schemeClr val="dk1">
-                    <a:tint val="75000"/>
-                  </a:schemeClr>
-                </a:solidFill>
-                <a:latin typeface="Calibri"/>
+            <a:lvl1pPr indent="0">
+              <a:buNone/>
+              <a:defRPr b="0" lang="bg-BG" sz="1400" spc="-1" strike="noStrike">
+                <a:solidFill>
+                  <a:srgbClr val="000000"/>
+                </a:solidFill>
+                <a:latin typeface="Times New Roman"/>
               </a:defRPr>
             </a:lvl1pPr>
           </a:lstStyle>
           <a:p>
-            <a:pPr indent="0" algn="r" defTabSz="457200">
-              <a:lnSpc>
-                <a:spcPct val="100000"/>
-              </a:lnSpc>
-              <a:buNone/>
-            </a:pPr>
-            <a:fld id="{2C2F5227-2C24-4286-A6F3-72EEBC4C46EC}" type="slidenum">
-              <a:rPr b="0" lang="en-US" sz="1200" spc="-1" strike="noStrike">
-                <a:solidFill>
-                  <a:schemeClr val="dk1">
-                    <a:tint val="75000"/>
-                  </a:schemeClr>
-                </a:solidFill>
-                <a:latin typeface="Calibri"/>
-              </a:rPr>
-              <a:t>&lt;число&gt;</a:t>
-            </a:fld>
-            <a:endParaRPr b="0" lang="bg-BG" sz="1200" spc="-1" strike="noStrike">
+            <a:pPr indent="0">
+              <a:buNone/>
+            </a:pPr>
+            <a:r>
+              <a:rPr b="0" lang="bg-BG" sz="1400" spc="-1" strike="noStrike">
+                <a:solidFill>
+                  <a:srgbClr val="000000"/>
+                </a:solidFill>
+                <a:latin typeface="Times New Roman"/>
+              </a:rPr>
+              <a:t>&lt;дата/час&gt;</a:t>
+            </a:r>
+            <a:endParaRPr b="0" lang="bg-BG" sz="1400" spc="-1" strike="noStrike">
               <a:solidFill>
                 <a:srgbClr val="000000"/>
               </a:solidFill>
@@ -6861,18 +5437,18 @@
       </p:grpSpPr>
       <p:sp>
         <p:nvSpPr>
-          <p:cNvPr id="51" name="PlaceHolder 1"/>
-          <p:cNvSpPr>
-            <a:spLocks noGrp="1"/>
-          </p:cNvSpPr>
-          <p:nvPr>
-            <p:ph type="dt" idx="25"/>
+          <p:cNvPr id="39" name="PlaceHolder 1"/>
+          <p:cNvSpPr>
+            <a:spLocks noGrp="1"/>
+          </p:cNvSpPr>
+          <p:nvPr>
+            <p:ph type="ftr" idx="25"/>
           </p:nvPr>
         </p:nvSpPr>
         <p:spPr>
           <a:xfrm>
-            <a:off x="457200" y="6356520"/>
-            <a:ext cx="2133360" cy="364680"/>
+            <a:off x="3124080" y="6356520"/>
+            <a:ext cx="2894760" cy="364320"/>
           </a:xfrm>
           <a:prstGeom prst="rect">
             <a:avLst/>
@@ -6887,40 +5463,42 @@
             <a:noAutofit/>
           </a:bodyPr>
           <a:lstStyle>
-            <a:lvl1pPr indent="0" defTabSz="457200">
-              <a:lnSpc>
-                <a:spcPct val="100000"/>
-              </a:lnSpc>
-              <a:buNone/>
-              <a:defRPr b="0" lang="en-US" sz="1200" spc="-1" strike="noStrike">
-                <a:solidFill>
-                  <a:schemeClr val="dk1">
-                    <a:tint val="75000"/>
-                  </a:schemeClr>
-                </a:solidFill>
-                <a:latin typeface="Calibri"/>
+            <a:lvl1pPr indent="0" algn="ctr">
+              <a:lnSpc>
+                <a:spcPct val="100000"/>
+              </a:lnSpc>
+              <a:buNone/>
+              <a:tabLst>
+                <a:tab algn="l" pos="0"/>
+              </a:tabLst>
+              <a:defRPr b="0" lang="bg-BG" sz="1400" spc="-1" strike="noStrike">
+                <a:solidFill>
+                  <a:srgbClr val="000000"/>
+                </a:solidFill>
+                <a:latin typeface="Times New Roman"/>
               </a:defRPr>
             </a:lvl1pPr>
           </a:lstStyle>
           <a:p>
-            <a:pPr indent="0" defTabSz="457200">
-              <a:lnSpc>
-                <a:spcPct val="100000"/>
-              </a:lnSpc>
-              <a:buNone/>
-            </a:pPr>
-            <a:r>
-              <a:rPr b="0" lang="en-US" sz="1200" spc="-1" strike="noStrike">
-                <a:solidFill>
-                  <a:schemeClr val="dk1">
-                    <a:tint val="75000"/>
-                  </a:schemeClr>
-                </a:solidFill>
-                <a:latin typeface="Calibri"/>
-              </a:rPr>
-              <a:t>&lt;дата/час&gt;</a:t>
-            </a:r>
-            <a:endParaRPr b="0" lang="bg-BG" sz="1200" spc="-1" strike="noStrike">
+            <a:pPr indent="0" algn="ctr">
+              <a:lnSpc>
+                <a:spcPct val="100000"/>
+              </a:lnSpc>
+              <a:buNone/>
+              <a:tabLst>
+                <a:tab algn="l" pos="0"/>
+              </a:tabLst>
+            </a:pPr>
+            <a:r>
+              <a:rPr b="0" lang="bg-BG" sz="1400" spc="-1" strike="noStrike">
+                <a:solidFill>
+                  <a:srgbClr val="000000"/>
+                </a:solidFill>
+                <a:latin typeface="Times New Roman"/>
+              </a:rPr>
+              <a:t>&lt;долен колонтитул&gt;</a:t>
+            </a:r>
+            <a:endParaRPr b="0" lang="bg-BG" sz="1400" spc="-1" strike="noStrike">
               <a:solidFill>
                 <a:srgbClr val="000000"/>
               </a:solidFill>
@@ -6931,18 +5509,18 @@
       </p:sp>
       <p:sp>
         <p:nvSpPr>
-          <p:cNvPr id="52" name="PlaceHolder 2"/>
-          <p:cNvSpPr>
-            <a:spLocks noGrp="1"/>
-          </p:cNvSpPr>
-          <p:nvPr>
-            <p:ph type="ftr" idx="26"/>
+          <p:cNvPr id="40" name="PlaceHolder 2"/>
+          <p:cNvSpPr>
+            <a:spLocks noGrp="1"/>
+          </p:cNvSpPr>
+          <p:nvPr>
+            <p:ph type="sldNum" idx="26"/>
           </p:nvPr>
         </p:nvSpPr>
         <p:spPr>
           <a:xfrm>
-            <a:off x="3124080" y="6356520"/>
-            <a:ext cx="2895120" cy="364680"/>
+            <a:off x="6553080" y="6356520"/>
+            <a:ext cx="2133000" cy="364320"/>
           </a:xfrm>
           <a:prstGeom prst="rect">
             <a:avLst/>
@@ -6957,30 +5535,46 @@
             <a:noAutofit/>
           </a:bodyPr>
           <a:lstStyle>
-            <a:lvl1pPr indent="0" algn="ctr">
-              <a:buNone/>
-              <a:defRPr b="0" lang="bg-BG" sz="1400" spc="-1" strike="noStrike">
-                <a:solidFill>
-                  <a:srgbClr val="000000"/>
-                </a:solidFill>
-                <a:latin typeface="Times New Roman"/>
+            <a:lvl1pPr indent="0" algn="r" defTabSz="457200">
+              <a:lnSpc>
+                <a:spcPct val="100000"/>
+              </a:lnSpc>
+              <a:buNone/>
+              <a:tabLst>
+                <a:tab algn="l" pos="0"/>
+              </a:tabLst>
+              <a:defRPr b="0" lang="en-US" sz="1200" spc="-1" strike="noStrike">
+                <a:solidFill>
+                  <a:schemeClr val="dk1">
+                    <a:tint val="75000"/>
+                  </a:schemeClr>
+                </a:solidFill>
+                <a:latin typeface="Calibri"/>
               </a:defRPr>
             </a:lvl1pPr>
           </a:lstStyle>
           <a:p>
-            <a:pPr indent="0" algn="ctr">
-              <a:buNone/>
-            </a:pPr>
-            <a:r>
-              <a:rPr b="0" lang="bg-BG" sz="1400" spc="-1" strike="noStrike">
-                <a:solidFill>
-                  <a:srgbClr val="000000"/>
-                </a:solidFill>
-                <a:latin typeface="Times New Roman"/>
-              </a:rPr>
-              <a:t>&lt;долен колонтитул&gt;</a:t>
-            </a:r>
-            <a:endParaRPr b="0" lang="bg-BG" sz="1400" spc="-1" strike="noStrike">
+            <a:pPr indent="0" algn="r" defTabSz="457200">
+              <a:lnSpc>
+                <a:spcPct val="100000"/>
+              </a:lnSpc>
+              <a:buNone/>
+              <a:tabLst>
+                <a:tab algn="l" pos="0"/>
+              </a:tabLst>
+            </a:pPr>
+            <a:fld id="{C493098F-E3AF-49CE-B38F-54CB5880C20F}" type="slidenum">
+              <a:rPr b="0" lang="en-US" sz="1200" spc="-1" strike="noStrike">
+                <a:solidFill>
+                  <a:schemeClr val="dk1">
+                    <a:tint val="75000"/>
+                  </a:schemeClr>
+                </a:solidFill>
+                <a:latin typeface="Calibri"/>
+              </a:rPr>
+              <a:t>&lt;число&gt;</a:t>
+            </a:fld>
+            <a:endParaRPr b="0" lang="bg-BG" sz="1200" spc="-1" strike="noStrike">
               <a:solidFill>
                 <a:srgbClr val="000000"/>
               </a:solidFill>
@@ -6991,18 +5585,18 @@
       </p:sp>
       <p:sp>
         <p:nvSpPr>
-          <p:cNvPr id="53" name="PlaceHolder 3"/>
-          <p:cNvSpPr>
-            <a:spLocks noGrp="1"/>
-          </p:cNvSpPr>
-          <p:nvPr>
-            <p:ph type="sldNum" idx="27"/>
+          <p:cNvPr id="41" name="PlaceHolder 3"/>
+          <p:cNvSpPr>
+            <a:spLocks noGrp="1"/>
+          </p:cNvSpPr>
+          <p:nvPr>
+            <p:ph type="dt" idx="27"/>
           </p:nvPr>
         </p:nvSpPr>
         <p:spPr>
           <a:xfrm>
-            <a:off x="6553080" y="6356520"/>
-            <a:ext cx="2133360" cy="364680"/>
+            <a:off x="457200" y="6356520"/>
+            <a:ext cx="2133000" cy="364320"/>
           </a:xfrm>
           <a:prstGeom prst="rect">
             <a:avLst/>
@@ -7017,40 +5611,30 @@
             <a:noAutofit/>
           </a:bodyPr>
           <a:lstStyle>
-            <a:lvl1pPr indent="0" algn="r" defTabSz="457200">
-              <a:lnSpc>
-                <a:spcPct val="100000"/>
-              </a:lnSpc>
-              <a:buNone/>
-              <a:defRPr b="0" lang="en-US" sz="1200" spc="-1" strike="noStrike">
-                <a:solidFill>
-                  <a:schemeClr val="dk1">
-                    <a:tint val="75000"/>
-                  </a:schemeClr>
-                </a:solidFill>
-                <a:latin typeface="Calibri"/>
+            <a:lvl1pPr indent="0">
+              <a:buNone/>
+              <a:defRPr b="0" lang="bg-BG" sz="1400" spc="-1" strike="noStrike">
+                <a:solidFill>
+                  <a:srgbClr val="000000"/>
+                </a:solidFill>
+                <a:latin typeface="Times New Roman"/>
               </a:defRPr>
             </a:lvl1pPr>
           </a:lstStyle>
           <a:p>
-            <a:pPr indent="0" algn="r" defTabSz="457200">
-              <a:lnSpc>
-                <a:spcPct val="100000"/>
-              </a:lnSpc>
-              <a:buNone/>
-            </a:pPr>
-            <a:fld id="{A7171A42-9C47-46E1-BA8B-C640BA60D925}" type="slidenum">
-              <a:rPr b="0" lang="en-US" sz="1200" spc="-1" strike="noStrike">
-                <a:solidFill>
-                  <a:schemeClr val="dk1">
-                    <a:tint val="75000"/>
-                  </a:schemeClr>
-                </a:solidFill>
-                <a:latin typeface="Calibri"/>
-              </a:rPr>
-              <a:t>&lt;число&gt;</a:t>
-            </a:fld>
-            <a:endParaRPr b="0" lang="bg-BG" sz="1200" spc="-1" strike="noStrike">
+            <a:pPr indent="0">
+              <a:buNone/>
+            </a:pPr>
+            <a:r>
+              <a:rPr b="0" lang="bg-BG" sz="1400" spc="-1" strike="noStrike">
+                <a:solidFill>
+                  <a:srgbClr val="000000"/>
+                </a:solidFill>
+                <a:latin typeface="Times New Roman"/>
+              </a:rPr>
+              <a:t>&lt;дата/час&gt;</a:t>
+            </a:r>
+            <a:endParaRPr b="0" lang="bg-BG" sz="1400" spc="-1" strike="noStrike">
               <a:solidFill>
                 <a:srgbClr val="000000"/>
               </a:solidFill>
@@ -7087,7 +5671,7 @@
       </p:grpSpPr>
       <p:sp>
         <p:nvSpPr>
-          <p:cNvPr id="73" name="PlaceHolder 1"/>
+          <p:cNvPr id="58" name="PlaceHolder 1"/>
           <p:cNvSpPr>
             <a:spLocks noGrp="1"/>
           </p:cNvSpPr>
@@ -7098,7 +5682,7 @@
         <p:spPr>
           <a:xfrm>
             <a:off x="685800" y="2130480"/>
-            <a:ext cx="7772040" cy="1469520"/>
+            <a:ext cx="7771680" cy="1469160"/>
           </a:xfrm>
           <a:prstGeom prst="rect">
             <a:avLst/>
@@ -7118,6 +5702,9 @@
                 <a:spcPct val="100000"/>
               </a:lnSpc>
               <a:buNone/>
+              <a:tabLst>
+                <a:tab algn="l" pos="0"/>
+              </a:tabLst>
             </a:pPr>
             <a:r>
               <a:rPr b="0" lang="bg-BG" sz="4400" spc="-1" strike="noStrike">
@@ -7139,7 +5726,7 @@
       </p:sp>
       <p:sp>
         <p:nvSpPr>
-          <p:cNvPr id="74" name="PlaceHolder 2"/>
+          <p:cNvPr id="59" name="PlaceHolder 2"/>
           <p:cNvSpPr>
             <a:spLocks noGrp="1"/>
           </p:cNvSpPr>
@@ -7150,7 +5737,7 @@
         <p:spPr>
           <a:xfrm>
             <a:off x="1371600" y="3886200"/>
-            <a:ext cx="6400440" cy="1752120"/>
+            <a:ext cx="6400080" cy="1751760"/>
           </a:xfrm>
           <a:prstGeom prst="rect">
             <a:avLst/>
@@ -7239,17 +5826,6 @@
                 <a:tab algn="l" pos="0"/>
               </a:tabLst>
             </a:pPr>
-            <a:r>
-              <a:rPr b="0" lang="bg-BG" sz="3200" spc="-1" strike="noStrike">
-                <a:solidFill>
-                  <a:schemeClr val="dk1">
-                    <a:tint val="75000"/>
-                  </a:schemeClr>
-                </a:solidFill>
-                <a:latin typeface="Calibri"/>
-              </a:rPr>
-              <a:t>February 2024</a:t>
-            </a:r>
             <a:endParaRPr b="0" lang="bg-BG" sz="3200" spc="-1" strike="noStrike">
               <a:solidFill>
                 <a:srgbClr val="000000"/>
@@ -7291,7 +5867,7 @@
       </p:grpSpPr>
       <p:sp>
         <p:nvSpPr>
-          <p:cNvPr id="91" name="PlaceHolder 1"/>
+          <p:cNvPr id="76" name="PlaceHolder 1"/>
           <p:cNvSpPr>
             <a:spLocks noGrp="1"/>
           </p:cNvSpPr>
@@ -7302,7 +5878,7 @@
         <p:spPr>
           <a:xfrm>
             <a:off x="457200" y="274680"/>
-            <a:ext cx="8229240" cy="1142640"/>
+            <a:ext cx="8228880" cy="1142280"/>
           </a:xfrm>
           <a:prstGeom prst="rect">
             <a:avLst/>
@@ -7322,6 +5898,9 @@
                 <a:spcPct val="100000"/>
               </a:lnSpc>
               <a:buNone/>
+              <a:tabLst>
+                <a:tab algn="l" pos="0"/>
+              </a:tabLst>
             </a:pPr>
             <a:r>
               <a:rPr b="0" lang="bg-BG" sz="4400" spc="-1" strike="noStrike">
@@ -7343,7 +5922,7 @@
       </p:sp>
       <p:sp>
         <p:nvSpPr>
-          <p:cNvPr id="92" name="PlaceHolder 2"/>
+          <p:cNvPr id="77" name="PlaceHolder 2"/>
           <p:cNvSpPr>
             <a:spLocks noGrp="1"/>
           </p:cNvSpPr>
@@ -7354,7 +5933,7 @@
         <p:spPr>
           <a:xfrm>
             <a:off x="457200" y="1600200"/>
-            <a:ext cx="8229240" cy="4525560"/>
+            <a:ext cx="8228880" cy="4525200"/>
           </a:xfrm>
           <a:prstGeom prst="rect">
             <a:avLst/>
@@ -7377,6 +5956,9 @@
                 <a:spcPts val="641"/>
               </a:spcBef>
               <a:buNone/>
+              <a:tabLst>
+                <a:tab algn="l" pos="0"/>
+              </a:tabLst>
             </a:pPr>
             <a:endParaRPr b="0" lang="bg-BG" sz="3200" spc="-1" strike="noStrike">
               <a:solidFill>
@@ -7398,6 +5980,9 @@
               </a:buClr>
               <a:buFont typeface="Arial"/>
               <a:buChar char="•"/>
+              <a:tabLst>
+                <a:tab algn="l" pos="0"/>
+              </a:tabLst>
             </a:pPr>
             <a:r>
               <a:rPr b="0" lang="bg-BG" sz="3200" spc="-1" strike="noStrike">
@@ -7428,6 +6013,9 @@
               </a:buClr>
               <a:buFont typeface="Arial"/>
               <a:buChar char="•"/>
+              <a:tabLst>
+                <a:tab algn="l" pos="0"/>
+              </a:tabLst>
             </a:pPr>
             <a:r>
               <a:rPr b="0" lang="bg-BG" sz="3200" spc="-1" strike="noStrike">
@@ -7458,6 +6046,9 @@
               </a:buClr>
               <a:buFont typeface="Arial"/>
               <a:buChar char="•"/>
+              <a:tabLst>
+                <a:tab algn="l" pos="0"/>
+              </a:tabLst>
             </a:pPr>
             <a:r>
               <a:rPr b="0" lang="bg-BG" sz="3200" spc="-1" strike="noStrike">
@@ -7509,7 +6100,7 @@
       </p:grpSpPr>
       <p:sp>
         <p:nvSpPr>
-          <p:cNvPr id="93" name="PlaceHolder 1"/>
+          <p:cNvPr id="78" name="PlaceHolder 1"/>
           <p:cNvSpPr>
             <a:spLocks noGrp="1"/>
           </p:cNvSpPr>
@@ -7520,7 +6111,7 @@
         <p:spPr>
           <a:xfrm>
             <a:off x="457200" y="274680"/>
-            <a:ext cx="8229240" cy="1142640"/>
+            <a:ext cx="8228880" cy="1142280"/>
           </a:xfrm>
           <a:prstGeom prst="rect">
             <a:avLst/>
@@ -7540,6 +6131,9 @@
                 <a:spcPct val="100000"/>
               </a:lnSpc>
               <a:buNone/>
+              <a:tabLst>
+                <a:tab algn="l" pos="0"/>
+              </a:tabLst>
             </a:pPr>
             <a:r>
               <a:rPr b="0" lang="bg-BG" sz="4400" spc="-1" strike="noStrike">
@@ -7561,7 +6155,7 @@
       </p:sp>
       <p:sp>
         <p:nvSpPr>
-          <p:cNvPr id="94" name="PlaceHolder 2"/>
+          <p:cNvPr id="79" name="PlaceHolder 2"/>
           <p:cNvSpPr>
             <a:spLocks noGrp="1"/>
           </p:cNvSpPr>
@@ -7572,7 +6166,7 @@
         <p:spPr>
           <a:xfrm>
             <a:off x="457200" y="1600200"/>
-            <a:ext cx="8229240" cy="4525560"/>
+            <a:ext cx="8228880" cy="4525200"/>
           </a:xfrm>
           <a:prstGeom prst="rect">
             <a:avLst/>
@@ -7595,6 +6189,9 @@
                 <a:spcPts val="641"/>
               </a:spcBef>
               <a:buNone/>
+              <a:tabLst>
+                <a:tab algn="l" pos="0"/>
+              </a:tabLst>
             </a:pPr>
             <a:endParaRPr b="0" lang="bg-BG" sz="3200" spc="-1" strike="noStrike">
               <a:solidFill>
@@ -7616,6 +6213,9 @@
               </a:buClr>
               <a:buFont typeface="Arial"/>
               <a:buChar char="•"/>
+              <a:tabLst>
+                <a:tab algn="l" pos="0"/>
+              </a:tabLst>
             </a:pPr>
             <a:r>
               <a:rPr b="0" lang="bg-BG" sz="3200" spc="-1" strike="noStrike">
@@ -7646,6 +6246,9 @@
               </a:buClr>
               <a:buFont typeface="Arial"/>
               <a:buChar char="•"/>
+              <a:tabLst>
+                <a:tab algn="l" pos="0"/>
+              </a:tabLst>
             </a:pPr>
             <a:r>
               <a:rPr b="0" lang="bg-BG" sz="3200" spc="-1" strike="noStrike">
@@ -7676,6 +6279,9 @@
               </a:buClr>
               <a:buFont typeface="Arial"/>
               <a:buChar char="•"/>
+              <a:tabLst>
+                <a:tab algn="l" pos="0"/>
+              </a:tabLst>
             </a:pPr>
             <a:r>
               <a:rPr b="0" lang="bg-BG" sz="3200" spc="-1" strike="noStrike">
@@ -7727,7 +6333,7 @@
       </p:grpSpPr>
       <p:sp>
         <p:nvSpPr>
-          <p:cNvPr id="95" name="PlaceHolder 1"/>
+          <p:cNvPr id="80" name="PlaceHolder 1"/>
           <p:cNvSpPr>
             <a:spLocks noGrp="1"/>
           </p:cNvSpPr>
@@ -7738,7 +6344,7 @@
         <p:spPr>
           <a:xfrm>
             <a:off x="685800" y="2130480"/>
-            <a:ext cx="7772040" cy="1469520"/>
+            <a:ext cx="7771680" cy="1469160"/>
           </a:xfrm>
           <a:prstGeom prst="rect">
             <a:avLst/>
@@ -7758,6 +6364,9 @@
                 <a:spcPct val="100000"/>
               </a:lnSpc>
               <a:buNone/>
+              <a:tabLst>
+                <a:tab algn="l" pos="0"/>
+              </a:tabLst>
             </a:pPr>
             <a:r>
               <a:rPr b="0" lang="bg-BG" sz="4400" spc="-1" strike="noStrike">
@@ -7779,7 +6388,7 @@
       </p:sp>
       <p:sp>
         <p:nvSpPr>
-          <p:cNvPr id="96" name="PlaceHolder 2"/>
+          <p:cNvPr id="81" name="PlaceHolder 2"/>
           <p:cNvSpPr>
             <a:spLocks noGrp="1"/>
           </p:cNvSpPr>
@@ -7790,7 +6399,7 @@
         <p:spPr>
           <a:xfrm>
             <a:off x="1371600" y="3886200"/>
-            <a:ext cx="6400440" cy="1752120"/>
+            <a:ext cx="6400080" cy="1751760"/>
           </a:xfrm>
           <a:prstGeom prst="rect">
             <a:avLst/>
@@ -7900,7 +6509,7 @@
       </p:grpSpPr>
       <p:sp>
         <p:nvSpPr>
-          <p:cNvPr id="75" name="PlaceHolder 1"/>
+          <p:cNvPr id="60" name="PlaceHolder 1"/>
           <p:cNvSpPr>
             <a:spLocks noGrp="1"/>
           </p:cNvSpPr>
@@ -7911,7 +6520,7 @@
         <p:spPr>
           <a:xfrm>
             <a:off x="457200" y="274680"/>
-            <a:ext cx="8229240" cy="1142640"/>
+            <a:ext cx="8228880" cy="1142280"/>
           </a:xfrm>
           <a:prstGeom prst="rect">
             <a:avLst/>
@@ -7931,6 +6540,9 @@
                 <a:spcPct val="100000"/>
               </a:lnSpc>
               <a:buNone/>
+              <a:tabLst>
+                <a:tab algn="l" pos="0"/>
+              </a:tabLst>
             </a:pPr>
             <a:r>
               <a:rPr b="0" lang="bg-BG" sz="4400" spc="-1" strike="noStrike">
@@ -7952,7 +6564,7 @@
       </p:sp>
       <p:sp>
         <p:nvSpPr>
-          <p:cNvPr id="76" name="PlaceHolder 2"/>
+          <p:cNvPr id="61" name="PlaceHolder 2"/>
           <p:cNvSpPr>
             <a:spLocks noGrp="1"/>
           </p:cNvSpPr>
@@ -7963,7 +6575,7 @@
         <p:spPr>
           <a:xfrm>
             <a:off x="457200" y="1600200"/>
-            <a:ext cx="8229240" cy="4525560"/>
+            <a:ext cx="8228880" cy="4525200"/>
           </a:xfrm>
           <a:prstGeom prst="rect">
             <a:avLst/>
@@ -7986,6 +6598,9 @@
                 <a:spcPts val="641"/>
               </a:spcBef>
               <a:buNone/>
+              <a:tabLst>
+                <a:tab algn="l" pos="0"/>
+              </a:tabLst>
             </a:pPr>
             <a:endParaRPr b="0" lang="bg-BG" sz="3200" spc="-1" strike="noStrike">
               <a:solidFill>
@@ -8007,6 +6622,9 @@
               </a:buClr>
               <a:buFont typeface="Arial"/>
               <a:buChar char="•"/>
+              <a:tabLst>
+                <a:tab algn="l" pos="0"/>
+              </a:tabLst>
             </a:pPr>
             <a:r>
               <a:rPr b="0" lang="bg-BG" sz="3200" spc="-1" strike="noStrike">
@@ -8037,6 +6655,9 @@
               </a:buClr>
               <a:buFont typeface="Arial"/>
               <a:buChar char="•"/>
+              <a:tabLst>
+                <a:tab algn="l" pos="0"/>
+              </a:tabLst>
             </a:pPr>
             <a:r>
               <a:rPr b="0" lang="bg-BG" sz="3200" spc="-1" strike="noStrike">
@@ -8067,6 +6688,9 @@
               </a:buClr>
               <a:buFont typeface="Arial"/>
               <a:buChar char="•"/>
+              <a:tabLst>
+                <a:tab algn="l" pos="0"/>
+              </a:tabLst>
             </a:pPr>
             <a:r>
               <a:rPr b="0" lang="bg-BG" sz="3200" spc="-1" strike="noStrike">
@@ -8118,7 +6742,7 @@
       </p:grpSpPr>
       <p:sp>
         <p:nvSpPr>
-          <p:cNvPr id="77" name="PlaceHolder 1"/>
+          <p:cNvPr id="62" name="PlaceHolder 1"/>
           <p:cNvSpPr>
             <a:spLocks noGrp="1"/>
           </p:cNvSpPr>
@@ -8129,7 +6753,7 @@
         <p:spPr>
           <a:xfrm>
             <a:off x="457200" y="274680"/>
-            <a:ext cx="8229240" cy="1142640"/>
+            <a:ext cx="8228880" cy="1142280"/>
           </a:xfrm>
           <a:prstGeom prst="rect">
             <a:avLst/>
@@ -8149,6 +6773,9 @@
                 <a:spcPct val="100000"/>
               </a:lnSpc>
               <a:buNone/>
+              <a:tabLst>
+                <a:tab algn="l" pos="0"/>
+              </a:tabLst>
             </a:pPr>
             <a:r>
               <a:rPr b="0" lang="bg-BG" sz="4400" spc="-1" strike="noStrike">
@@ -8170,7 +6797,7 @@
       </p:sp>
       <p:sp>
         <p:nvSpPr>
-          <p:cNvPr id="78" name="PlaceHolder 2"/>
+          <p:cNvPr id="63" name="PlaceHolder 2"/>
           <p:cNvSpPr>
             <a:spLocks noGrp="1"/>
           </p:cNvSpPr>
@@ -8181,7 +6808,7 @@
         <p:spPr>
           <a:xfrm>
             <a:off x="457200" y="1600200"/>
-            <a:ext cx="8229240" cy="4525560"/>
+            <a:ext cx="8228880" cy="4525200"/>
           </a:xfrm>
           <a:prstGeom prst="rect">
             <a:avLst/>
@@ -8204,6 +6831,9 @@
                 <a:spcPts val="641"/>
               </a:spcBef>
               <a:buNone/>
+              <a:tabLst>
+                <a:tab algn="l" pos="0"/>
+              </a:tabLst>
             </a:pPr>
             <a:endParaRPr b="0" lang="bg-BG" sz="3200" spc="-1" strike="noStrike">
               <a:solidFill>
@@ -8225,6 +6855,9 @@
               </a:buClr>
               <a:buFont typeface="Arial"/>
               <a:buChar char="•"/>
+              <a:tabLst>
+                <a:tab algn="l" pos="0"/>
+              </a:tabLst>
             </a:pPr>
             <a:r>
               <a:rPr b="0" lang="bg-BG" sz="3200" spc="-1" strike="noStrike">
@@ -8255,6 +6888,9 @@
               </a:buClr>
               <a:buFont typeface="Arial"/>
               <a:buChar char="•"/>
+              <a:tabLst>
+                <a:tab algn="l" pos="0"/>
+              </a:tabLst>
             </a:pPr>
             <a:r>
               <a:rPr b="0" lang="bg-BG" sz="3200" spc="-1" strike="noStrike">
@@ -8285,6 +6921,9 @@
               </a:buClr>
               <a:buFont typeface="Arial"/>
               <a:buChar char="•"/>
+              <a:tabLst>
+                <a:tab algn="l" pos="0"/>
+              </a:tabLst>
             </a:pPr>
             <a:r>
               <a:rPr b="0" lang="bg-BG" sz="3200" spc="-1" strike="noStrike">
@@ -8315,6 +6954,9 @@
               </a:buClr>
               <a:buFont typeface="Arial"/>
               <a:buChar char="•"/>
+              <a:tabLst>
+                <a:tab algn="l" pos="0"/>
+              </a:tabLst>
             </a:pPr>
             <a:r>
               <a:rPr b="0" lang="bg-BG" sz="3200" spc="-1" strike="noStrike">
@@ -8345,6 +6987,9 @@
               </a:buClr>
               <a:buFont typeface="Arial"/>
               <a:buChar char="•"/>
+              <a:tabLst>
+                <a:tab algn="l" pos="0"/>
+              </a:tabLst>
             </a:pPr>
             <a:r>
               <a:rPr b="0" lang="bg-BG" sz="3200" spc="-1" strike="noStrike">
@@ -8396,7 +7041,7 @@
       </p:grpSpPr>
       <p:sp>
         <p:nvSpPr>
-          <p:cNvPr id="79" name="PlaceHolder 1"/>
+          <p:cNvPr id="64" name="PlaceHolder 1"/>
           <p:cNvSpPr>
             <a:spLocks noGrp="1"/>
           </p:cNvSpPr>
@@ -8407,7 +7052,7 @@
         <p:spPr>
           <a:xfrm>
             <a:off x="457200" y="274680"/>
-            <a:ext cx="8229240" cy="1142640"/>
+            <a:ext cx="8228880" cy="1142280"/>
           </a:xfrm>
           <a:prstGeom prst="rect">
             <a:avLst/>
@@ -8427,6 +7072,9 @@
                 <a:spcPct val="100000"/>
               </a:lnSpc>
               <a:buNone/>
+              <a:tabLst>
+                <a:tab algn="l" pos="0"/>
+              </a:tabLst>
             </a:pPr>
             <a:r>
               <a:rPr b="0" lang="bg-BG" sz="4400" spc="-1" strike="noStrike">
@@ -8448,7 +7096,7 @@
       </p:sp>
       <p:sp>
         <p:nvSpPr>
-          <p:cNvPr id="80" name="PlaceHolder 2"/>
+          <p:cNvPr id="65" name="PlaceHolder 2"/>
           <p:cNvSpPr>
             <a:spLocks noGrp="1"/>
           </p:cNvSpPr>
@@ -8459,7 +7107,7 @@
         <p:spPr>
           <a:xfrm>
             <a:off x="457200" y="1600200"/>
-            <a:ext cx="8229240" cy="4525560"/>
+            <a:ext cx="8228880" cy="4525200"/>
           </a:xfrm>
           <a:prstGeom prst="rect">
             <a:avLst/>
@@ -8482,6 +7130,9 @@
                 <a:spcPts val="641"/>
               </a:spcBef>
               <a:buNone/>
+              <a:tabLst>
+                <a:tab algn="l" pos="0"/>
+              </a:tabLst>
             </a:pPr>
             <a:endParaRPr b="0" lang="bg-BG" sz="3200" spc="-1" strike="noStrike">
               <a:solidFill>
@@ -8503,6 +7154,9 @@
               </a:buClr>
               <a:buFont typeface="Arial"/>
               <a:buChar char="•"/>
+              <a:tabLst>
+                <a:tab algn="l" pos="0"/>
+              </a:tabLst>
             </a:pPr>
             <a:r>
               <a:rPr b="0" lang="bg-BG" sz="3200" spc="-1" strike="noStrike">
@@ -8533,6 +7187,9 @@
               </a:buClr>
               <a:buFont typeface="Arial"/>
               <a:buChar char="•"/>
+              <a:tabLst>
+                <a:tab algn="l" pos="0"/>
+              </a:tabLst>
             </a:pPr>
             <a:r>
               <a:rPr b="0" lang="bg-BG" sz="3200" spc="-1" strike="noStrike">
@@ -8563,6 +7220,9 @@
               </a:buClr>
               <a:buFont typeface="Arial"/>
               <a:buChar char="•"/>
+              <a:tabLst>
+                <a:tab algn="l" pos="0"/>
+              </a:tabLst>
             </a:pPr>
             <a:r>
               <a:rPr b="0" lang="bg-BG" sz="3200" spc="-1" strike="noStrike">
@@ -8593,6 +7253,9 @@
               </a:buClr>
               <a:buFont typeface="Arial"/>
               <a:buChar char="•"/>
+              <a:tabLst>
+                <a:tab algn="l" pos="0"/>
+              </a:tabLst>
             </a:pPr>
             <a:r>
               <a:rPr b="0" lang="bg-BG" sz="3200" spc="-1" strike="noStrike">
@@ -8623,6 +7286,9 @@
               </a:buClr>
               <a:buFont typeface="Arial"/>
               <a:buChar char="•"/>
+              <a:tabLst>
+                <a:tab algn="l" pos="0"/>
+              </a:tabLst>
             </a:pPr>
             <a:r>
               <a:rPr b="0" lang="bg-BG" sz="3200" spc="-1" strike="noStrike">
@@ -8674,7 +7340,7 @@
       </p:grpSpPr>
       <p:sp>
         <p:nvSpPr>
-          <p:cNvPr id="81" name="PlaceHolder 1"/>
+          <p:cNvPr id="66" name="PlaceHolder 1"/>
           <p:cNvSpPr>
             <a:spLocks noGrp="1"/>
           </p:cNvSpPr>
@@ -8685,7 +7351,7 @@
         <p:spPr>
           <a:xfrm>
             <a:off x="457200" y="274680"/>
-            <a:ext cx="8229240" cy="1142640"/>
+            <a:ext cx="8228880" cy="1142280"/>
           </a:xfrm>
           <a:prstGeom prst="rect">
             <a:avLst/>
@@ -8705,6 +7371,9 @@
                 <a:spcPct val="100000"/>
               </a:lnSpc>
               <a:buNone/>
+              <a:tabLst>
+                <a:tab algn="l" pos="0"/>
+              </a:tabLst>
             </a:pPr>
             <a:r>
               <a:rPr b="0" lang="bg-BG" sz="4400" spc="-1" strike="noStrike">
@@ -8726,7 +7395,7 @@
       </p:sp>
       <p:sp>
         <p:nvSpPr>
-          <p:cNvPr id="82" name="PlaceHolder 2"/>
+          <p:cNvPr id="67" name="PlaceHolder 2"/>
           <p:cNvSpPr>
             <a:spLocks noGrp="1"/>
           </p:cNvSpPr>
@@ -8737,7 +7406,7 @@
         <p:spPr>
           <a:xfrm>
             <a:off x="457200" y="1600200"/>
-            <a:ext cx="8229240" cy="4525560"/>
+            <a:ext cx="8228880" cy="4525200"/>
           </a:xfrm>
           <a:prstGeom prst="rect">
             <a:avLst/>
@@ -8760,6 +7429,9 @@
                 <a:spcPts val="641"/>
               </a:spcBef>
               <a:buNone/>
+              <a:tabLst>
+                <a:tab algn="l" pos="0"/>
+              </a:tabLst>
             </a:pPr>
             <a:endParaRPr b="0" lang="bg-BG" sz="3200" spc="-1" strike="noStrike">
               <a:solidFill>
@@ -8781,6 +7453,9 @@
               </a:buClr>
               <a:buFont typeface="Arial"/>
               <a:buChar char="•"/>
+              <a:tabLst>
+                <a:tab algn="l" pos="0"/>
+              </a:tabLst>
             </a:pPr>
             <a:r>
               <a:rPr b="0" lang="bg-BG" sz="3200" spc="-1" strike="noStrike">
@@ -8811,6 +7486,9 @@
               </a:buClr>
               <a:buFont typeface="Arial"/>
               <a:buChar char="•"/>
+              <a:tabLst>
+                <a:tab algn="l" pos="0"/>
+              </a:tabLst>
             </a:pPr>
             <a:r>
               <a:rPr b="0" lang="bg-BG" sz="3200" spc="-1" strike="noStrike">
@@ -8841,6 +7519,9 @@
               </a:buClr>
               <a:buFont typeface="Arial"/>
               <a:buChar char="•"/>
+              <a:tabLst>
+                <a:tab algn="l" pos="0"/>
+              </a:tabLst>
             </a:pPr>
             <a:r>
               <a:rPr b="0" lang="bg-BG" sz="3200" spc="-1" strike="noStrike">
@@ -8871,6 +7552,9 @@
               </a:buClr>
               <a:buFont typeface="Arial"/>
               <a:buChar char="•"/>
+              <a:tabLst>
+                <a:tab algn="l" pos="0"/>
+              </a:tabLst>
             </a:pPr>
             <a:r>
               <a:rPr b="0" lang="bg-BG" sz="3200" spc="-1" strike="noStrike">
@@ -8922,7 +7606,7 @@
       </p:grpSpPr>
       <p:sp>
         <p:nvSpPr>
-          <p:cNvPr id="83" name="PlaceHolder 1"/>
+          <p:cNvPr id="68" name="PlaceHolder 1"/>
           <p:cNvSpPr>
             <a:spLocks noGrp="1"/>
           </p:cNvSpPr>
@@ -8933,7 +7617,7 @@
         <p:spPr>
           <a:xfrm>
             <a:off x="457200" y="274680"/>
-            <a:ext cx="8229240" cy="1142640"/>
+            <a:ext cx="8228880" cy="1142280"/>
           </a:xfrm>
           <a:prstGeom prst="rect">
             <a:avLst/>
@@ -8953,6 +7637,9 @@
                 <a:spcPct val="100000"/>
               </a:lnSpc>
               <a:buNone/>
+              <a:tabLst>
+                <a:tab algn="l" pos="0"/>
+              </a:tabLst>
             </a:pPr>
             <a:r>
               <a:rPr b="0" lang="bg-BG" sz="4400" spc="-1" strike="noStrike">
@@ -8974,7 +7661,7 @@
       </p:sp>
       <p:sp>
         <p:nvSpPr>
-          <p:cNvPr id="84" name="PlaceHolder 2"/>
+          <p:cNvPr id="69" name="PlaceHolder 2"/>
           <p:cNvSpPr>
             <a:spLocks noGrp="1"/>
           </p:cNvSpPr>
@@ -8985,7 +7672,7 @@
         <p:spPr>
           <a:xfrm>
             <a:off x="457200" y="1600200"/>
-            <a:ext cx="8229240" cy="4525560"/>
+            <a:ext cx="8228880" cy="4525200"/>
           </a:xfrm>
           <a:prstGeom prst="rect">
             <a:avLst/>
@@ -9008,6 +7695,9 @@
                 <a:spcPts val="641"/>
               </a:spcBef>
               <a:buNone/>
+              <a:tabLst>
+                <a:tab algn="l" pos="0"/>
+              </a:tabLst>
             </a:pPr>
             <a:endParaRPr b="0" lang="bg-BG" sz="3200" spc="-1" strike="noStrike">
               <a:solidFill>
@@ -9029,6 +7719,9 @@
               </a:buClr>
               <a:buFont typeface="Arial"/>
               <a:buChar char="•"/>
+              <a:tabLst>
+                <a:tab algn="l" pos="0"/>
+              </a:tabLst>
             </a:pPr>
             <a:r>
               <a:rPr b="0" lang="bg-BG" sz="3200" spc="-1" strike="noStrike">
@@ -9059,6 +7752,9 @@
               </a:buClr>
               <a:buFont typeface="Arial"/>
               <a:buChar char="•"/>
+              <a:tabLst>
+                <a:tab algn="l" pos="0"/>
+              </a:tabLst>
             </a:pPr>
             <a:r>
               <a:rPr b="0" lang="bg-BG" sz="3200" spc="-1" strike="noStrike">
@@ -9089,6 +7785,9 @@
               </a:buClr>
               <a:buFont typeface="Arial"/>
               <a:buChar char="•"/>
+              <a:tabLst>
+                <a:tab algn="l" pos="0"/>
+              </a:tabLst>
             </a:pPr>
             <a:r>
               <a:rPr b="0" lang="bg-BG" sz="3200" spc="-1" strike="noStrike">
@@ -9119,6 +7818,9 @@
               </a:buClr>
               <a:buFont typeface="Arial"/>
               <a:buChar char="•"/>
+              <a:tabLst>
+                <a:tab algn="l" pos="0"/>
+              </a:tabLst>
             </a:pPr>
             <a:r>
               <a:rPr b="0" lang="bg-BG" sz="3200" spc="-1" strike="noStrike">
@@ -9170,7 +7872,7 @@
       </p:grpSpPr>
       <p:sp>
         <p:nvSpPr>
-          <p:cNvPr id="85" name="PlaceHolder 1"/>
+          <p:cNvPr id="70" name="PlaceHolder 1"/>
           <p:cNvSpPr>
             <a:spLocks noGrp="1"/>
           </p:cNvSpPr>
@@ -9181,7 +7883,7 @@
         <p:spPr>
           <a:xfrm>
             <a:off x="457200" y="274680"/>
-            <a:ext cx="8229240" cy="1142640"/>
+            <a:ext cx="8228880" cy="1142280"/>
           </a:xfrm>
           <a:prstGeom prst="rect">
             <a:avLst/>
@@ -9201,6 +7903,9 @@
                 <a:spcPct val="100000"/>
               </a:lnSpc>
               <a:buNone/>
+              <a:tabLst>
+                <a:tab algn="l" pos="0"/>
+              </a:tabLst>
             </a:pPr>
             <a:r>
               <a:rPr b="0" lang="bg-BG" sz="4400" spc="-1" strike="noStrike">
@@ -9222,7 +7927,7 @@
       </p:sp>
       <p:sp>
         <p:nvSpPr>
-          <p:cNvPr id="86" name="PlaceHolder 2"/>
+          <p:cNvPr id="71" name="PlaceHolder 2"/>
           <p:cNvSpPr>
             <a:spLocks noGrp="1"/>
           </p:cNvSpPr>
@@ -9233,7 +7938,7 @@
         <p:spPr>
           <a:xfrm>
             <a:off x="457200" y="1600200"/>
-            <a:ext cx="8229240" cy="4525560"/>
+            <a:ext cx="8228880" cy="4525200"/>
           </a:xfrm>
           <a:prstGeom prst="rect">
             <a:avLst/>
@@ -9256,6 +7961,9 @@
                 <a:spcPts val="641"/>
               </a:spcBef>
               <a:buNone/>
+              <a:tabLst>
+                <a:tab algn="l" pos="0"/>
+              </a:tabLst>
             </a:pPr>
             <a:endParaRPr b="0" lang="bg-BG" sz="3200" spc="-1" strike="noStrike">
               <a:solidFill>
@@ -9277,6 +7985,9 @@
               </a:buClr>
               <a:buFont typeface="Arial"/>
               <a:buChar char="•"/>
+              <a:tabLst>
+                <a:tab algn="l" pos="0"/>
+              </a:tabLst>
             </a:pPr>
             <a:r>
               <a:rPr b="0" lang="bg-BG" sz="3200" spc="-1" strike="noStrike">
@@ -9307,6 +8018,9 @@
               </a:buClr>
               <a:buFont typeface="Arial"/>
               <a:buChar char="•"/>
+              <a:tabLst>
+                <a:tab algn="l" pos="0"/>
+              </a:tabLst>
             </a:pPr>
             <a:r>
               <a:rPr b="0" lang="bg-BG" sz="3200" spc="-1" strike="noStrike">
@@ -9337,6 +8051,9 @@
               </a:buClr>
               <a:buFont typeface="Arial"/>
               <a:buChar char="•"/>
+              <a:tabLst>
+                <a:tab algn="l" pos="0"/>
+              </a:tabLst>
             </a:pPr>
             <a:r>
               <a:rPr b="0" lang="bg-BG" sz="3200" spc="-1" strike="noStrike">
@@ -9367,6 +8084,9 @@
               </a:buClr>
               <a:buFont typeface="Arial"/>
               <a:buChar char="•"/>
+              <a:tabLst>
+                <a:tab algn="l" pos="0"/>
+              </a:tabLst>
             </a:pPr>
             <a:r>
               <a:rPr b="0" lang="bg-BG" sz="3200" spc="-1" strike="noStrike">
@@ -9418,7 +8138,7 @@
       </p:grpSpPr>
       <p:sp>
         <p:nvSpPr>
-          <p:cNvPr id="87" name="PlaceHolder 1"/>
+          <p:cNvPr id="72" name="PlaceHolder 1"/>
           <p:cNvSpPr>
             <a:spLocks noGrp="1"/>
           </p:cNvSpPr>
@@ -9429,7 +8149,7 @@
         <p:spPr>
           <a:xfrm>
             <a:off x="457200" y="274680"/>
-            <a:ext cx="8229240" cy="1142640"/>
+            <a:ext cx="8228880" cy="1142280"/>
           </a:xfrm>
           <a:prstGeom prst="rect">
             <a:avLst/>
@@ -9449,6 +8169,9 @@
                 <a:spcPct val="100000"/>
               </a:lnSpc>
               <a:buNone/>
+              <a:tabLst>
+                <a:tab algn="l" pos="0"/>
+              </a:tabLst>
             </a:pPr>
             <a:r>
               <a:rPr b="0" lang="bg-BG" sz="4400" spc="-1" strike="noStrike">
@@ -9470,7 +8193,7 @@
       </p:sp>
       <p:sp>
         <p:nvSpPr>
-          <p:cNvPr id="88" name="PlaceHolder 2"/>
+          <p:cNvPr id="73" name="PlaceHolder 2"/>
           <p:cNvSpPr>
             <a:spLocks noGrp="1"/>
           </p:cNvSpPr>
@@ -9481,7 +8204,7 @@
         <p:spPr>
           <a:xfrm>
             <a:off x="457200" y="1600200"/>
-            <a:ext cx="8229240" cy="4525560"/>
+            <a:ext cx="8228880" cy="4525200"/>
           </a:xfrm>
           <a:prstGeom prst="rect">
             <a:avLst/>
@@ -9504,6 +8227,9 @@
                 <a:spcPts val="641"/>
               </a:spcBef>
               <a:buNone/>
+              <a:tabLst>
+                <a:tab algn="l" pos="0"/>
+              </a:tabLst>
             </a:pPr>
             <a:endParaRPr b="0" lang="bg-BG" sz="3200" spc="-1" strike="noStrike">
               <a:solidFill>
@@ -9525,6 +8251,9 @@
               </a:buClr>
               <a:buFont typeface="Arial"/>
               <a:buChar char="•"/>
+              <a:tabLst>
+                <a:tab algn="l" pos="0"/>
+              </a:tabLst>
             </a:pPr>
             <a:r>
               <a:rPr b="0" lang="bg-BG" sz="3200" spc="-1" strike="noStrike">
@@ -9555,6 +8284,9 @@
               </a:buClr>
               <a:buFont typeface="Arial"/>
               <a:buChar char="•"/>
+              <a:tabLst>
+                <a:tab algn="l" pos="0"/>
+              </a:tabLst>
             </a:pPr>
             <a:r>
               <a:rPr b="0" lang="bg-BG" sz="3200" spc="-1" strike="noStrike">
@@ -9585,6 +8317,9 @@
               </a:buClr>
               <a:buFont typeface="Arial"/>
               <a:buChar char="•"/>
+              <a:tabLst>
+                <a:tab algn="l" pos="0"/>
+              </a:tabLst>
             </a:pPr>
             <a:r>
               <a:rPr b="0" lang="bg-BG" sz="3200" spc="-1" strike="noStrike">
@@ -9636,7 +8371,7 @@
       </p:grpSpPr>
       <p:sp>
         <p:nvSpPr>
-          <p:cNvPr id="89" name="PlaceHolder 1"/>
+          <p:cNvPr id="74" name="PlaceHolder 1"/>
           <p:cNvSpPr>
             <a:spLocks noGrp="1"/>
           </p:cNvSpPr>
@@ -9647,7 +8382,7 @@
         <p:spPr>
           <a:xfrm>
             <a:off x="457200" y="274680"/>
-            <a:ext cx="8229240" cy="1142640"/>
+            <a:ext cx="8228880" cy="1142280"/>
           </a:xfrm>
           <a:prstGeom prst="rect">
             <a:avLst/>
@@ -9667,6 +8402,9 @@
                 <a:spcPct val="100000"/>
               </a:lnSpc>
               <a:buNone/>
+              <a:tabLst>
+                <a:tab algn="l" pos="0"/>
+              </a:tabLst>
             </a:pPr>
             <a:r>
               <a:rPr b="0" lang="bg-BG" sz="4400" spc="-1" strike="noStrike">
@@ -9688,7 +8426,7 @@
       </p:sp>
       <p:sp>
         <p:nvSpPr>
-          <p:cNvPr id="90" name="PlaceHolder 2"/>
+          <p:cNvPr id="75" name="PlaceHolder 2"/>
           <p:cNvSpPr>
             <a:spLocks noGrp="1"/>
           </p:cNvSpPr>
@@ -9699,7 +8437,7 @@
         <p:spPr>
           <a:xfrm>
             <a:off x="457200" y="1600200"/>
-            <a:ext cx="8229240" cy="4525560"/>
+            <a:ext cx="8228880" cy="4525200"/>
           </a:xfrm>
           <a:prstGeom prst="rect">
             <a:avLst/>
@@ -9722,6 +8460,9 @@
                 <a:spcPts val="641"/>
               </a:spcBef>
               <a:buNone/>
+              <a:tabLst>
+                <a:tab algn="l" pos="0"/>
+              </a:tabLst>
             </a:pPr>
             <a:endParaRPr b="0" lang="bg-BG" sz="3200" spc="-1" strike="noStrike">
               <a:solidFill>
@@ -9743,6 +8484,9 @@
               </a:buClr>
               <a:buFont typeface="Arial"/>
               <a:buChar char="•"/>
+              <a:tabLst>
+                <a:tab algn="l" pos="0"/>
+              </a:tabLst>
             </a:pPr>
             <a:r>
               <a:rPr b="0" lang="bg-BG" sz="3200" spc="-1" strike="noStrike">
@@ -9773,6 +8517,9 @@
               </a:buClr>
               <a:buFont typeface="Arial"/>
               <a:buChar char="•"/>
+              <a:tabLst>
+                <a:tab algn="l" pos="0"/>
+              </a:tabLst>
             </a:pPr>
             <a:r>
               <a:rPr b="0" lang="bg-BG" sz="3200" spc="-1" strike="noStrike">
@@ -9803,6 +8550,9 @@
               </a:buClr>
               <a:buFont typeface="Arial"/>
               <a:buChar char="•"/>
+              <a:tabLst>
+                <a:tab algn="l" pos="0"/>
+              </a:tabLst>
             </a:pPr>
             <a:r>
               <a:rPr b="0" lang="bg-BG" sz="3200" spc="-1" strike="noStrike">
@@ -10352,6 +9102,112 @@
 </file>
 
 <file path=ppt/theme/theme12.xml><?xml version="1.0" encoding="utf-8"?>
+<a:theme xmlns:a="http://schemas.openxmlformats.org/drawingml/2006/main" xmlns:r="http://schemas.openxmlformats.org/officeDocument/2006/relationships" name="Office">
+  <a:themeElements>
+    <a:clrScheme name="LibreOffice">
+      <a:dk1>
+        <a:srgbClr val="000000"/>
+      </a:dk1>
+      <a:lt1>
+        <a:srgbClr val="ffffff"/>
+      </a:lt1>
+      <a:dk2>
+        <a:srgbClr val="000000"/>
+      </a:dk2>
+      <a:lt2>
+        <a:srgbClr val="ffffff"/>
+      </a:lt2>
+      <a:accent1>
+        <a:srgbClr val="18a303"/>
+      </a:accent1>
+      <a:accent2>
+        <a:srgbClr val="0369a3"/>
+      </a:accent2>
+      <a:accent3>
+        <a:srgbClr val="a33e03"/>
+      </a:accent3>
+      <a:accent4>
+        <a:srgbClr val="8e03a3"/>
+      </a:accent4>
+      <a:accent5>
+        <a:srgbClr val="c99c00"/>
+      </a:accent5>
+      <a:accent6>
+        <a:srgbClr val="c9211e"/>
+      </a:accent6>
+      <a:hlink>
+        <a:srgbClr val="0000ee"/>
+      </a:hlink>
+      <a:folHlink>
+        <a:srgbClr val="551a8b"/>
+      </a:folHlink>
+    </a:clrScheme>
+    <a:fontScheme name="Office">
+      <a:majorFont>
+        <a:latin typeface="Arial" pitchFamily="0" charset="1"/>
+        <a:ea typeface="DejaVu Sans" pitchFamily="0" charset="1"/>
+        <a:cs typeface="DejaVu Sans" pitchFamily="0" charset="1"/>
+      </a:majorFont>
+      <a:minorFont>
+        <a:latin typeface="Arial" pitchFamily="0" charset="1"/>
+        <a:ea typeface="DejaVu Sans" pitchFamily="0" charset="1"/>
+        <a:cs typeface="DejaVu Sans" pitchFamily="0" charset="1"/>
+      </a:minorFont>
+    </a:fontScheme>
+    <a:fmtScheme>
+      <a:fillStyleLst>
+        <a:solidFill>
+          <a:schemeClr val="phClr"/>
+        </a:solidFill>
+        <a:solidFill>
+          <a:schemeClr val="phClr"/>
+        </a:solidFill>
+        <a:solidFill>
+          <a:schemeClr val="phClr"/>
+        </a:solidFill>
+      </a:fillStyleLst>
+      <a:lnStyleLst>
+        <a:ln w="6350" cap="flat" cmpd="sng" algn="ctr">
+          <a:prstDash val="solid"/>
+          <a:miter/>
+        </a:ln>
+        <a:ln w="6350" cap="flat" cmpd="sng" algn="ctr">
+          <a:prstDash val="solid"/>
+          <a:miter/>
+        </a:ln>
+        <a:ln w="6350" cap="flat" cmpd="sng" algn="ctr">
+          <a:prstDash val="solid"/>
+          <a:miter/>
+        </a:ln>
+      </a:lnStyleLst>
+      <a:effectStyleLst>
+        <a:effectStyle>
+          <a:effectLst/>
+        </a:effectStyle>
+        <a:effectStyle>
+          <a:effectLst/>
+        </a:effectStyle>
+        <a:effectStyle>
+          <a:effectLst/>
+        </a:effectStyle>
+      </a:effectStyleLst>
+      <a:bgFillStyleLst>
+        <a:solidFill>
+          <a:schemeClr val="phClr"/>
+        </a:solidFill>
+        <a:solidFill>
+          <a:schemeClr val="phClr"/>
+        </a:solidFill>
+        <a:solidFill>
+          <a:schemeClr val="phClr"/>
+        </a:solidFill>
+      </a:bgFillStyleLst>
+    </a:fmtScheme>
+  </a:themeElements>
+</a:theme>
+</file>
+
+<file path=ppt/theme/theme13.xml><?xml version="1.0" encoding="utf-8"?>
 <a:theme xmlns:a="http://schemas.openxmlformats.org/drawingml/2006/main" xmlns:r="http://schemas.openxmlformats.org/officeDocument/2006/relationships" name="Office">
   <a:themeElements>
     <a:clrScheme name="LibreOffice">
